--- a/downloads/presentations/modules/lesson-17-elr-laboratory-data-quality-and-terminology-mapping.pptx
+++ b/downloads/presentations/modules/lesson-17-elr-laboratory-data-quality-and-terminology-mapping.pptx
@@ -3087,6 +3087,45 @@
           </a:p>
         </p:txBody>
       </p:sp>
+      <p:sp>
+        <p:nvSpPr>
+          <p:cNvPr id="8" name="Text 5"/>
+          <p:cNvSpPr/>
+          <p:nvPr/>
+        </p:nvSpPr>
+        <p:spPr>
+          <a:xfrm>
+            <a:off x="11137392" y="6510528"/>
+            <a:ext cx="411480" cy="201168"/>
+          </a:xfrm>
+          <a:prstGeom prst="rect">
+            <a:avLst/>
+          </a:prstGeom>
+          <a:noFill/>
+          <a:ln/>
+        </p:spPr>
+        <p:txBody>
+          <a:bodyPr wrap="square" lIns="0" tIns="0" rIns="0" bIns="0" rtlCol="0" anchor="ctr"/>
+          <a:lstStyle/>
+          <a:p>
+            <a:pPr algn="r" indent="0" marL="0">
+              <a:buNone/>
+            </a:pPr>
+            <a:r>
+              <a:rPr lang="en-US" sz="900" dirty="0">
+                <a:solidFill>
+                  <a:srgbClr val="5F7181"/>
+                </a:solidFill>
+                <a:latin typeface="Aptos" pitchFamily="34" charset="0"/>
+                <a:ea typeface="Aptos" pitchFamily="34" charset="-122"/>
+                <a:cs typeface="Aptos" pitchFamily="34" charset="-120"/>
+              </a:rPr>
+              <a:t>1</a:t>
+            </a:r>
+            <a:endParaRPr lang="en-US" sz="900" dirty="0"/>
+          </a:p>
+        </p:txBody>
+      </p:sp>
     </p:spTree>
   </p:cSld>
   <p:clrMapOvr>
@@ -3280,7 +3319,7 @@
                 <a:ea typeface="Aptos" pitchFamily="34" charset="-122"/>
                 <a:cs typeface="Aptos" pitchFamily="34" charset="-120"/>
               </a:rPr>
-              <a:t>© Paula Soper</a:t>
+              <a:t>Â© Paula Soper</a:t>
             </a:r>
             <a:endParaRPr lang="en-US" sz="800" dirty="0"/>
           </a:p>
@@ -3294,8 +3333,47 @@
         </p:nvSpPr>
         <p:spPr>
           <a:xfrm>
+            <a:off x="11137392" y="6510528"/>
+            <a:ext cx="411480" cy="201168"/>
+          </a:xfrm>
+          <a:prstGeom prst="rect">
+            <a:avLst/>
+          </a:prstGeom>
+          <a:noFill/>
+          <a:ln/>
+        </p:spPr>
+        <p:txBody>
+          <a:bodyPr wrap="square" lIns="0" tIns="0" rIns="0" bIns="0" rtlCol="0" anchor="ctr"/>
+          <a:lstStyle/>
+          <a:p>
+            <a:pPr algn="r" indent="0" marL="0">
+              <a:buNone/>
+            </a:pPr>
+            <a:r>
+              <a:rPr lang="en-US" sz="900" dirty="0">
+                <a:solidFill>
+                  <a:srgbClr val="5F7181"/>
+                </a:solidFill>
+                <a:latin typeface="Aptos" pitchFamily="34" charset="0"/>
+                <a:ea typeface="Aptos" pitchFamily="34" charset="-122"/>
+                <a:cs typeface="Aptos" pitchFamily="34" charset="-120"/>
+              </a:rPr>
+              <a:t>10</a:t>
+            </a:r>
+            <a:endParaRPr lang="en-US" sz="900" dirty="0"/>
+          </a:p>
+        </p:txBody>
+      </p:sp>
+      <p:sp>
+        <p:nvSpPr>
+          <p:cNvPr id="8" name="Text 6"/>
+          <p:cNvSpPr/>
+          <p:nvPr/>
+        </p:nvSpPr>
+        <p:spPr>
+          <a:xfrm>
             <a:off x="640080" y="658368"/>
-            <a:ext cx="10881360" cy="566928"/>
+            <a:ext cx="10881360" cy="713232"/>
           </a:xfrm>
           <a:prstGeom prst="rect">
             <a:avLst/>
@@ -3313,7 +3391,7 @@
               <a:buNone/>
             </a:pPr>
             <a:r>
-              <a:rPr lang="en-US" sz="2700" b="1" dirty="0">
+              <a:rPr lang="en-US" sz="3400" b="1" dirty="0">
                 <a:solidFill>
                   <a:srgbClr val="003A63"/>
                 </a:solidFill>
@@ -3323,20 +3401,20 @@
               </a:rPr>
               <a:t>Core Concepts Continued</a:t>
             </a:r>
-            <a:endParaRPr lang="en-US" sz="2700" dirty="0"/>
-          </a:p>
-        </p:txBody>
-      </p:sp>
-      <p:sp>
-        <p:nvSpPr>
-          <p:cNvPr id="8" name="Text 6"/>
-          <p:cNvSpPr/>
-          <p:nvPr/>
-        </p:nvSpPr>
-        <p:spPr>
-          <a:xfrm>
-            <a:off x="868680" y="1417320"/>
-            <a:ext cx="6675120" cy="4434840"/>
+            <a:endParaRPr lang="en-US" sz="3400" dirty="0"/>
+          </a:p>
+        </p:txBody>
+      </p:sp>
+      <p:sp>
+        <p:nvSpPr>
+          <p:cNvPr id="9" name="Text 7"/>
+          <p:cNvSpPr/>
+          <p:nvPr/>
+        </p:nvSpPr>
+        <p:spPr>
+          <a:xfrm>
+            <a:off x="868680" y="1508760"/>
+            <a:ext cx="6537960" cy="4160520"/>
           </a:xfrm>
           <a:prstGeom prst="rect">
             <a:avLst/>
@@ -3351,7 +3429,7 @@
           <a:lstStyle/>
           <a:p>
             <a:r>
-              <a:rPr lang="en-US" sz="1700" dirty="0">
+              <a:rPr lang="en-US" sz="2100" dirty="0">
                 <a:solidFill>
                   <a:srgbClr val="17364A"/>
                 </a:solidFill>
@@ -3361,11 +3439,11 @@
               </a:rPr>
               <a:t>UCUM.</a:t>
             </a:r>
-            <a:endParaRPr lang="en-US" sz="1700" dirty="0"/>
-          </a:p>
-          <a:p>
-            <a:r>
-              <a:rPr lang="en-US" sz="1700" dirty="0">
+            <a:endParaRPr lang="en-US" sz="2100" dirty="0"/>
+          </a:p>
+          <a:p>
+            <a:r>
+              <a:rPr lang="en-US" sz="2100" dirty="0">
                 <a:solidFill>
                   <a:srgbClr val="17364A"/>
                 </a:solidFill>
@@ -3375,11 +3453,11 @@
               </a:rPr>
               <a:t>UCUM is a standard for units of measure.</a:t>
             </a:r>
-            <a:endParaRPr lang="en-US" sz="1700" dirty="0"/>
-          </a:p>
-          <a:p>
-            <a:r>
-              <a:rPr lang="en-US" sz="1700" dirty="0">
+            <a:endParaRPr lang="en-US" sz="2100" dirty="0"/>
+          </a:p>
+          <a:p>
+            <a:r>
+              <a:rPr lang="en-US" sz="2100" dirty="0">
                 <a:solidFill>
                   <a:srgbClr val="17364A"/>
                 </a:solidFill>
@@ -3387,29 +3465,15 @@
                 <a:ea typeface="Aptos" pitchFamily="34" charset="-122"/>
                 <a:cs typeface="Aptos" pitchFamily="34" charset="-120"/>
               </a:rPr>
-              <a:t>Unit consistency is essential when interpreting quantitative results, thresholds, reference ranges, or trends.</a:t>
-            </a:r>
-            <a:endParaRPr lang="en-US" sz="1700" dirty="0"/>
-          </a:p>
-          <a:p>
-            <a:r>
-              <a:rPr lang="en-US" sz="1700" dirty="0">
-                <a:solidFill>
-                  <a:srgbClr val="17364A"/>
-                </a:solidFill>
-                <a:latin typeface="Aptos" pitchFamily="34" charset="0"/>
-                <a:ea typeface="Aptos" pitchFamily="34" charset="-122"/>
-                <a:cs typeface="Aptos" pitchFamily="34" charset="-120"/>
-              </a:rPr>
-              <a:t>Reportable condition mapping.</a:t>
-            </a:r>
-            <a:endParaRPr lang="en-US" sz="1700" dirty="0"/>
-          </a:p>
-        </p:txBody>
-      </p:sp>
-      <p:sp>
-        <p:nvSpPr>
-          <p:cNvPr id="9" name="Shape 7"/>
+              <a:t>Unit consistency is essential when interpreting quantitative results, thresholds, reference ranges, or.</a:t>
+            </a:r>
+            <a:endParaRPr lang="en-US" sz="2100" dirty="0"/>
+          </a:p>
+        </p:txBody>
+      </p:sp>
+      <p:sp>
+        <p:nvSpPr>
+          <p:cNvPr id="10" name="Shape 8"/>
           <p:cNvSpPr/>
           <p:nvPr/>
         </p:nvSpPr>
@@ -3436,14 +3500,14 @@
       </p:sp>
       <p:sp>
         <p:nvSpPr>
-          <p:cNvPr id="10" name="Text 8"/>
+          <p:cNvPr id="11" name="Text 9"/>
           <p:cNvSpPr/>
           <p:nvPr/>
         </p:nvSpPr>
         <p:spPr>
           <a:xfrm>
             <a:off x="8074152" y="1563624"/>
-            <a:ext cx="2825496" cy="201168"/>
+            <a:ext cx="2825496" cy="256032"/>
           </a:xfrm>
           <a:prstGeom prst="rect">
             <a:avLst/>
@@ -3459,7 +3523,7 @@
               <a:buNone/>
             </a:pPr>
             <a:r>
-              <a:rPr lang="en-US" sz="950" b="1" dirty="0">
+              <a:rPr lang="en-US" sz="1300" b="1" dirty="0">
                 <a:solidFill>
                   <a:srgbClr val="0068B7"/>
                 </a:solidFill>
@@ -3469,20 +3533,20 @@
               </a:rPr>
               <a:t>Key idea</a:t>
             </a:r>
-            <a:endParaRPr lang="en-US" sz="950" dirty="0"/>
-          </a:p>
-        </p:txBody>
-      </p:sp>
-      <p:sp>
-        <p:nvSpPr>
-          <p:cNvPr id="11" name="Text 9"/>
-          <p:cNvSpPr/>
-          <p:nvPr/>
-        </p:nvSpPr>
-        <p:spPr>
-          <a:xfrm>
-            <a:off x="8074152" y="1856232"/>
-            <a:ext cx="2825496" cy="1261872"/>
+            <a:endParaRPr lang="en-US" sz="1300" dirty="0"/>
+          </a:p>
+        </p:txBody>
+      </p:sp>
+      <p:sp>
+        <p:nvSpPr>
+          <p:cNvPr id="12" name="Text 10"/>
+          <p:cNvSpPr/>
+          <p:nvPr/>
+        </p:nvSpPr>
+        <p:spPr>
+          <a:xfrm>
+            <a:off x="8074152" y="1920240"/>
+            <a:ext cx="2825496" cy="1188720"/>
           </a:xfrm>
           <a:prstGeom prst="rect">
             <a:avLst/>
@@ -3500,7 +3564,7 @@
               <a:buNone/>
             </a:pPr>
             <a:r>
-              <a:rPr lang="en-US" sz="1250" dirty="0">
+              <a:rPr lang="en-US" sz="1550" dirty="0">
                 <a:solidFill>
                   <a:srgbClr val="17364A"/>
                 </a:solidFill>
@@ -3510,13 +3574,13 @@
               </a:rPr>
               <a:t>UCUM.</a:t>
             </a:r>
-            <a:endParaRPr lang="en-US" sz="1250" dirty="0"/>
-          </a:p>
-        </p:txBody>
-      </p:sp>
-      <p:sp>
-        <p:nvSpPr>
-          <p:cNvPr id="12" name="Shape 10"/>
+            <a:endParaRPr lang="en-US" sz="1550" dirty="0"/>
+          </a:p>
+        </p:txBody>
+      </p:sp>
+      <p:sp>
+        <p:nvSpPr>
+          <p:cNvPr id="13" name="Shape 11"/>
           <p:cNvSpPr/>
           <p:nvPr/>
         </p:nvSpPr>
@@ -3543,14 +3607,14 @@
       </p:sp>
       <p:sp>
         <p:nvSpPr>
-          <p:cNvPr id="13" name="Text 11"/>
+          <p:cNvPr id="14" name="Text 12"/>
           <p:cNvSpPr/>
           <p:nvPr/>
         </p:nvSpPr>
         <p:spPr>
           <a:xfrm>
             <a:off x="8074152" y="3666744"/>
-            <a:ext cx="2825496" cy="201168"/>
+            <a:ext cx="2825496" cy="256032"/>
           </a:xfrm>
           <a:prstGeom prst="rect">
             <a:avLst/>
@@ -3566,7 +3630,7 @@
               <a:buNone/>
             </a:pPr>
             <a:r>
-              <a:rPr lang="en-US" sz="950" b="1" dirty="0">
+              <a:rPr lang="en-US" sz="1300" b="1" dirty="0">
                 <a:solidFill>
                   <a:srgbClr val="0068B7"/>
                 </a:solidFill>
@@ -3576,20 +3640,20 @@
               </a:rPr>
               <a:t>Use this for</a:t>
             </a:r>
-            <a:endParaRPr lang="en-US" sz="950" dirty="0"/>
-          </a:p>
-        </p:txBody>
-      </p:sp>
-      <p:sp>
-        <p:nvSpPr>
-          <p:cNvPr id="14" name="Text 12"/>
-          <p:cNvSpPr/>
-          <p:nvPr/>
-        </p:nvSpPr>
-        <p:spPr>
-          <a:xfrm>
-            <a:off x="8074152" y="3959352"/>
-            <a:ext cx="2825496" cy="1170432"/>
+            <a:endParaRPr lang="en-US" sz="1300" dirty="0"/>
+          </a:p>
+        </p:txBody>
+      </p:sp>
+      <p:sp>
+        <p:nvSpPr>
+          <p:cNvPr id="15" name="Text 13"/>
+          <p:cNvSpPr/>
+          <p:nvPr/>
+        </p:nvSpPr>
+        <p:spPr>
+          <a:xfrm>
+            <a:off x="8074152" y="4023360"/>
+            <a:ext cx="2825496" cy="1097280"/>
           </a:xfrm>
           <a:prstGeom prst="rect">
             <a:avLst/>
@@ -3607,7 +3671,7 @@
               <a:buNone/>
             </a:pPr>
             <a:r>
-              <a:rPr lang="en-US" sz="1250" dirty="0">
+              <a:rPr lang="en-US" sz="1550" dirty="0">
                 <a:solidFill>
                   <a:srgbClr val="17364A"/>
                 </a:solidFill>
@@ -3617,7 +3681,7 @@
               </a:rPr>
               <a:t>Connect the concept to public health decisions, safeguards, documentation, or implementation work.</a:t>
             </a:r>
-            <a:endParaRPr lang="en-US" sz="1250" dirty="0"/>
+            <a:endParaRPr lang="en-US" sz="1550" dirty="0"/>
           </a:p>
         </p:txBody>
       </p:sp>
@@ -3814,7 +3878,7 @@
                 <a:ea typeface="Aptos" pitchFamily="34" charset="-122"/>
                 <a:cs typeface="Aptos" pitchFamily="34" charset="-120"/>
               </a:rPr>
-              <a:t>© Paula Soper</a:t>
+              <a:t>Â© Paula Soper</a:t>
             </a:r>
             <a:endParaRPr lang="en-US" sz="800" dirty="0"/>
           </a:p>
@@ -3822,7 +3886,46 @@
       </p:sp>
       <p:sp>
         <p:nvSpPr>
-          <p:cNvPr id="7" name="Shape 5"/>
+          <p:cNvPr id="7" name="Text 5"/>
+          <p:cNvSpPr/>
+          <p:nvPr/>
+        </p:nvSpPr>
+        <p:spPr>
+          <a:xfrm>
+            <a:off x="11137392" y="6510528"/>
+            <a:ext cx="411480" cy="201168"/>
+          </a:xfrm>
+          <a:prstGeom prst="rect">
+            <a:avLst/>
+          </a:prstGeom>
+          <a:noFill/>
+          <a:ln/>
+        </p:spPr>
+        <p:txBody>
+          <a:bodyPr wrap="square" lIns="0" tIns="0" rIns="0" bIns="0" rtlCol="0" anchor="ctr"/>
+          <a:lstStyle/>
+          <a:p>
+            <a:pPr algn="r" indent="0" marL="0">
+              <a:buNone/>
+            </a:pPr>
+            <a:r>
+              <a:rPr lang="en-US" sz="900" dirty="0">
+                <a:solidFill>
+                  <a:srgbClr val="5F7181"/>
+                </a:solidFill>
+                <a:latin typeface="Aptos" pitchFamily="34" charset="0"/>
+                <a:ea typeface="Aptos" pitchFamily="34" charset="-122"/>
+                <a:cs typeface="Aptos" pitchFamily="34" charset="-120"/>
+              </a:rPr>
+              <a:t>11</a:t>
+            </a:r>
+            <a:endParaRPr lang="en-US" sz="900" dirty="0"/>
+          </a:p>
+        </p:txBody>
+      </p:sp>
+      <p:sp>
+        <p:nvSpPr>
+          <p:cNvPr id="8" name="Shape 6"/>
           <p:cNvSpPr/>
           <p:nvPr/>
         </p:nvSpPr>
@@ -3847,7 +3950,7 @@
       </p:sp>
       <p:sp>
         <p:nvSpPr>
-          <p:cNvPr id="8" name="Text 6"/>
+          <p:cNvPr id="9" name="Text 7"/>
           <p:cNvSpPr/>
           <p:nvPr/>
         </p:nvSpPr>
@@ -3886,14 +3989,14 @@
       </p:sp>
       <p:sp>
         <p:nvSpPr>
-          <p:cNvPr id="9" name="Text 7"/>
+          <p:cNvPr id="10" name="Text 8"/>
           <p:cNvSpPr/>
           <p:nvPr/>
         </p:nvSpPr>
         <p:spPr>
           <a:xfrm>
             <a:off x="640080" y="621792"/>
-            <a:ext cx="10881360" cy="566928"/>
+            <a:ext cx="10881360" cy="713232"/>
           </a:xfrm>
           <a:prstGeom prst="rect">
             <a:avLst/>
@@ -3911,7 +4014,7 @@
               <a:buNone/>
             </a:pPr>
             <a:r>
-              <a:rPr lang="en-US" sz="2700" b="1" dirty="0">
+              <a:rPr lang="en-US" sz="3400" b="1" dirty="0">
                 <a:solidFill>
                   <a:srgbClr val="003A63"/>
                 </a:solidFill>
@@ -3921,20 +4024,20 @@
               </a:rPr>
               <a:t>Public Health Example</a:t>
             </a:r>
-            <a:endParaRPr lang="en-US" sz="2700" dirty="0"/>
-          </a:p>
-        </p:txBody>
-      </p:sp>
-      <p:sp>
-        <p:nvSpPr>
-          <p:cNvPr id="10" name="Text 8"/>
-          <p:cNvSpPr/>
-          <p:nvPr/>
-        </p:nvSpPr>
-        <p:spPr>
-          <a:xfrm>
-            <a:off x="868680" y="1417320"/>
-            <a:ext cx="6675120" cy="4434840"/>
+            <a:endParaRPr lang="en-US" sz="3400" dirty="0"/>
+          </a:p>
+        </p:txBody>
+      </p:sp>
+      <p:sp>
+        <p:nvSpPr>
+          <p:cNvPr id="11" name="Text 9"/>
+          <p:cNvSpPr/>
+          <p:nvPr/>
+        </p:nvSpPr>
+        <p:spPr>
+          <a:xfrm>
+            <a:off x="868680" y="1508760"/>
+            <a:ext cx="6537960" cy="4160520"/>
           </a:xfrm>
           <a:prstGeom prst="rect">
             <a:avLst/>
@@ -3949,7 +4052,7 @@
           <a:lstStyle/>
           <a:p>
             <a:r>
-              <a:rPr lang="en-US" sz="1700" dirty="0">
+              <a:rPr lang="en-US" sz="2100" dirty="0">
                 <a:solidFill>
                   <a:srgbClr val="17364A"/>
                 </a:solidFill>
@@ -3957,13 +4060,13 @@
                 <a:ea typeface="Aptos" pitchFamily="34" charset="-122"/>
                 <a:cs typeface="Aptos" pitchFamily="34" charset="-120"/>
               </a:rPr>
-              <a:t>An AI tool that summarizes incoming lab reports for disease investigators may need to identify the test performed, result,.</a:t>
-            </a:r>
-            <a:endParaRPr lang="en-US" sz="1700" dirty="0"/>
-          </a:p>
-          <a:p>
-            <a:r>
-              <a:rPr lang="en-US" sz="1700" dirty="0">
+              <a:t>An AI tool that summarizes incoming lab reports for disease investigators may need to identify the test.</a:t>
+            </a:r>
+            <a:endParaRPr lang="en-US" sz="2100" dirty="0"/>
+          </a:p>
+          <a:p>
+            <a:r>
+              <a:rPr lang="en-US" sz="2100" dirty="0">
                 <a:solidFill>
                   <a:srgbClr val="17364A"/>
                 </a:solidFill>
@@ -3973,11 +4076,11 @@
               </a:rPr>
               <a:t>If a local test code is mapped incorrectly, the summary may imply evidence for the wrong condition.</a:t>
             </a:r>
-            <a:endParaRPr lang="en-US" sz="1700" dirty="0"/>
-          </a:p>
-          <a:p>
-            <a:r>
-              <a:rPr lang="en-US" sz="1700" dirty="0">
+            <a:endParaRPr lang="en-US" sz="2100" dirty="0"/>
+          </a:p>
+          <a:p>
+            <a:r>
+              <a:rPr lang="en-US" sz="2100" dirty="0">
                 <a:solidFill>
                   <a:srgbClr val="17364A"/>
                 </a:solidFill>
@@ -3987,27 +4090,13 @@
               </a:rPr>
               <a:t>If units are missing, a quantitative result may be uninterpretable.</a:t>
             </a:r>
-            <a:endParaRPr lang="en-US" sz="1700" dirty="0"/>
-          </a:p>
-          <a:p>
-            <a:r>
-              <a:rPr lang="en-US" sz="1700" dirty="0">
-                <a:solidFill>
-                  <a:srgbClr val="17364A"/>
-                </a:solidFill>
-                <a:latin typeface="Aptos" pitchFamily="34" charset="0"/>
-                <a:ea typeface="Aptos" pitchFamily="34" charset="-122"/>
-                <a:cs typeface="Aptos" pitchFamily="34" charset="-120"/>
-              </a:rPr>
-              <a:t>If the specimen source is omitted, the epidemiologic meaning of the result may change.</a:t>
-            </a:r>
-            <a:endParaRPr lang="en-US" sz="1700" dirty="0"/>
-          </a:p>
-        </p:txBody>
-      </p:sp>
-      <p:sp>
-        <p:nvSpPr>
-          <p:cNvPr id="11" name="Shape 9"/>
+            <a:endParaRPr lang="en-US" sz="2100" dirty="0"/>
+          </a:p>
+        </p:txBody>
+      </p:sp>
+      <p:sp>
+        <p:nvSpPr>
+          <p:cNvPr id="12" name="Shape 10"/>
           <p:cNvSpPr/>
           <p:nvPr/>
         </p:nvSpPr>
@@ -4034,14 +4123,14 @@
       </p:sp>
       <p:sp>
         <p:nvSpPr>
-          <p:cNvPr id="12" name="Text 10"/>
+          <p:cNvPr id="13" name="Text 11"/>
           <p:cNvSpPr/>
           <p:nvPr/>
         </p:nvSpPr>
         <p:spPr>
           <a:xfrm>
             <a:off x="8074152" y="1563624"/>
-            <a:ext cx="2825496" cy="201168"/>
+            <a:ext cx="2825496" cy="256032"/>
           </a:xfrm>
           <a:prstGeom prst="rect">
             <a:avLst/>
@@ -4057,7 +4146,7 @@
               <a:buNone/>
             </a:pPr>
             <a:r>
-              <a:rPr lang="en-US" sz="950" b="1" dirty="0">
+              <a:rPr lang="en-US" sz="1300" b="1" dirty="0">
                 <a:solidFill>
                   <a:srgbClr val="0068B7"/>
                 </a:solidFill>
@@ -4067,20 +4156,20 @@
               </a:rPr>
               <a:t>Key idea</a:t>
             </a:r>
-            <a:endParaRPr lang="en-US" sz="950" dirty="0"/>
-          </a:p>
-        </p:txBody>
-      </p:sp>
-      <p:sp>
-        <p:nvSpPr>
-          <p:cNvPr id="13" name="Text 11"/>
-          <p:cNvSpPr/>
-          <p:nvPr/>
-        </p:nvSpPr>
-        <p:spPr>
-          <a:xfrm>
-            <a:off x="8074152" y="1856232"/>
-            <a:ext cx="2825496" cy="1261872"/>
+            <a:endParaRPr lang="en-US" sz="1300" dirty="0"/>
+          </a:p>
+        </p:txBody>
+      </p:sp>
+      <p:sp>
+        <p:nvSpPr>
+          <p:cNvPr id="14" name="Text 12"/>
+          <p:cNvSpPr/>
+          <p:nvPr/>
+        </p:nvSpPr>
+        <p:spPr>
+          <a:xfrm>
+            <a:off x="8074152" y="1920240"/>
+            <a:ext cx="2825496" cy="1188720"/>
           </a:xfrm>
           <a:prstGeom prst="rect">
             <a:avLst/>
@@ -4098,7 +4187,7 @@
               <a:buNone/>
             </a:pPr>
             <a:r>
-              <a:rPr lang="en-US" sz="1250" dirty="0">
+              <a:rPr lang="en-US" sz="1550" dirty="0">
                 <a:solidFill>
                   <a:srgbClr val="17364A"/>
                 </a:solidFill>
@@ -4106,15 +4195,15 @@
                 <a:ea typeface="Aptos" pitchFamily="34" charset="-122"/>
                 <a:cs typeface="Aptos" pitchFamily="34" charset="-120"/>
               </a:rPr>
-              <a:t>An AI tool that summarizes incoming lab reports for disease investigators may need to identify the test performed, result,.</a:t>
-            </a:r>
-            <a:endParaRPr lang="en-US" sz="1250" dirty="0"/>
-          </a:p>
-        </p:txBody>
-      </p:sp>
-      <p:sp>
-        <p:nvSpPr>
-          <p:cNvPr id="14" name="Shape 12"/>
+              <a:t>An AI tool that summarizes incoming lab reports for disease investigators may need to identify the test.</a:t>
+            </a:r>
+            <a:endParaRPr lang="en-US" sz="1550" dirty="0"/>
+          </a:p>
+        </p:txBody>
+      </p:sp>
+      <p:sp>
+        <p:nvSpPr>
+          <p:cNvPr id="15" name="Shape 13"/>
           <p:cNvSpPr/>
           <p:nvPr/>
         </p:nvSpPr>
@@ -4141,14 +4230,14 @@
       </p:sp>
       <p:sp>
         <p:nvSpPr>
-          <p:cNvPr id="15" name="Text 13"/>
+          <p:cNvPr id="16" name="Text 14"/>
           <p:cNvSpPr/>
           <p:nvPr/>
         </p:nvSpPr>
         <p:spPr>
           <a:xfrm>
             <a:off x="8074152" y="3666744"/>
-            <a:ext cx="2825496" cy="201168"/>
+            <a:ext cx="2825496" cy="256032"/>
           </a:xfrm>
           <a:prstGeom prst="rect">
             <a:avLst/>
@@ -4164,7 +4253,7 @@
               <a:buNone/>
             </a:pPr>
             <a:r>
-              <a:rPr lang="en-US" sz="950" b="1" dirty="0">
+              <a:rPr lang="en-US" sz="1300" b="1" dirty="0">
                 <a:solidFill>
                   <a:srgbClr val="0068B7"/>
                 </a:solidFill>
@@ -4174,20 +4263,20 @@
               </a:rPr>
               <a:t>Use this for</a:t>
             </a:r>
-            <a:endParaRPr lang="en-US" sz="950" dirty="0"/>
-          </a:p>
-        </p:txBody>
-      </p:sp>
-      <p:sp>
-        <p:nvSpPr>
-          <p:cNvPr id="16" name="Text 14"/>
-          <p:cNvSpPr/>
-          <p:nvPr/>
-        </p:nvSpPr>
-        <p:spPr>
-          <a:xfrm>
-            <a:off x="8074152" y="3959352"/>
-            <a:ext cx="2825496" cy="1170432"/>
+            <a:endParaRPr lang="en-US" sz="1300" dirty="0"/>
+          </a:p>
+        </p:txBody>
+      </p:sp>
+      <p:sp>
+        <p:nvSpPr>
+          <p:cNvPr id="17" name="Text 15"/>
+          <p:cNvSpPr/>
+          <p:nvPr/>
+        </p:nvSpPr>
+        <p:spPr>
+          <a:xfrm>
+            <a:off x="8074152" y="4023360"/>
+            <a:ext cx="2825496" cy="1097280"/>
           </a:xfrm>
           <a:prstGeom prst="rect">
             <a:avLst/>
@@ -4205,7 +4294,7 @@
               <a:buNone/>
             </a:pPr>
             <a:r>
-              <a:rPr lang="en-US" sz="1250" dirty="0">
+              <a:rPr lang="en-US" sz="1550" dirty="0">
                 <a:solidFill>
                   <a:srgbClr val="17364A"/>
                 </a:solidFill>
@@ -4215,7 +4304,7 @@
               </a:rPr>
               <a:t>Connect the concept to public health decisions, safeguards, documentation, or implementation work.</a:t>
             </a:r>
-            <a:endParaRPr lang="en-US" sz="1250" dirty="0"/>
+            <a:endParaRPr lang="en-US" sz="1550" dirty="0"/>
           </a:p>
         </p:txBody>
       </p:sp>
@@ -4412,7 +4501,7 @@
                 <a:ea typeface="Aptos" pitchFamily="34" charset="-122"/>
                 <a:cs typeface="Aptos" pitchFamily="34" charset="-120"/>
               </a:rPr>
-              <a:t>© Paula Soper</a:t>
+              <a:t>Â© Paula Soper</a:t>
             </a:r>
             <a:endParaRPr lang="en-US" sz="800" dirty="0"/>
           </a:p>
@@ -4420,7 +4509,46 @@
       </p:sp>
       <p:sp>
         <p:nvSpPr>
-          <p:cNvPr id="7" name="Shape 5"/>
+          <p:cNvPr id="7" name="Text 5"/>
+          <p:cNvSpPr/>
+          <p:nvPr/>
+        </p:nvSpPr>
+        <p:spPr>
+          <a:xfrm>
+            <a:off x="11137392" y="6510528"/>
+            <a:ext cx="411480" cy="201168"/>
+          </a:xfrm>
+          <a:prstGeom prst="rect">
+            <a:avLst/>
+          </a:prstGeom>
+          <a:noFill/>
+          <a:ln/>
+        </p:spPr>
+        <p:txBody>
+          <a:bodyPr wrap="square" lIns="0" tIns="0" rIns="0" bIns="0" rtlCol="0" anchor="ctr"/>
+          <a:lstStyle/>
+          <a:p>
+            <a:pPr algn="r" indent="0" marL="0">
+              <a:buNone/>
+            </a:pPr>
+            <a:r>
+              <a:rPr lang="en-US" sz="900" dirty="0">
+                <a:solidFill>
+                  <a:srgbClr val="5F7181"/>
+                </a:solidFill>
+                <a:latin typeface="Aptos" pitchFamily="34" charset="0"/>
+                <a:ea typeface="Aptos" pitchFamily="34" charset="-122"/>
+                <a:cs typeface="Aptos" pitchFamily="34" charset="-120"/>
+              </a:rPr>
+              <a:t>12</a:t>
+            </a:r>
+            <a:endParaRPr lang="en-US" sz="900" dirty="0"/>
+          </a:p>
+        </p:txBody>
+      </p:sp>
+      <p:sp>
+        <p:nvSpPr>
+          <p:cNvPr id="8" name="Shape 6"/>
           <p:cNvSpPr/>
           <p:nvPr/>
         </p:nvSpPr>
@@ -4445,7 +4573,7 @@
       </p:sp>
       <p:sp>
         <p:nvSpPr>
-          <p:cNvPr id="8" name="Text 6"/>
+          <p:cNvPr id="9" name="Text 7"/>
           <p:cNvSpPr/>
           <p:nvPr/>
         </p:nvSpPr>
@@ -4484,14 +4612,14 @@
       </p:sp>
       <p:sp>
         <p:nvSpPr>
-          <p:cNvPr id="9" name="Text 7"/>
+          <p:cNvPr id="10" name="Text 8"/>
           <p:cNvSpPr/>
           <p:nvPr/>
         </p:nvSpPr>
         <p:spPr>
           <a:xfrm>
             <a:off x="640080" y="621792"/>
-            <a:ext cx="10881360" cy="566928"/>
+            <a:ext cx="10881360" cy="713232"/>
           </a:xfrm>
           <a:prstGeom prst="rect">
             <a:avLst/>
@@ -4509,7 +4637,7 @@
               <a:buNone/>
             </a:pPr>
             <a:r>
-              <a:rPr lang="en-US" sz="2700" b="1" dirty="0">
+              <a:rPr lang="en-US" sz="3400" b="1" dirty="0">
                 <a:solidFill>
                   <a:srgbClr val="003A63"/>
                 </a:solidFill>
@@ -4519,20 +4647,20 @@
               </a:rPr>
               <a:t>Technical Deep Dive</a:t>
             </a:r>
-            <a:endParaRPr lang="en-US" sz="2700" dirty="0"/>
-          </a:p>
-        </p:txBody>
-      </p:sp>
-      <p:sp>
-        <p:nvSpPr>
-          <p:cNvPr id="10" name="Text 8"/>
-          <p:cNvSpPr/>
-          <p:nvPr/>
-        </p:nvSpPr>
-        <p:spPr>
-          <a:xfrm>
-            <a:off x="868680" y="1417320"/>
-            <a:ext cx="6675120" cy="4434840"/>
+            <a:endParaRPr lang="en-US" sz="3400" dirty="0"/>
+          </a:p>
+        </p:txBody>
+      </p:sp>
+      <p:sp>
+        <p:nvSpPr>
+          <p:cNvPr id="11" name="Text 9"/>
+          <p:cNvSpPr/>
+          <p:nvPr/>
+        </p:nvSpPr>
+        <p:spPr>
+          <a:xfrm>
+            <a:off x="868680" y="1508760"/>
+            <a:ext cx="6537960" cy="4160520"/>
           </a:xfrm>
           <a:prstGeom prst="rect">
             <a:avLst/>
@@ -4547,7 +4675,7 @@
           <a:lstStyle/>
           <a:p>
             <a:r>
-              <a:rPr lang="en-US" sz="1700" dirty="0">
+              <a:rPr lang="en-US" sz="2100" dirty="0">
                 <a:solidFill>
                   <a:srgbClr val="17364A"/>
                 </a:solidFill>
@@ -4557,11 +4685,11 @@
               </a:rPr>
               <a:t>Laboratory data quality begins with required fields.</a:t>
             </a:r>
-            <a:endParaRPr lang="en-US" sz="1700" dirty="0"/>
-          </a:p>
-          <a:p>
-            <a:r>
-              <a:rPr lang="en-US" sz="1700" dirty="0">
+            <a:endParaRPr lang="en-US" sz="2100" dirty="0"/>
+          </a:p>
+          <a:p>
+            <a:r>
+              <a:rPr lang="en-US" sz="2100" dirty="0">
                 <a:solidFill>
                   <a:srgbClr val="17364A"/>
                 </a:solidFill>
@@ -4569,13 +4697,13 @@
                 <a:ea typeface="Aptos" pitchFamily="34" charset="-122"/>
                 <a:cs typeface="Aptos" pitchFamily="34" charset="-120"/>
               </a:rPr>
-              <a:t>At minimum, many workflows need patient identifiers, specimen collection date, test ordered, result, result date,.</a:t>
-            </a:r>
-            <a:endParaRPr lang="en-US" sz="1700" dirty="0"/>
-          </a:p>
-          <a:p>
-            <a:r>
-              <a:rPr lang="en-US" sz="1700" dirty="0">
+              <a:t>At minimum, many workflows need patient identifiers, specimen collection date, test ordered, result,.</a:t>
+            </a:r>
+            <a:endParaRPr lang="en-US" sz="2100" dirty="0"/>
+          </a:p>
+          <a:p>
+            <a:r>
+              <a:rPr lang="en-US" sz="2100" dirty="0">
                 <a:solidFill>
                   <a:srgbClr val="17364A"/>
                 </a:solidFill>
@@ -4585,27 +4713,13 @@
               </a:rPr>
               <a:t>The exact requirements depend on the use case.</a:t>
             </a:r>
-            <a:endParaRPr lang="en-US" sz="1700" dirty="0"/>
-          </a:p>
-          <a:p>
-            <a:r>
-              <a:rPr lang="en-US" sz="1700" dirty="0">
-                <a:solidFill>
-                  <a:srgbClr val="17364A"/>
-                </a:solidFill>
-                <a:latin typeface="Aptos" pitchFamily="34" charset="0"/>
-                <a:ea typeface="Aptos" pitchFamily="34" charset="-122"/>
-                <a:cs typeface="Aptos" pitchFamily="34" charset="-120"/>
-              </a:rPr>
-              <a:t>An AI tool used for summarization may need different fields than a tool used for trend detection or case classification.</a:t>
-            </a:r>
-            <a:endParaRPr lang="en-US" sz="1700" dirty="0"/>
-          </a:p>
-        </p:txBody>
-      </p:sp>
-      <p:sp>
-        <p:nvSpPr>
-          <p:cNvPr id="11" name="Shape 9"/>
+            <a:endParaRPr lang="en-US" sz="2100" dirty="0"/>
+          </a:p>
+        </p:txBody>
+      </p:sp>
+      <p:sp>
+        <p:nvSpPr>
+          <p:cNvPr id="12" name="Shape 10"/>
           <p:cNvSpPr/>
           <p:nvPr/>
         </p:nvSpPr>
@@ -4632,14 +4746,14 @@
       </p:sp>
       <p:sp>
         <p:nvSpPr>
-          <p:cNvPr id="12" name="Text 10"/>
+          <p:cNvPr id="13" name="Text 11"/>
           <p:cNvSpPr/>
           <p:nvPr/>
         </p:nvSpPr>
         <p:spPr>
           <a:xfrm>
             <a:off x="8074152" y="1563624"/>
-            <a:ext cx="2825496" cy="201168"/>
+            <a:ext cx="2825496" cy="256032"/>
           </a:xfrm>
           <a:prstGeom prst="rect">
             <a:avLst/>
@@ -4655,7 +4769,7 @@
               <a:buNone/>
             </a:pPr>
             <a:r>
-              <a:rPr lang="en-US" sz="950" b="1" dirty="0">
+              <a:rPr lang="en-US" sz="1300" b="1" dirty="0">
                 <a:solidFill>
                   <a:srgbClr val="0068B7"/>
                 </a:solidFill>
@@ -4665,20 +4779,20 @@
               </a:rPr>
               <a:t>Key idea</a:t>
             </a:r>
-            <a:endParaRPr lang="en-US" sz="950" dirty="0"/>
-          </a:p>
-        </p:txBody>
-      </p:sp>
-      <p:sp>
-        <p:nvSpPr>
-          <p:cNvPr id="13" name="Text 11"/>
-          <p:cNvSpPr/>
-          <p:nvPr/>
-        </p:nvSpPr>
-        <p:spPr>
-          <a:xfrm>
-            <a:off x="8074152" y="1856232"/>
-            <a:ext cx="2825496" cy="1261872"/>
+            <a:endParaRPr lang="en-US" sz="1300" dirty="0"/>
+          </a:p>
+        </p:txBody>
+      </p:sp>
+      <p:sp>
+        <p:nvSpPr>
+          <p:cNvPr id="14" name="Text 12"/>
+          <p:cNvSpPr/>
+          <p:nvPr/>
+        </p:nvSpPr>
+        <p:spPr>
+          <a:xfrm>
+            <a:off x="8074152" y="1920240"/>
+            <a:ext cx="2825496" cy="1188720"/>
           </a:xfrm>
           <a:prstGeom prst="rect">
             <a:avLst/>
@@ -4696,7 +4810,7 @@
               <a:buNone/>
             </a:pPr>
             <a:r>
-              <a:rPr lang="en-US" sz="1250" dirty="0">
+              <a:rPr lang="en-US" sz="1550" dirty="0">
                 <a:solidFill>
                   <a:srgbClr val="17364A"/>
                 </a:solidFill>
@@ -4706,13 +4820,13 @@
               </a:rPr>
               <a:t>Laboratory data quality begins with required fields.</a:t>
             </a:r>
-            <a:endParaRPr lang="en-US" sz="1250" dirty="0"/>
-          </a:p>
-        </p:txBody>
-      </p:sp>
-      <p:sp>
-        <p:nvSpPr>
-          <p:cNvPr id="14" name="Shape 12"/>
+            <a:endParaRPr lang="en-US" sz="1550" dirty="0"/>
+          </a:p>
+        </p:txBody>
+      </p:sp>
+      <p:sp>
+        <p:nvSpPr>
+          <p:cNvPr id="15" name="Shape 13"/>
           <p:cNvSpPr/>
           <p:nvPr/>
         </p:nvSpPr>
@@ -4739,14 +4853,14 @@
       </p:sp>
       <p:sp>
         <p:nvSpPr>
-          <p:cNvPr id="15" name="Text 13"/>
+          <p:cNvPr id="16" name="Text 14"/>
           <p:cNvSpPr/>
           <p:nvPr/>
         </p:nvSpPr>
         <p:spPr>
           <a:xfrm>
             <a:off x="8074152" y="3666744"/>
-            <a:ext cx="2825496" cy="201168"/>
+            <a:ext cx="2825496" cy="256032"/>
           </a:xfrm>
           <a:prstGeom prst="rect">
             <a:avLst/>
@@ -4762,7 +4876,7 @@
               <a:buNone/>
             </a:pPr>
             <a:r>
-              <a:rPr lang="en-US" sz="950" b="1" dirty="0">
+              <a:rPr lang="en-US" sz="1300" b="1" dirty="0">
                 <a:solidFill>
                   <a:srgbClr val="0068B7"/>
                 </a:solidFill>
@@ -4772,20 +4886,20 @@
               </a:rPr>
               <a:t>Use this for</a:t>
             </a:r>
-            <a:endParaRPr lang="en-US" sz="950" dirty="0"/>
-          </a:p>
-        </p:txBody>
-      </p:sp>
-      <p:sp>
-        <p:nvSpPr>
-          <p:cNvPr id="16" name="Text 14"/>
-          <p:cNvSpPr/>
-          <p:nvPr/>
-        </p:nvSpPr>
-        <p:spPr>
-          <a:xfrm>
-            <a:off x="8074152" y="3959352"/>
-            <a:ext cx="2825496" cy="1170432"/>
+            <a:endParaRPr lang="en-US" sz="1300" dirty="0"/>
+          </a:p>
+        </p:txBody>
+      </p:sp>
+      <p:sp>
+        <p:nvSpPr>
+          <p:cNvPr id="17" name="Text 15"/>
+          <p:cNvSpPr/>
+          <p:nvPr/>
+        </p:nvSpPr>
+        <p:spPr>
+          <a:xfrm>
+            <a:off x="8074152" y="4023360"/>
+            <a:ext cx="2825496" cy="1097280"/>
           </a:xfrm>
           <a:prstGeom prst="rect">
             <a:avLst/>
@@ -4803,7 +4917,7 @@
               <a:buNone/>
             </a:pPr>
             <a:r>
-              <a:rPr lang="en-US" sz="1250" dirty="0">
+              <a:rPr lang="en-US" sz="1550" dirty="0">
                 <a:solidFill>
                   <a:srgbClr val="17364A"/>
                 </a:solidFill>
@@ -4813,7 +4927,7 @@
               </a:rPr>
               <a:t>Connect the concept to public health decisions, safeguards, documentation, or implementation work.</a:t>
             </a:r>
-            <a:endParaRPr lang="en-US" sz="1250" dirty="0"/>
+            <a:endParaRPr lang="en-US" sz="1550" dirty="0"/>
           </a:p>
         </p:txBody>
       </p:sp>
@@ -5010,7 +5124,7 @@
                 <a:ea typeface="Aptos" pitchFamily="34" charset="-122"/>
                 <a:cs typeface="Aptos" pitchFamily="34" charset="-120"/>
               </a:rPr>
-              <a:t>© Paula Soper</a:t>
+              <a:t>Â© Paula Soper</a:t>
             </a:r>
             <a:endParaRPr lang="en-US" sz="800" dirty="0"/>
           </a:p>
@@ -5018,7 +5132,46 @@
       </p:sp>
       <p:sp>
         <p:nvSpPr>
-          <p:cNvPr id="7" name="Shape 5"/>
+          <p:cNvPr id="7" name="Text 5"/>
+          <p:cNvSpPr/>
+          <p:nvPr/>
+        </p:nvSpPr>
+        <p:spPr>
+          <a:xfrm>
+            <a:off x="11137392" y="6510528"/>
+            <a:ext cx="411480" cy="201168"/>
+          </a:xfrm>
+          <a:prstGeom prst="rect">
+            <a:avLst/>
+          </a:prstGeom>
+          <a:noFill/>
+          <a:ln/>
+        </p:spPr>
+        <p:txBody>
+          <a:bodyPr wrap="square" lIns="0" tIns="0" rIns="0" bIns="0" rtlCol="0" anchor="ctr"/>
+          <a:lstStyle/>
+          <a:p>
+            <a:pPr algn="r" indent="0" marL="0">
+              <a:buNone/>
+            </a:pPr>
+            <a:r>
+              <a:rPr lang="en-US" sz="900" dirty="0">
+                <a:solidFill>
+                  <a:srgbClr val="5F7181"/>
+                </a:solidFill>
+                <a:latin typeface="Aptos" pitchFamily="34" charset="0"/>
+                <a:ea typeface="Aptos" pitchFamily="34" charset="-122"/>
+                <a:cs typeface="Aptos" pitchFamily="34" charset="-120"/>
+              </a:rPr>
+              <a:t>13</a:t>
+            </a:r>
+            <a:endParaRPr lang="en-US" sz="900" dirty="0"/>
+          </a:p>
+        </p:txBody>
+      </p:sp>
+      <p:sp>
+        <p:nvSpPr>
+          <p:cNvPr id="8" name="Shape 6"/>
           <p:cNvSpPr/>
           <p:nvPr/>
         </p:nvSpPr>
@@ -5043,7 +5196,7 @@
       </p:sp>
       <p:sp>
         <p:nvSpPr>
-          <p:cNvPr id="8" name="Text 6"/>
+          <p:cNvPr id="9" name="Text 7"/>
           <p:cNvSpPr/>
           <p:nvPr/>
         </p:nvSpPr>
@@ -5082,14 +5235,14 @@
       </p:sp>
       <p:sp>
         <p:nvSpPr>
-          <p:cNvPr id="9" name="Text 7"/>
+          <p:cNvPr id="10" name="Text 8"/>
           <p:cNvSpPr/>
           <p:nvPr/>
         </p:nvSpPr>
         <p:spPr>
           <a:xfrm>
             <a:off x="640080" y="621792"/>
-            <a:ext cx="10881360" cy="566928"/>
+            <a:ext cx="10881360" cy="713232"/>
           </a:xfrm>
           <a:prstGeom prst="rect">
             <a:avLst/>
@@ -5107,7 +5260,7 @@
               <a:buNone/>
             </a:pPr>
             <a:r>
-              <a:rPr lang="en-US" sz="2700" b="1" dirty="0">
+              <a:rPr lang="en-US" sz="3400" b="1" dirty="0">
                 <a:solidFill>
                   <a:srgbClr val="003A63"/>
                 </a:solidFill>
@@ -5117,20 +5270,20 @@
               </a:rPr>
               <a:t>Risks, Failure Modes, and Guardrails</a:t>
             </a:r>
-            <a:endParaRPr lang="en-US" sz="2700" dirty="0"/>
-          </a:p>
-        </p:txBody>
-      </p:sp>
-      <p:sp>
-        <p:nvSpPr>
-          <p:cNvPr id="10" name="Text 8"/>
-          <p:cNvSpPr/>
-          <p:nvPr/>
-        </p:nvSpPr>
-        <p:spPr>
-          <a:xfrm>
-            <a:off x="868680" y="1417320"/>
-            <a:ext cx="6675120" cy="4434840"/>
+            <a:endParaRPr lang="en-US" sz="3400" dirty="0"/>
+          </a:p>
+        </p:txBody>
+      </p:sp>
+      <p:sp>
+        <p:nvSpPr>
+          <p:cNvPr id="11" name="Text 9"/>
+          <p:cNvSpPr/>
+          <p:nvPr/>
+        </p:nvSpPr>
+        <p:spPr>
+          <a:xfrm>
+            <a:off x="868680" y="1508760"/>
+            <a:ext cx="6537960" cy="4160520"/>
           </a:xfrm>
           <a:prstGeom prst="rect">
             <a:avLst/>
@@ -5145,7 +5298,7 @@
           <a:lstStyle/>
           <a:p>
             <a:r>
-              <a:rPr lang="en-US" sz="1700" dirty="0">
+              <a:rPr lang="en-US" sz="2100" dirty="0">
                 <a:solidFill>
                   <a:srgbClr val="17364A"/>
                 </a:solidFill>
@@ -5155,11 +5308,11 @@
               </a:rPr>
               <a:t>Misleading standardization.</a:t>
             </a:r>
-            <a:endParaRPr lang="en-US" sz="1700" dirty="0"/>
-          </a:p>
-          <a:p>
-            <a:r>
-              <a:rPr lang="en-US" sz="1700" dirty="0">
+            <a:endParaRPr lang="en-US" sz="2100" dirty="0"/>
+          </a:p>
+          <a:p>
+            <a:r>
+              <a:rPr lang="en-US" sz="2100" dirty="0">
                 <a:solidFill>
                   <a:srgbClr val="17364A"/>
                 </a:solidFill>
@@ -5169,11 +5322,11 @@
               </a:rPr>
               <a:t>A standard code may be present but mapped incorrectly.</a:t>
             </a:r>
-            <a:endParaRPr lang="en-US" sz="1700" dirty="0"/>
-          </a:p>
-          <a:p>
-            <a:r>
-              <a:rPr lang="en-US" sz="1700" dirty="0">
+            <a:endParaRPr lang="en-US" sz="2100" dirty="0"/>
+          </a:p>
+          <a:p>
+            <a:r>
+              <a:rPr lang="en-US" sz="2100" dirty="0">
                 <a:solidFill>
                   <a:srgbClr val="17364A"/>
                 </a:solidFill>
@@ -5183,27 +5336,13 @@
               </a:rPr>
               <a:t>Guardrails include mapping review, test cases, and terminology stewardship.</a:t>
             </a:r>
-            <a:endParaRPr lang="en-US" sz="1700" dirty="0"/>
-          </a:p>
-          <a:p>
-            <a:r>
-              <a:rPr lang="en-US" sz="1700" dirty="0">
-                <a:solidFill>
-                  <a:srgbClr val="17364A"/>
-                </a:solidFill>
-                <a:latin typeface="Aptos" pitchFamily="34" charset="0"/>
-                <a:ea typeface="Aptos" pitchFamily="34" charset="-122"/>
-                <a:cs typeface="Aptos" pitchFamily="34" charset="-120"/>
-              </a:rPr>
-              <a:t>Missing units or specimen details.</a:t>
-            </a:r>
-            <a:endParaRPr lang="en-US" sz="1700" dirty="0"/>
-          </a:p>
-        </p:txBody>
-      </p:sp>
-      <p:sp>
-        <p:nvSpPr>
-          <p:cNvPr id="11" name="Shape 9"/>
+            <a:endParaRPr lang="en-US" sz="2100" dirty="0"/>
+          </a:p>
+        </p:txBody>
+      </p:sp>
+      <p:sp>
+        <p:nvSpPr>
+          <p:cNvPr id="12" name="Shape 10"/>
           <p:cNvSpPr/>
           <p:nvPr/>
         </p:nvSpPr>
@@ -5230,14 +5369,14 @@
       </p:sp>
       <p:sp>
         <p:nvSpPr>
-          <p:cNvPr id="12" name="Text 10"/>
+          <p:cNvPr id="13" name="Text 11"/>
           <p:cNvSpPr/>
           <p:nvPr/>
         </p:nvSpPr>
         <p:spPr>
           <a:xfrm>
             <a:off x="8074152" y="1563624"/>
-            <a:ext cx="2825496" cy="201168"/>
+            <a:ext cx="2825496" cy="256032"/>
           </a:xfrm>
           <a:prstGeom prst="rect">
             <a:avLst/>
@@ -5253,7 +5392,7 @@
               <a:buNone/>
             </a:pPr>
             <a:r>
-              <a:rPr lang="en-US" sz="950" b="1" dirty="0">
+              <a:rPr lang="en-US" sz="1300" b="1" dirty="0">
                 <a:solidFill>
                   <a:srgbClr val="0068B7"/>
                 </a:solidFill>
@@ -5263,20 +5402,20 @@
               </a:rPr>
               <a:t>Key idea</a:t>
             </a:r>
-            <a:endParaRPr lang="en-US" sz="950" dirty="0"/>
-          </a:p>
-        </p:txBody>
-      </p:sp>
-      <p:sp>
-        <p:nvSpPr>
-          <p:cNvPr id="13" name="Text 11"/>
-          <p:cNvSpPr/>
-          <p:nvPr/>
-        </p:nvSpPr>
-        <p:spPr>
-          <a:xfrm>
-            <a:off x="8074152" y="1856232"/>
-            <a:ext cx="2825496" cy="1261872"/>
+            <a:endParaRPr lang="en-US" sz="1300" dirty="0"/>
+          </a:p>
+        </p:txBody>
+      </p:sp>
+      <p:sp>
+        <p:nvSpPr>
+          <p:cNvPr id="14" name="Text 12"/>
+          <p:cNvSpPr/>
+          <p:nvPr/>
+        </p:nvSpPr>
+        <p:spPr>
+          <a:xfrm>
+            <a:off x="8074152" y="1920240"/>
+            <a:ext cx="2825496" cy="1188720"/>
           </a:xfrm>
           <a:prstGeom prst="rect">
             <a:avLst/>
@@ -5294,7 +5433,7 @@
               <a:buNone/>
             </a:pPr>
             <a:r>
-              <a:rPr lang="en-US" sz="1250" dirty="0">
+              <a:rPr lang="en-US" sz="1550" dirty="0">
                 <a:solidFill>
                   <a:srgbClr val="17364A"/>
                 </a:solidFill>
@@ -5304,13 +5443,13 @@
               </a:rPr>
               <a:t>Misleading standardization.</a:t>
             </a:r>
-            <a:endParaRPr lang="en-US" sz="1250" dirty="0"/>
-          </a:p>
-        </p:txBody>
-      </p:sp>
-      <p:sp>
-        <p:nvSpPr>
-          <p:cNvPr id="14" name="Shape 12"/>
+            <a:endParaRPr lang="en-US" sz="1550" dirty="0"/>
+          </a:p>
+        </p:txBody>
+      </p:sp>
+      <p:sp>
+        <p:nvSpPr>
+          <p:cNvPr id="15" name="Shape 13"/>
           <p:cNvSpPr/>
           <p:nvPr/>
         </p:nvSpPr>
@@ -5337,14 +5476,14 @@
       </p:sp>
       <p:sp>
         <p:nvSpPr>
-          <p:cNvPr id="15" name="Text 13"/>
+          <p:cNvPr id="16" name="Text 14"/>
           <p:cNvSpPr/>
           <p:nvPr/>
         </p:nvSpPr>
         <p:spPr>
           <a:xfrm>
             <a:off x="8074152" y="3666744"/>
-            <a:ext cx="2825496" cy="201168"/>
+            <a:ext cx="2825496" cy="256032"/>
           </a:xfrm>
           <a:prstGeom prst="rect">
             <a:avLst/>
@@ -5360,7 +5499,7 @@
               <a:buNone/>
             </a:pPr>
             <a:r>
-              <a:rPr lang="en-US" sz="950" b="1" dirty="0">
+              <a:rPr lang="en-US" sz="1300" b="1" dirty="0">
                 <a:solidFill>
                   <a:srgbClr val="0068B7"/>
                 </a:solidFill>
@@ -5370,20 +5509,20 @@
               </a:rPr>
               <a:t>Use this for</a:t>
             </a:r>
-            <a:endParaRPr lang="en-US" sz="950" dirty="0"/>
-          </a:p>
-        </p:txBody>
-      </p:sp>
-      <p:sp>
-        <p:nvSpPr>
-          <p:cNvPr id="16" name="Text 14"/>
-          <p:cNvSpPr/>
-          <p:nvPr/>
-        </p:nvSpPr>
-        <p:spPr>
-          <a:xfrm>
-            <a:off x="8074152" y="3959352"/>
-            <a:ext cx="2825496" cy="1170432"/>
+            <a:endParaRPr lang="en-US" sz="1300" dirty="0"/>
+          </a:p>
+        </p:txBody>
+      </p:sp>
+      <p:sp>
+        <p:nvSpPr>
+          <p:cNvPr id="17" name="Text 15"/>
+          <p:cNvSpPr/>
+          <p:nvPr/>
+        </p:nvSpPr>
+        <p:spPr>
+          <a:xfrm>
+            <a:off x="8074152" y="4023360"/>
+            <a:ext cx="2825496" cy="1097280"/>
           </a:xfrm>
           <a:prstGeom prst="rect">
             <a:avLst/>
@@ -5401,7 +5540,7 @@
               <a:buNone/>
             </a:pPr>
             <a:r>
-              <a:rPr lang="en-US" sz="1250" dirty="0">
+              <a:rPr lang="en-US" sz="1550" dirty="0">
                 <a:solidFill>
                   <a:srgbClr val="17364A"/>
                 </a:solidFill>
@@ -5411,7 +5550,7 @@
               </a:rPr>
               <a:t>Connect the concept to public health decisions, safeguards, documentation, or implementation work.</a:t>
             </a:r>
-            <a:endParaRPr lang="en-US" sz="1250" dirty="0"/>
+            <a:endParaRPr lang="en-US" sz="1550" dirty="0"/>
           </a:p>
         </p:txBody>
       </p:sp>
@@ -5608,7 +5747,7 @@
                 <a:ea typeface="Aptos" pitchFamily="34" charset="-122"/>
                 <a:cs typeface="Aptos" pitchFamily="34" charset="-120"/>
               </a:rPr>
-              <a:t>© Paula Soper</a:t>
+              <a:t>Â© Paula Soper</a:t>
             </a:r>
             <a:endParaRPr lang="en-US" sz="800" dirty="0"/>
           </a:p>
@@ -5622,8 +5761,47 @@
         </p:nvSpPr>
         <p:spPr>
           <a:xfrm>
+            <a:off x="11137392" y="6510528"/>
+            <a:ext cx="411480" cy="201168"/>
+          </a:xfrm>
+          <a:prstGeom prst="rect">
+            <a:avLst/>
+          </a:prstGeom>
+          <a:noFill/>
+          <a:ln/>
+        </p:spPr>
+        <p:txBody>
+          <a:bodyPr wrap="square" lIns="0" tIns="0" rIns="0" bIns="0" rtlCol="0" anchor="ctr"/>
+          <a:lstStyle/>
+          <a:p>
+            <a:pPr algn="r" indent="0" marL="0">
+              <a:buNone/>
+            </a:pPr>
+            <a:r>
+              <a:rPr lang="en-US" sz="900" dirty="0">
+                <a:solidFill>
+                  <a:srgbClr val="5F7181"/>
+                </a:solidFill>
+                <a:latin typeface="Aptos" pitchFamily="34" charset="0"/>
+                <a:ea typeface="Aptos" pitchFamily="34" charset="-122"/>
+                <a:cs typeface="Aptos" pitchFamily="34" charset="-120"/>
+              </a:rPr>
+              <a:t>14</a:t>
+            </a:r>
+            <a:endParaRPr lang="en-US" sz="900" dirty="0"/>
+          </a:p>
+        </p:txBody>
+      </p:sp>
+      <p:sp>
+        <p:nvSpPr>
+          <p:cNvPr id="8" name="Text 6"/>
+          <p:cNvSpPr/>
+          <p:nvPr/>
+        </p:nvSpPr>
+        <p:spPr>
+          <a:xfrm>
             <a:off x="640080" y="658368"/>
-            <a:ext cx="10881360" cy="566928"/>
+            <a:ext cx="10881360" cy="713232"/>
           </a:xfrm>
           <a:prstGeom prst="rect">
             <a:avLst/>
@@ -5641,7 +5819,7 @@
               <a:buNone/>
             </a:pPr>
             <a:r>
-              <a:rPr lang="en-US" sz="2700" b="1" dirty="0">
+              <a:rPr lang="en-US" sz="3400" b="1" dirty="0">
                 <a:solidFill>
                   <a:srgbClr val="003A63"/>
                 </a:solidFill>
@@ -5651,20 +5829,20 @@
               </a:rPr>
               <a:t>Risks, Failure Modes, and Guardrails Continued</a:t>
             </a:r>
-            <a:endParaRPr lang="en-US" sz="2700" dirty="0"/>
-          </a:p>
-        </p:txBody>
-      </p:sp>
-      <p:sp>
-        <p:nvSpPr>
-          <p:cNvPr id="8" name="Text 6"/>
-          <p:cNvSpPr/>
-          <p:nvPr/>
-        </p:nvSpPr>
-        <p:spPr>
-          <a:xfrm>
-            <a:off x="868680" y="1417320"/>
-            <a:ext cx="6675120" cy="4434840"/>
+            <a:endParaRPr lang="en-US" sz="3400" dirty="0"/>
+          </a:p>
+        </p:txBody>
+      </p:sp>
+      <p:sp>
+        <p:nvSpPr>
+          <p:cNvPr id="9" name="Text 7"/>
+          <p:cNvSpPr/>
+          <p:nvPr/>
+        </p:nvSpPr>
+        <p:spPr>
+          <a:xfrm>
+            <a:off x="868680" y="1508760"/>
+            <a:ext cx="6537960" cy="4160520"/>
           </a:xfrm>
           <a:prstGeom prst="rect">
             <a:avLst/>
@@ -5679,7 +5857,7 @@
           <a:lstStyle/>
           <a:p>
             <a:r>
-              <a:rPr lang="en-US" sz="1700" dirty="0">
+              <a:rPr lang="en-US" sz="2100" dirty="0">
                 <a:solidFill>
                   <a:srgbClr val="17364A"/>
                 </a:solidFill>
@@ -5689,11 +5867,11 @@
               </a:rPr>
               <a:t>Reporting pattern changes.</a:t>
             </a:r>
-            <a:endParaRPr lang="en-US" sz="1700" dirty="0"/>
-          </a:p>
-          <a:p>
-            <a:r>
-              <a:rPr lang="en-US" sz="1700" dirty="0">
+            <a:endParaRPr lang="en-US" sz="2100" dirty="0"/>
+          </a:p>
+          <a:p>
+            <a:r>
+              <a:rPr lang="en-US" sz="2100" dirty="0">
                 <a:solidFill>
                   <a:srgbClr val="17364A"/>
                 </a:solidFill>
@@ -5703,11 +5881,11 @@
               </a:rPr>
               <a:t>Lab reporting changes may look like disease changes.</a:t>
             </a:r>
-            <a:endParaRPr lang="en-US" sz="1700" dirty="0"/>
-          </a:p>
-          <a:p>
-            <a:r>
-              <a:rPr lang="en-US" sz="1700" dirty="0">
+            <a:endParaRPr lang="en-US" sz="2100" dirty="0"/>
+          </a:p>
+          <a:p>
+            <a:r>
+              <a:rPr lang="en-US" sz="2100" dirty="0">
                 <a:solidFill>
                   <a:srgbClr val="17364A"/>
                 </a:solidFill>
@@ -5717,13 +5895,13 @@
               </a:rPr>
               <a:t>Guardrails include volume monitoring, partner change logs, and anomaly review.</a:t>
             </a:r>
-            <a:endParaRPr lang="en-US" sz="1700" dirty="0"/>
-          </a:p>
-        </p:txBody>
-      </p:sp>
-      <p:sp>
-        <p:nvSpPr>
-          <p:cNvPr id="9" name="Shape 7"/>
+            <a:endParaRPr lang="en-US" sz="2100" dirty="0"/>
+          </a:p>
+        </p:txBody>
+      </p:sp>
+      <p:sp>
+        <p:nvSpPr>
+          <p:cNvPr id="10" name="Shape 8"/>
           <p:cNvSpPr/>
           <p:nvPr/>
         </p:nvSpPr>
@@ -5750,14 +5928,14 @@
       </p:sp>
       <p:sp>
         <p:nvSpPr>
-          <p:cNvPr id="10" name="Text 8"/>
+          <p:cNvPr id="11" name="Text 9"/>
           <p:cNvSpPr/>
           <p:nvPr/>
         </p:nvSpPr>
         <p:spPr>
           <a:xfrm>
             <a:off x="8074152" y="1563624"/>
-            <a:ext cx="2825496" cy="201168"/>
+            <a:ext cx="2825496" cy="256032"/>
           </a:xfrm>
           <a:prstGeom prst="rect">
             <a:avLst/>
@@ -5773,7 +5951,7 @@
               <a:buNone/>
             </a:pPr>
             <a:r>
-              <a:rPr lang="en-US" sz="950" b="1" dirty="0">
+              <a:rPr lang="en-US" sz="1300" b="1" dirty="0">
                 <a:solidFill>
                   <a:srgbClr val="0068B7"/>
                 </a:solidFill>
@@ -5783,20 +5961,20 @@
               </a:rPr>
               <a:t>Key idea</a:t>
             </a:r>
-            <a:endParaRPr lang="en-US" sz="950" dirty="0"/>
-          </a:p>
-        </p:txBody>
-      </p:sp>
-      <p:sp>
-        <p:nvSpPr>
-          <p:cNvPr id="11" name="Text 9"/>
-          <p:cNvSpPr/>
-          <p:nvPr/>
-        </p:nvSpPr>
-        <p:spPr>
-          <a:xfrm>
-            <a:off x="8074152" y="1856232"/>
-            <a:ext cx="2825496" cy="1261872"/>
+            <a:endParaRPr lang="en-US" sz="1300" dirty="0"/>
+          </a:p>
+        </p:txBody>
+      </p:sp>
+      <p:sp>
+        <p:nvSpPr>
+          <p:cNvPr id="12" name="Text 10"/>
+          <p:cNvSpPr/>
+          <p:nvPr/>
+        </p:nvSpPr>
+        <p:spPr>
+          <a:xfrm>
+            <a:off x="8074152" y="1920240"/>
+            <a:ext cx="2825496" cy="1188720"/>
           </a:xfrm>
           <a:prstGeom prst="rect">
             <a:avLst/>
@@ -5814,7 +5992,7 @@
               <a:buNone/>
             </a:pPr>
             <a:r>
-              <a:rPr lang="en-US" sz="1250" dirty="0">
+              <a:rPr lang="en-US" sz="1550" dirty="0">
                 <a:solidFill>
                   <a:srgbClr val="17364A"/>
                 </a:solidFill>
@@ -5824,13 +6002,13 @@
               </a:rPr>
               <a:t>Reporting pattern changes.</a:t>
             </a:r>
-            <a:endParaRPr lang="en-US" sz="1250" dirty="0"/>
-          </a:p>
-        </p:txBody>
-      </p:sp>
-      <p:sp>
-        <p:nvSpPr>
-          <p:cNvPr id="12" name="Shape 10"/>
+            <a:endParaRPr lang="en-US" sz="1550" dirty="0"/>
+          </a:p>
+        </p:txBody>
+      </p:sp>
+      <p:sp>
+        <p:nvSpPr>
+          <p:cNvPr id="13" name="Shape 11"/>
           <p:cNvSpPr/>
           <p:nvPr/>
         </p:nvSpPr>
@@ -5857,14 +6035,14 @@
       </p:sp>
       <p:sp>
         <p:nvSpPr>
-          <p:cNvPr id="13" name="Text 11"/>
+          <p:cNvPr id="14" name="Text 12"/>
           <p:cNvSpPr/>
           <p:nvPr/>
         </p:nvSpPr>
         <p:spPr>
           <a:xfrm>
             <a:off x="8074152" y="3666744"/>
-            <a:ext cx="2825496" cy="201168"/>
+            <a:ext cx="2825496" cy="256032"/>
           </a:xfrm>
           <a:prstGeom prst="rect">
             <a:avLst/>
@@ -5880,7 +6058,7 @@
               <a:buNone/>
             </a:pPr>
             <a:r>
-              <a:rPr lang="en-US" sz="950" b="1" dirty="0">
+              <a:rPr lang="en-US" sz="1300" b="1" dirty="0">
                 <a:solidFill>
                   <a:srgbClr val="0068B7"/>
                 </a:solidFill>
@@ -5890,20 +6068,20 @@
               </a:rPr>
               <a:t>Use this for</a:t>
             </a:r>
-            <a:endParaRPr lang="en-US" sz="950" dirty="0"/>
-          </a:p>
-        </p:txBody>
-      </p:sp>
-      <p:sp>
-        <p:nvSpPr>
-          <p:cNvPr id="14" name="Text 12"/>
-          <p:cNvSpPr/>
-          <p:nvPr/>
-        </p:nvSpPr>
-        <p:spPr>
-          <a:xfrm>
-            <a:off x="8074152" y="3959352"/>
-            <a:ext cx="2825496" cy="1170432"/>
+            <a:endParaRPr lang="en-US" sz="1300" dirty="0"/>
+          </a:p>
+        </p:txBody>
+      </p:sp>
+      <p:sp>
+        <p:nvSpPr>
+          <p:cNvPr id="15" name="Text 13"/>
+          <p:cNvSpPr/>
+          <p:nvPr/>
+        </p:nvSpPr>
+        <p:spPr>
+          <a:xfrm>
+            <a:off x="8074152" y="4023360"/>
+            <a:ext cx="2825496" cy="1097280"/>
           </a:xfrm>
           <a:prstGeom prst="rect">
             <a:avLst/>
@@ -5921,7 +6099,7 @@
               <a:buNone/>
             </a:pPr>
             <a:r>
-              <a:rPr lang="en-US" sz="1250" dirty="0">
+              <a:rPr lang="en-US" sz="1550" dirty="0">
                 <a:solidFill>
                   <a:srgbClr val="17364A"/>
                 </a:solidFill>
@@ -5931,7 +6109,7 @@
               </a:rPr>
               <a:t>Connect the concept to public health decisions, safeguards, documentation, or implementation work.</a:t>
             </a:r>
-            <a:endParaRPr lang="en-US" sz="1250" dirty="0"/>
+            <a:endParaRPr lang="en-US" sz="1550" dirty="0"/>
           </a:p>
         </p:txBody>
       </p:sp>
@@ -6128,7 +6306,7 @@
                 <a:ea typeface="Aptos" pitchFamily="34" charset="-122"/>
                 <a:cs typeface="Aptos" pitchFamily="34" charset="-120"/>
               </a:rPr>
-              <a:t>© Paula Soper</a:t>
+              <a:t>Â© Paula Soper</a:t>
             </a:r>
             <a:endParaRPr lang="en-US" sz="800" dirty="0"/>
           </a:p>
@@ -6136,7 +6314,46 @@
       </p:sp>
       <p:sp>
         <p:nvSpPr>
-          <p:cNvPr id="7" name="Shape 5"/>
+          <p:cNvPr id="7" name="Text 5"/>
+          <p:cNvSpPr/>
+          <p:nvPr/>
+        </p:nvSpPr>
+        <p:spPr>
+          <a:xfrm>
+            <a:off x="11137392" y="6510528"/>
+            <a:ext cx="411480" cy="201168"/>
+          </a:xfrm>
+          <a:prstGeom prst="rect">
+            <a:avLst/>
+          </a:prstGeom>
+          <a:noFill/>
+          <a:ln/>
+        </p:spPr>
+        <p:txBody>
+          <a:bodyPr wrap="square" lIns="0" tIns="0" rIns="0" bIns="0" rtlCol="0" anchor="ctr"/>
+          <a:lstStyle/>
+          <a:p>
+            <a:pPr algn="r" indent="0" marL="0">
+              <a:buNone/>
+            </a:pPr>
+            <a:r>
+              <a:rPr lang="en-US" sz="900" dirty="0">
+                <a:solidFill>
+                  <a:srgbClr val="5F7181"/>
+                </a:solidFill>
+                <a:latin typeface="Aptos" pitchFamily="34" charset="0"/>
+                <a:ea typeface="Aptos" pitchFamily="34" charset="-122"/>
+                <a:cs typeface="Aptos" pitchFamily="34" charset="-120"/>
+              </a:rPr>
+              <a:t>15</a:t>
+            </a:r>
+            <a:endParaRPr lang="en-US" sz="900" dirty="0"/>
+          </a:p>
+        </p:txBody>
+      </p:sp>
+      <p:sp>
+        <p:nvSpPr>
+          <p:cNvPr id="8" name="Shape 6"/>
           <p:cNvSpPr/>
           <p:nvPr/>
         </p:nvSpPr>
@@ -6161,7 +6378,7 @@
       </p:sp>
       <p:sp>
         <p:nvSpPr>
-          <p:cNvPr id="8" name="Text 6"/>
+          <p:cNvPr id="9" name="Text 7"/>
           <p:cNvSpPr/>
           <p:nvPr/>
         </p:nvSpPr>
@@ -6200,14 +6417,14 @@
       </p:sp>
       <p:sp>
         <p:nvSpPr>
-          <p:cNvPr id="9" name="Text 7"/>
+          <p:cNvPr id="10" name="Text 8"/>
           <p:cNvSpPr/>
           <p:nvPr/>
         </p:nvSpPr>
         <p:spPr>
           <a:xfrm>
             <a:off x="640080" y="621792"/>
-            <a:ext cx="10881360" cy="566928"/>
+            <a:ext cx="10881360" cy="713232"/>
           </a:xfrm>
           <a:prstGeom prst="rect">
             <a:avLst/>
@@ -6225,7 +6442,7 @@
               <a:buNone/>
             </a:pPr>
             <a:r>
-              <a:rPr lang="en-US" sz="2700" b="1" dirty="0">
+              <a:rPr lang="en-US" sz="3400" b="1" dirty="0">
                 <a:solidFill>
                   <a:srgbClr val="003A63"/>
                 </a:solidFill>
@@ -6235,20 +6452,20 @@
               </a:rPr>
               <a:t>Application to AI-Supported Workflows</a:t>
             </a:r>
-            <a:endParaRPr lang="en-US" sz="2700" dirty="0"/>
-          </a:p>
-        </p:txBody>
-      </p:sp>
-      <p:sp>
-        <p:nvSpPr>
-          <p:cNvPr id="10" name="Text 8"/>
-          <p:cNvSpPr/>
-          <p:nvPr/>
-        </p:nvSpPr>
-        <p:spPr>
-          <a:xfrm>
-            <a:off x="868680" y="1417320"/>
-            <a:ext cx="6675120" cy="4434840"/>
+            <a:endParaRPr lang="en-US" sz="3400" dirty="0"/>
+          </a:p>
+        </p:txBody>
+      </p:sp>
+      <p:sp>
+        <p:nvSpPr>
+          <p:cNvPr id="11" name="Text 9"/>
+          <p:cNvSpPr/>
+          <p:nvPr/>
+        </p:nvSpPr>
+        <p:spPr>
+          <a:xfrm>
+            <a:off x="868680" y="1508760"/>
+            <a:ext cx="6537960" cy="4160520"/>
           </a:xfrm>
           <a:prstGeom prst="rect">
             <a:avLst/>
@@ -6263,7 +6480,7 @@
           <a:lstStyle/>
           <a:p>
             <a:r>
-              <a:rPr lang="en-US" sz="1700" dirty="0">
+              <a:rPr lang="en-US" sz="2100" dirty="0">
                 <a:solidFill>
                   <a:srgbClr val="17364A"/>
                 </a:solidFill>
@@ -6271,13 +6488,13 @@
                 <a:ea typeface="Aptos" pitchFamily="34" charset="-122"/>
                 <a:cs typeface="Aptos" pitchFamily="34" charset="-120"/>
               </a:rPr>
-              <a:t>Generative AI may draft lab summaries, but it should preserve source values and avoid interpreting uncertain or missing.</a:t>
-            </a:r>
-            <a:endParaRPr lang="en-US" sz="1700" dirty="0"/>
-          </a:p>
-          <a:p>
-            <a:r>
-              <a:rPr lang="en-US" sz="1700" dirty="0">
+              <a:t>Generative AI may draft lab summaries, but it should preserve source values and avoid interpreting.</a:t>
+            </a:r>
+            <a:endParaRPr lang="en-US" sz="2100" dirty="0"/>
+          </a:p>
+          <a:p>
+            <a:r>
+              <a:rPr lang="en-US" sz="2100" dirty="0">
                 <a:solidFill>
                   <a:srgbClr val="17364A"/>
                 </a:solidFill>
@@ -6285,13 +6502,13 @@
                 <a:ea typeface="Aptos" pitchFamily="34" charset="-122"/>
                 <a:cs typeface="Aptos" pitchFamily="34" charset="-120"/>
               </a:rPr>
-              <a:t>Predictive analytics may use lab trends, but model monitoring must distinguish reporting artifacts from disease patterns.</a:t>
-            </a:r>
-            <a:endParaRPr lang="en-US" sz="1700" dirty="0"/>
-          </a:p>
-          <a:p>
-            <a:r>
-              <a:rPr lang="en-US" sz="1700" dirty="0">
+              <a:t>Predictive analytics may use lab trends, but model monitoring must distinguish reporting artifacts from.</a:t>
+            </a:r>
+            <a:endParaRPr lang="en-US" sz="2100" dirty="0"/>
+          </a:p>
+          <a:p>
+            <a:r>
+              <a:rPr lang="en-US" sz="2100" dirty="0">
                 <a:solidFill>
                   <a:srgbClr val="17364A"/>
                 </a:solidFill>
@@ -6301,27 +6518,13 @@
               </a:rPr>
               <a:t>NLP may interpret free-text results, but extraction accuracy must be validated.</a:t>
             </a:r>
-            <a:endParaRPr lang="en-US" sz="1700" dirty="0"/>
-          </a:p>
-          <a:p>
-            <a:r>
-              <a:rPr lang="en-US" sz="1700" dirty="0">
-                <a:solidFill>
-                  <a:srgbClr val="17364A"/>
-                </a:solidFill>
-                <a:latin typeface="Aptos" pitchFamily="34" charset="0"/>
-                <a:ea typeface="Aptos" pitchFamily="34" charset="-122"/>
-                <a:cs typeface="Aptos" pitchFamily="34" charset="-120"/>
-              </a:rPr>
-              <a:t>Agentic workflows that trigger tasks from lab results require clear thresholds and human escalation for ambiguous results.</a:t>
-            </a:r>
-            <a:endParaRPr lang="en-US" sz="1700" dirty="0"/>
-          </a:p>
-        </p:txBody>
-      </p:sp>
-      <p:sp>
-        <p:nvSpPr>
-          <p:cNvPr id="11" name="Shape 9"/>
+            <a:endParaRPr lang="en-US" sz="2100" dirty="0"/>
+          </a:p>
+        </p:txBody>
+      </p:sp>
+      <p:sp>
+        <p:nvSpPr>
+          <p:cNvPr id="12" name="Shape 10"/>
           <p:cNvSpPr/>
           <p:nvPr/>
         </p:nvSpPr>
@@ -6348,14 +6551,14 @@
       </p:sp>
       <p:sp>
         <p:nvSpPr>
-          <p:cNvPr id="12" name="Text 10"/>
+          <p:cNvPr id="13" name="Text 11"/>
           <p:cNvSpPr/>
           <p:nvPr/>
         </p:nvSpPr>
         <p:spPr>
           <a:xfrm>
             <a:off x="8074152" y="1563624"/>
-            <a:ext cx="2825496" cy="201168"/>
+            <a:ext cx="2825496" cy="256032"/>
           </a:xfrm>
           <a:prstGeom prst="rect">
             <a:avLst/>
@@ -6371,7 +6574,7 @@
               <a:buNone/>
             </a:pPr>
             <a:r>
-              <a:rPr lang="en-US" sz="950" b="1" dirty="0">
+              <a:rPr lang="en-US" sz="1300" b="1" dirty="0">
                 <a:solidFill>
                   <a:srgbClr val="0068B7"/>
                 </a:solidFill>
@@ -6381,20 +6584,20 @@
               </a:rPr>
               <a:t>Key idea</a:t>
             </a:r>
-            <a:endParaRPr lang="en-US" sz="950" dirty="0"/>
-          </a:p>
-        </p:txBody>
-      </p:sp>
-      <p:sp>
-        <p:nvSpPr>
-          <p:cNvPr id="13" name="Text 11"/>
-          <p:cNvSpPr/>
-          <p:nvPr/>
-        </p:nvSpPr>
-        <p:spPr>
-          <a:xfrm>
-            <a:off x="8074152" y="1856232"/>
-            <a:ext cx="2825496" cy="1261872"/>
+            <a:endParaRPr lang="en-US" sz="1300" dirty="0"/>
+          </a:p>
+        </p:txBody>
+      </p:sp>
+      <p:sp>
+        <p:nvSpPr>
+          <p:cNvPr id="14" name="Text 12"/>
+          <p:cNvSpPr/>
+          <p:nvPr/>
+        </p:nvSpPr>
+        <p:spPr>
+          <a:xfrm>
+            <a:off x="8074152" y="1920240"/>
+            <a:ext cx="2825496" cy="1188720"/>
           </a:xfrm>
           <a:prstGeom prst="rect">
             <a:avLst/>
@@ -6412,7 +6615,7 @@
               <a:buNone/>
             </a:pPr>
             <a:r>
-              <a:rPr lang="en-US" sz="1250" dirty="0">
+              <a:rPr lang="en-US" sz="1550" dirty="0">
                 <a:solidFill>
                   <a:srgbClr val="17364A"/>
                 </a:solidFill>
@@ -6420,15 +6623,15 @@
                 <a:ea typeface="Aptos" pitchFamily="34" charset="-122"/>
                 <a:cs typeface="Aptos" pitchFamily="34" charset="-120"/>
               </a:rPr>
-              <a:t>Generative AI may draft lab summaries, but it should preserve source values and avoid interpreting uncertain or missing.</a:t>
-            </a:r>
-            <a:endParaRPr lang="en-US" sz="1250" dirty="0"/>
-          </a:p>
-        </p:txBody>
-      </p:sp>
-      <p:sp>
-        <p:nvSpPr>
-          <p:cNvPr id="14" name="Shape 12"/>
+              <a:t>Generative AI may draft lab summaries, but it should preserve source values and avoid interpreting.</a:t>
+            </a:r>
+            <a:endParaRPr lang="en-US" sz="1550" dirty="0"/>
+          </a:p>
+        </p:txBody>
+      </p:sp>
+      <p:sp>
+        <p:nvSpPr>
+          <p:cNvPr id="15" name="Shape 13"/>
           <p:cNvSpPr/>
           <p:nvPr/>
         </p:nvSpPr>
@@ -6455,14 +6658,14 @@
       </p:sp>
       <p:sp>
         <p:nvSpPr>
-          <p:cNvPr id="15" name="Text 13"/>
+          <p:cNvPr id="16" name="Text 14"/>
           <p:cNvSpPr/>
           <p:nvPr/>
         </p:nvSpPr>
         <p:spPr>
           <a:xfrm>
             <a:off x="8074152" y="3666744"/>
-            <a:ext cx="2825496" cy="201168"/>
+            <a:ext cx="2825496" cy="256032"/>
           </a:xfrm>
           <a:prstGeom prst="rect">
             <a:avLst/>
@@ -6478,7 +6681,7 @@
               <a:buNone/>
             </a:pPr>
             <a:r>
-              <a:rPr lang="en-US" sz="950" b="1" dirty="0">
+              <a:rPr lang="en-US" sz="1300" b="1" dirty="0">
                 <a:solidFill>
                   <a:srgbClr val="0068B7"/>
                 </a:solidFill>
@@ -6488,20 +6691,20 @@
               </a:rPr>
               <a:t>Use this for</a:t>
             </a:r>
-            <a:endParaRPr lang="en-US" sz="950" dirty="0"/>
-          </a:p>
-        </p:txBody>
-      </p:sp>
-      <p:sp>
-        <p:nvSpPr>
-          <p:cNvPr id="16" name="Text 14"/>
-          <p:cNvSpPr/>
-          <p:nvPr/>
-        </p:nvSpPr>
-        <p:spPr>
-          <a:xfrm>
-            <a:off x="8074152" y="3959352"/>
-            <a:ext cx="2825496" cy="1170432"/>
+            <a:endParaRPr lang="en-US" sz="1300" dirty="0"/>
+          </a:p>
+        </p:txBody>
+      </p:sp>
+      <p:sp>
+        <p:nvSpPr>
+          <p:cNvPr id="17" name="Text 15"/>
+          <p:cNvSpPr/>
+          <p:nvPr/>
+        </p:nvSpPr>
+        <p:spPr>
+          <a:xfrm>
+            <a:off x="8074152" y="4023360"/>
+            <a:ext cx="2825496" cy="1097280"/>
           </a:xfrm>
           <a:prstGeom prst="rect">
             <a:avLst/>
@@ -6519,7 +6722,7 @@
               <a:buNone/>
             </a:pPr>
             <a:r>
-              <a:rPr lang="en-US" sz="1250" dirty="0">
+              <a:rPr lang="en-US" sz="1550" dirty="0">
                 <a:solidFill>
                   <a:srgbClr val="17364A"/>
                 </a:solidFill>
@@ -6529,7 +6732,7 @@
               </a:rPr>
               <a:t>Connect the concept to public health decisions, safeguards, documentation, or implementation work.</a:t>
             </a:r>
-            <a:endParaRPr lang="en-US" sz="1250" dirty="0"/>
+            <a:endParaRPr lang="en-US" sz="1550" dirty="0"/>
           </a:p>
         </p:txBody>
       </p:sp>
@@ -6726,7 +6929,7 @@
                 <a:ea typeface="Aptos" pitchFamily="34" charset="-122"/>
                 <a:cs typeface="Aptos" pitchFamily="34" charset="-120"/>
               </a:rPr>
-              <a:t>© Paula Soper</a:t>
+              <a:t>Â© Paula Soper</a:t>
             </a:r>
             <a:endParaRPr lang="en-US" sz="800" dirty="0"/>
           </a:p>
@@ -6734,7 +6937,46 @@
       </p:sp>
       <p:sp>
         <p:nvSpPr>
-          <p:cNvPr id="7" name="Shape 5"/>
+          <p:cNvPr id="7" name="Text 5"/>
+          <p:cNvSpPr/>
+          <p:nvPr/>
+        </p:nvSpPr>
+        <p:spPr>
+          <a:xfrm>
+            <a:off x="11137392" y="6510528"/>
+            <a:ext cx="411480" cy="201168"/>
+          </a:xfrm>
+          <a:prstGeom prst="rect">
+            <a:avLst/>
+          </a:prstGeom>
+          <a:noFill/>
+          <a:ln/>
+        </p:spPr>
+        <p:txBody>
+          <a:bodyPr wrap="square" lIns="0" tIns="0" rIns="0" bIns="0" rtlCol="0" anchor="ctr"/>
+          <a:lstStyle/>
+          <a:p>
+            <a:pPr algn="r" indent="0" marL="0">
+              <a:buNone/>
+            </a:pPr>
+            <a:r>
+              <a:rPr lang="en-US" sz="900" dirty="0">
+                <a:solidFill>
+                  <a:srgbClr val="5F7181"/>
+                </a:solidFill>
+                <a:latin typeface="Aptos" pitchFamily="34" charset="0"/>
+                <a:ea typeface="Aptos" pitchFamily="34" charset="-122"/>
+                <a:cs typeface="Aptos" pitchFamily="34" charset="-120"/>
+              </a:rPr>
+              <a:t>16</a:t>
+            </a:r>
+            <a:endParaRPr lang="en-US" sz="900" dirty="0"/>
+          </a:p>
+        </p:txBody>
+      </p:sp>
+      <p:sp>
+        <p:nvSpPr>
+          <p:cNvPr id="8" name="Shape 6"/>
           <p:cNvSpPr/>
           <p:nvPr/>
         </p:nvSpPr>
@@ -6759,7 +7001,7 @@
       </p:sp>
       <p:sp>
         <p:nvSpPr>
-          <p:cNvPr id="8" name="Text 6"/>
+          <p:cNvPr id="9" name="Text 7"/>
           <p:cNvSpPr/>
           <p:nvPr/>
         </p:nvSpPr>
@@ -6798,14 +7040,14 @@
       </p:sp>
       <p:sp>
         <p:nvSpPr>
-          <p:cNvPr id="9" name="Text 7"/>
+          <p:cNvPr id="10" name="Text 8"/>
           <p:cNvSpPr/>
           <p:nvPr/>
         </p:nvSpPr>
         <p:spPr>
           <a:xfrm>
             <a:off x="640080" y="621792"/>
-            <a:ext cx="10881360" cy="566928"/>
+            <a:ext cx="10881360" cy="713232"/>
           </a:xfrm>
           <a:prstGeom prst="rect">
             <a:avLst/>
@@ -6823,7 +7065,7 @@
               <a:buNone/>
             </a:pPr>
             <a:r>
-              <a:rPr lang="en-US" sz="2700" b="1" dirty="0">
+              <a:rPr lang="en-US" sz="3400" b="1" dirty="0">
                 <a:solidFill>
                   <a:srgbClr val="003A63"/>
                 </a:solidFill>
@@ -6833,20 +7075,20 @@
               </a:rPr>
               <a:t>Reflection Questions</a:t>
             </a:r>
-            <a:endParaRPr lang="en-US" sz="2700" dirty="0"/>
-          </a:p>
-        </p:txBody>
-      </p:sp>
-      <p:sp>
-        <p:nvSpPr>
-          <p:cNvPr id="10" name="Text 8"/>
-          <p:cNvSpPr/>
-          <p:nvPr/>
-        </p:nvSpPr>
-        <p:spPr>
-          <a:xfrm>
-            <a:off x="868680" y="1417320"/>
-            <a:ext cx="6675120" cy="4434840"/>
+            <a:endParaRPr lang="en-US" sz="3400" dirty="0"/>
+          </a:p>
+        </p:txBody>
+      </p:sp>
+      <p:sp>
+        <p:nvSpPr>
+          <p:cNvPr id="11" name="Text 9"/>
+          <p:cNvSpPr/>
+          <p:nvPr/>
+        </p:nvSpPr>
+        <p:spPr>
+          <a:xfrm>
+            <a:off x="868680" y="1508760"/>
+            <a:ext cx="6537960" cy="4160520"/>
           </a:xfrm>
           <a:prstGeom prst="rect">
             <a:avLst/>
@@ -6861,7 +7103,7 @@
           <a:lstStyle/>
           <a:p>
             <a:r>
-              <a:rPr lang="en-US" sz="1700" dirty="0">
+              <a:rPr lang="en-US" sz="2100" dirty="0">
                 <a:solidFill>
                   <a:srgbClr val="17364A"/>
                 </a:solidFill>
@@ -6871,11 +7113,11 @@
               </a:rPr>
               <a:t>Which laboratory data quality issues most often affect your surveillance workflows?</a:t>
             </a:r>
-            <a:endParaRPr lang="en-US" sz="1700" dirty="0"/>
-          </a:p>
-          <a:p>
-            <a:r>
-              <a:rPr lang="en-US" sz="1700" dirty="0">
+            <a:endParaRPr lang="en-US" sz="2100" dirty="0"/>
+          </a:p>
+          <a:p>
+            <a:r>
+              <a:rPr lang="en-US" sz="2100" dirty="0">
                 <a:solidFill>
                   <a:srgbClr val="17364A"/>
                 </a:solidFill>
@@ -6885,11 +7127,11 @@
               </a:rPr>
               <a:t>Which local codes require mapping before data can be used reliably?</a:t>
             </a:r>
-            <a:endParaRPr lang="en-US" sz="1700" dirty="0"/>
-          </a:p>
-          <a:p>
-            <a:r>
-              <a:rPr lang="en-US" sz="1700" dirty="0">
+            <a:endParaRPr lang="en-US" sz="2100" dirty="0"/>
+          </a:p>
+          <a:p>
+            <a:r>
+              <a:rPr lang="en-US" sz="2100" dirty="0">
                 <a:solidFill>
                   <a:srgbClr val="17364A"/>
                 </a:solidFill>
@@ -6899,13 +7141,13 @@
               </a:rPr>
               <a:t>Are test-result pairs consistently represented?</a:t>
             </a:r>
-            <a:endParaRPr lang="en-US" sz="1700" dirty="0"/>
-          </a:p>
-        </p:txBody>
-      </p:sp>
-      <p:sp>
-        <p:nvSpPr>
-          <p:cNvPr id="11" name="Shape 9"/>
+            <a:endParaRPr lang="en-US" sz="2100" dirty="0"/>
+          </a:p>
+        </p:txBody>
+      </p:sp>
+      <p:sp>
+        <p:nvSpPr>
+          <p:cNvPr id="12" name="Shape 10"/>
           <p:cNvSpPr/>
           <p:nvPr/>
         </p:nvSpPr>
@@ -6932,14 +7174,14 @@
       </p:sp>
       <p:sp>
         <p:nvSpPr>
-          <p:cNvPr id="12" name="Text 10"/>
+          <p:cNvPr id="13" name="Text 11"/>
           <p:cNvSpPr/>
           <p:nvPr/>
         </p:nvSpPr>
         <p:spPr>
           <a:xfrm>
             <a:off x="8074152" y="1563624"/>
-            <a:ext cx="2825496" cy="201168"/>
+            <a:ext cx="2825496" cy="256032"/>
           </a:xfrm>
           <a:prstGeom prst="rect">
             <a:avLst/>
@@ -6955,7 +7197,7 @@
               <a:buNone/>
             </a:pPr>
             <a:r>
-              <a:rPr lang="en-US" sz="950" b="1" dirty="0">
+              <a:rPr lang="en-US" sz="1300" b="1" dirty="0">
                 <a:solidFill>
                   <a:srgbClr val="0068B7"/>
                 </a:solidFill>
@@ -6965,20 +7207,20 @@
               </a:rPr>
               <a:t>Key idea</a:t>
             </a:r>
-            <a:endParaRPr lang="en-US" sz="950" dirty="0"/>
-          </a:p>
-        </p:txBody>
-      </p:sp>
-      <p:sp>
-        <p:nvSpPr>
-          <p:cNvPr id="13" name="Text 11"/>
-          <p:cNvSpPr/>
-          <p:nvPr/>
-        </p:nvSpPr>
-        <p:spPr>
-          <a:xfrm>
-            <a:off x="8074152" y="1856232"/>
-            <a:ext cx="2825496" cy="1261872"/>
+            <a:endParaRPr lang="en-US" sz="1300" dirty="0"/>
+          </a:p>
+        </p:txBody>
+      </p:sp>
+      <p:sp>
+        <p:nvSpPr>
+          <p:cNvPr id="14" name="Text 12"/>
+          <p:cNvSpPr/>
+          <p:nvPr/>
+        </p:nvSpPr>
+        <p:spPr>
+          <a:xfrm>
+            <a:off x="8074152" y="1920240"/>
+            <a:ext cx="2825496" cy="1188720"/>
           </a:xfrm>
           <a:prstGeom prst="rect">
             <a:avLst/>
@@ -6996,7 +7238,7 @@
               <a:buNone/>
             </a:pPr>
             <a:r>
-              <a:rPr lang="en-US" sz="1250" dirty="0">
+              <a:rPr lang="en-US" sz="1550" dirty="0">
                 <a:solidFill>
                   <a:srgbClr val="17364A"/>
                 </a:solidFill>
@@ -7006,13 +7248,13 @@
               </a:rPr>
               <a:t>Which laboratory data quality issues most often affect your surveillance workflows?</a:t>
             </a:r>
-            <a:endParaRPr lang="en-US" sz="1250" dirty="0"/>
-          </a:p>
-        </p:txBody>
-      </p:sp>
-      <p:sp>
-        <p:nvSpPr>
-          <p:cNvPr id="14" name="Shape 12"/>
+            <a:endParaRPr lang="en-US" sz="1550" dirty="0"/>
+          </a:p>
+        </p:txBody>
+      </p:sp>
+      <p:sp>
+        <p:nvSpPr>
+          <p:cNvPr id="15" name="Shape 13"/>
           <p:cNvSpPr/>
           <p:nvPr/>
         </p:nvSpPr>
@@ -7039,14 +7281,14 @@
       </p:sp>
       <p:sp>
         <p:nvSpPr>
-          <p:cNvPr id="15" name="Text 13"/>
+          <p:cNvPr id="16" name="Text 14"/>
           <p:cNvSpPr/>
           <p:nvPr/>
         </p:nvSpPr>
         <p:spPr>
           <a:xfrm>
             <a:off x="8074152" y="3666744"/>
-            <a:ext cx="2825496" cy="201168"/>
+            <a:ext cx="2825496" cy="256032"/>
           </a:xfrm>
           <a:prstGeom prst="rect">
             <a:avLst/>
@@ -7062,7 +7304,7 @@
               <a:buNone/>
             </a:pPr>
             <a:r>
-              <a:rPr lang="en-US" sz="950" b="1" dirty="0">
+              <a:rPr lang="en-US" sz="1300" b="1" dirty="0">
                 <a:solidFill>
                   <a:srgbClr val="0068B7"/>
                 </a:solidFill>
@@ -7072,20 +7314,20 @@
               </a:rPr>
               <a:t>Use this for</a:t>
             </a:r>
-            <a:endParaRPr lang="en-US" sz="950" dirty="0"/>
-          </a:p>
-        </p:txBody>
-      </p:sp>
-      <p:sp>
-        <p:nvSpPr>
-          <p:cNvPr id="16" name="Text 14"/>
-          <p:cNvSpPr/>
-          <p:nvPr/>
-        </p:nvSpPr>
-        <p:spPr>
-          <a:xfrm>
-            <a:off x="8074152" y="3959352"/>
-            <a:ext cx="2825496" cy="1170432"/>
+            <a:endParaRPr lang="en-US" sz="1300" dirty="0"/>
+          </a:p>
+        </p:txBody>
+      </p:sp>
+      <p:sp>
+        <p:nvSpPr>
+          <p:cNvPr id="17" name="Text 15"/>
+          <p:cNvSpPr/>
+          <p:nvPr/>
+        </p:nvSpPr>
+        <p:spPr>
+          <a:xfrm>
+            <a:off x="8074152" y="4023360"/>
+            <a:ext cx="2825496" cy="1097280"/>
           </a:xfrm>
           <a:prstGeom prst="rect">
             <a:avLst/>
@@ -7103,7 +7345,7 @@
               <a:buNone/>
             </a:pPr>
             <a:r>
-              <a:rPr lang="en-US" sz="1250" dirty="0">
+              <a:rPr lang="en-US" sz="1550" dirty="0">
                 <a:solidFill>
                   <a:srgbClr val="17364A"/>
                 </a:solidFill>
@@ -7113,7 +7355,7 @@
               </a:rPr>
               <a:t>Connect the concept to public health decisions, safeguards, documentation, or implementation work.</a:t>
             </a:r>
-            <a:endParaRPr lang="en-US" sz="1250" dirty="0"/>
+            <a:endParaRPr lang="en-US" sz="1550" dirty="0"/>
           </a:p>
         </p:txBody>
       </p:sp>
@@ -7310,7 +7552,7 @@
                 <a:ea typeface="Aptos" pitchFamily="34" charset="-122"/>
                 <a:cs typeface="Aptos" pitchFamily="34" charset="-120"/>
               </a:rPr>
-              <a:t>© Paula Soper</a:t>
+              <a:t>Â© Paula Soper</a:t>
             </a:r>
             <a:endParaRPr lang="en-US" sz="800" dirty="0"/>
           </a:p>
@@ -7324,8 +7566,47 @@
         </p:nvSpPr>
         <p:spPr>
           <a:xfrm>
+            <a:off x="11137392" y="6510528"/>
+            <a:ext cx="411480" cy="201168"/>
+          </a:xfrm>
+          <a:prstGeom prst="rect">
+            <a:avLst/>
+          </a:prstGeom>
+          <a:noFill/>
+          <a:ln/>
+        </p:spPr>
+        <p:txBody>
+          <a:bodyPr wrap="square" lIns="0" tIns="0" rIns="0" bIns="0" rtlCol="0" anchor="ctr"/>
+          <a:lstStyle/>
+          <a:p>
+            <a:pPr algn="r" indent="0" marL="0">
+              <a:buNone/>
+            </a:pPr>
+            <a:r>
+              <a:rPr lang="en-US" sz="900" dirty="0">
+                <a:solidFill>
+                  <a:srgbClr val="5F7181"/>
+                </a:solidFill>
+                <a:latin typeface="Aptos" pitchFamily="34" charset="0"/>
+                <a:ea typeface="Aptos" pitchFamily="34" charset="-122"/>
+                <a:cs typeface="Aptos" pitchFamily="34" charset="-120"/>
+              </a:rPr>
+              <a:t>17</a:t>
+            </a:r>
+            <a:endParaRPr lang="en-US" sz="900" dirty="0"/>
+          </a:p>
+        </p:txBody>
+      </p:sp>
+      <p:sp>
+        <p:nvSpPr>
+          <p:cNvPr id="8" name="Text 6"/>
+          <p:cNvSpPr/>
+          <p:nvPr/>
+        </p:nvSpPr>
+        <p:spPr>
+          <a:xfrm>
             <a:off x="640080" y="658368"/>
-            <a:ext cx="10881360" cy="566928"/>
+            <a:ext cx="10881360" cy="713232"/>
           </a:xfrm>
           <a:prstGeom prst="rect">
             <a:avLst/>
@@ -7343,7 +7624,7 @@
               <a:buNone/>
             </a:pPr>
             <a:r>
-              <a:rPr lang="en-US" sz="2700" b="1" dirty="0">
+              <a:rPr lang="en-US" sz="3400" b="1" dirty="0">
                 <a:solidFill>
                   <a:srgbClr val="003A63"/>
                 </a:solidFill>
@@ -7353,20 +7634,20 @@
               </a:rPr>
               <a:t>Reflection Questions Continued</a:t>
             </a:r>
-            <a:endParaRPr lang="en-US" sz="2700" dirty="0"/>
-          </a:p>
-        </p:txBody>
-      </p:sp>
-      <p:sp>
-        <p:nvSpPr>
-          <p:cNvPr id="8" name="Text 6"/>
-          <p:cNvSpPr/>
-          <p:nvPr/>
-        </p:nvSpPr>
-        <p:spPr>
-          <a:xfrm>
-            <a:off x="868680" y="1417320"/>
-            <a:ext cx="6675120" cy="4434840"/>
+            <a:endParaRPr lang="en-US" sz="3400" dirty="0"/>
+          </a:p>
+        </p:txBody>
+      </p:sp>
+      <p:sp>
+        <p:nvSpPr>
+          <p:cNvPr id="9" name="Text 7"/>
+          <p:cNvSpPr/>
+          <p:nvPr/>
+        </p:nvSpPr>
+        <p:spPr>
+          <a:xfrm>
+            <a:off x="868680" y="1508760"/>
+            <a:ext cx="6537960" cy="4160520"/>
           </a:xfrm>
           <a:prstGeom prst="rect">
             <a:avLst/>
@@ -7381,7 +7662,7 @@
           <a:lstStyle/>
           <a:p>
             <a:r>
-              <a:rPr lang="en-US" sz="1700" dirty="0">
+              <a:rPr lang="en-US" sz="2100" dirty="0">
                 <a:solidFill>
                   <a:srgbClr val="17364A"/>
                 </a:solidFill>
@@ -7391,11 +7672,11 @@
               </a:rPr>
               <a:t>Which missing fields would make AI summarization unsafe?</a:t>
             </a:r>
-            <a:endParaRPr lang="en-US" sz="1700" dirty="0"/>
-          </a:p>
-          <a:p>
-            <a:r>
-              <a:rPr lang="en-US" sz="1700" dirty="0">
+            <a:endParaRPr lang="en-US" sz="2100" dirty="0"/>
+          </a:p>
+          <a:p>
+            <a:r>
+              <a:rPr lang="en-US" sz="2100" dirty="0">
                 <a:solidFill>
                   <a:srgbClr val="17364A"/>
                 </a:solidFill>
@@ -7405,13 +7686,13 @@
               </a:rPr>
               <a:t>How would staff detect a reporting change that affects AI outputs?</a:t>
             </a:r>
-            <a:endParaRPr lang="en-US" sz="1700" dirty="0"/>
-          </a:p>
-        </p:txBody>
-      </p:sp>
-      <p:sp>
-        <p:nvSpPr>
-          <p:cNvPr id="9" name="Shape 7"/>
+            <a:endParaRPr lang="en-US" sz="2100" dirty="0"/>
+          </a:p>
+        </p:txBody>
+      </p:sp>
+      <p:sp>
+        <p:nvSpPr>
+          <p:cNvPr id="10" name="Shape 8"/>
           <p:cNvSpPr/>
           <p:nvPr/>
         </p:nvSpPr>
@@ -7438,14 +7719,14 @@
       </p:sp>
       <p:sp>
         <p:nvSpPr>
-          <p:cNvPr id="10" name="Text 8"/>
+          <p:cNvPr id="11" name="Text 9"/>
           <p:cNvSpPr/>
           <p:nvPr/>
         </p:nvSpPr>
         <p:spPr>
           <a:xfrm>
             <a:off x="8074152" y="1563624"/>
-            <a:ext cx="2825496" cy="201168"/>
+            <a:ext cx="2825496" cy="256032"/>
           </a:xfrm>
           <a:prstGeom prst="rect">
             <a:avLst/>
@@ -7461,7 +7742,7 @@
               <a:buNone/>
             </a:pPr>
             <a:r>
-              <a:rPr lang="en-US" sz="950" b="1" dirty="0">
+              <a:rPr lang="en-US" sz="1300" b="1" dirty="0">
                 <a:solidFill>
                   <a:srgbClr val="0068B7"/>
                 </a:solidFill>
@@ -7471,20 +7752,20 @@
               </a:rPr>
               <a:t>Key idea</a:t>
             </a:r>
-            <a:endParaRPr lang="en-US" sz="950" dirty="0"/>
-          </a:p>
-        </p:txBody>
-      </p:sp>
-      <p:sp>
-        <p:nvSpPr>
-          <p:cNvPr id="11" name="Text 9"/>
-          <p:cNvSpPr/>
-          <p:nvPr/>
-        </p:nvSpPr>
-        <p:spPr>
-          <a:xfrm>
-            <a:off x="8074152" y="1856232"/>
-            <a:ext cx="2825496" cy="1261872"/>
+            <a:endParaRPr lang="en-US" sz="1300" dirty="0"/>
+          </a:p>
+        </p:txBody>
+      </p:sp>
+      <p:sp>
+        <p:nvSpPr>
+          <p:cNvPr id="12" name="Text 10"/>
+          <p:cNvSpPr/>
+          <p:nvPr/>
+        </p:nvSpPr>
+        <p:spPr>
+          <a:xfrm>
+            <a:off x="8074152" y="1920240"/>
+            <a:ext cx="2825496" cy="1188720"/>
           </a:xfrm>
           <a:prstGeom prst="rect">
             <a:avLst/>
@@ -7502,7 +7783,7 @@
               <a:buNone/>
             </a:pPr>
             <a:r>
-              <a:rPr lang="en-US" sz="1250" dirty="0">
+              <a:rPr lang="en-US" sz="1550" dirty="0">
                 <a:solidFill>
                   <a:srgbClr val="17364A"/>
                 </a:solidFill>
@@ -7512,13 +7793,13 @@
               </a:rPr>
               <a:t>Which missing fields would make AI summarization unsafe?</a:t>
             </a:r>
-            <a:endParaRPr lang="en-US" sz="1250" dirty="0"/>
-          </a:p>
-        </p:txBody>
-      </p:sp>
-      <p:sp>
-        <p:nvSpPr>
-          <p:cNvPr id="12" name="Shape 10"/>
+            <a:endParaRPr lang="en-US" sz="1550" dirty="0"/>
+          </a:p>
+        </p:txBody>
+      </p:sp>
+      <p:sp>
+        <p:nvSpPr>
+          <p:cNvPr id="13" name="Shape 11"/>
           <p:cNvSpPr/>
           <p:nvPr/>
         </p:nvSpPr>
@@ -7545,14 +7826,14 @@
       </p:sp>
       <p:sp>
         <p:nvSpPr>
-          <p:cNvPr id="13" name="Text 11"/>
+          <p:cNvPr id="14" name="Text 12"/>
           <p:cNvSpPr/>
           <p:nvPr/>
         </p:nvSpPr>
         <p:spPr>
           <a:xfrm>
             <a:off x="8074152" y="3666744"/>
-            <a:ext cx="2825496" cy="201168"/>
+            <a:ext cx="2825496" cy="256032"/>
           </a:xfrm>
           <a:prstGeom prst="rect">
             <a:avLst/>
@@ -7568,7 +7849,7 @@
               <a:buNone/>
             </a:pPr>
             <a:r>
-              <a:rPr lang="en-US" sz="950" b="1" dirty="0">
+              <a:rPr lang="en-US" sz="1300" b="1" dirty="0">
                 <a:solidFill>
                   <a:srgbClr val="0068B7"/>
                 </a:solidFill>
@@ -7578,20 +7859,20 @@
               </a:rPr>
               <a:t>Use this for</a:t>
             </a:r>
-            <a:endParaRPr lang="en-US" sz="950" dirty="0"/>
-          </a:p>
-        </p:txBody>
-      </p:sp>
-      <p:sp>
-        <p:nvSpPr>
-          <p:cNvPr id="14" name="Text 12"/>
-          <p:cNvSpPr/>
-          <p:nvPr/>
-        </p:nvSpPr>
-        <p:spPr>
-          <a:xfrm>
-            <a:off x="8074152" y="3959352"/>
-            <a:ext cx="2825496" cy="1170432"/>
+            <a:endParaRPr lang="en-US" sz="1300" dirty="0"/>
+          </a:p>
+        </p:txBody>
+      </p:sp>
+      <p:sp>
+        <p:nvSpPr>
+          <p:cNvPr id="15" name="Text 13"/>
+          <p:cNvSpPr/>
+          <p:nvPr/>
+        </p:nvSpPr>
+        <p:spPr>
+          <a:xfrm>
+            <a:off x="8074152" y="4023360"/>
+            <a:ext cx="2825496" cy="1097280"/>
           </a:xfrm>
           <a:prstGeom prst="rect">
             <a:avLst/>
@@ -7609,7 +7890,7 @@
               <a:buNone/>
             </a:pPr>
             <a:r>
-              <a:rPr lang="en-US" sz="1250" dirty="0">
+              <a:rPr lang="en-US" sz="1550" dirty="0">
                 <a:solidFill>
                   <a:srgbClr val="17364A"/>
                 </a:solidFill>
@@ -7619,7 +7900,7 @@
               </a:rPr>
               <a:t>Connect the concept to public health decisions, safeguards, documentation, or implementation work.</a:t>
             </a:r>
-            <a:endParaRPr lang="en-US" sz="1250" dirty="0"/>
+            <a:endParaRPr lang="en-US" sz="1550" dirty="0"/>
           </a:p>
         </p:txBody>
       </p:sp>
@@ -7816,7 +8097,7 @@
                 <a:ea typeface="Aptos" pitchFamily="34" charset="-122"/>
                 <a:cs typeface="Aptos" pitchFamily="34" charset="-120"/>
               </a:rPr>
-              <a:t>© Paula Soper</a:t>
+              <a:t>Â© Paula Soper</a:t>
             </a:r>
             <a:endParaRPr lang="en-US" sz="800" dirty="0"/>
           </a:p>
@@ -7824,7 +8105,46 @@
       </p:sp>
       <p:sp>
         <p:nvSpPr>
-          <p:cNvPr id="7" name="Shape 5"/>
+          <p:cNvPr id="7" name="Text 5"/>
+          <p:cNvSpPr/>
+          <p:nvPr/>
+        </p:nvSpPr>
+        <p:spPr>
+          <a:xfrm>
+            <a:off x="11137392" y="6510528"/>
+            <a:ext cx="411480" cy="201168"/>
+          </a:xfrm>
+          <a:prstGeom prst="rect">
+            <a:avLst/>
+          </a:prstGeom>
+          <a:noFill/>
+          <a:ln/>
+        </p:spPr>
+        <p:txBody>
+          <a:bodyPr wrap="square" lIns="0" tIns="0" rIns="0" bIns="0" rtlCol="0" anchor="ctr"/>
+          <a:lstStyle/>
+          <a:p>
+            <a:pPr algn="r" indent="0" marL="0">
+              <a:buNone/>
+            </a:pPr>
+            <a:r>
+              <a:rPr lang="en-US" sz="900" dirty="0">
+                <a:solidFill>
+                  <a:srgbClr val="5F7181"/>
+                </a:solidFill>
+                <a:latin typeface="Aptos" pitchFamily="34" charset="0"/>
+                <a:ea typeface="Aptos" pitchFamily="34" charset="-122"/>
+                <a:cs typeface="Aptos" pitchFamily="34" charset="-120"/>
+              </a:rPr>
+              <a:t>18</a:t>
+            </a:r>
+            <a:endParaRPr lang="en-US" sz="900" dirty="0"/>
+          </a:p>
+        </p:txBody>
+      </p:sp>
+      <p:sp>
+        <p:nvSpPr>
+          <p:cNvPr id="8" name="Shape 6"/>
           <p:cNvSpPr/>
           <p:nvPr/>
         </p:nvSpPr>
@@ -7849,7 +8169,7 @@
       </p:sp>
       <p:sp>
         <p:nvSpPr>
-          <p:cNvPr id="8" name="Text 6"/>
+          <p:cNvPr id="9" name="Text 7"/>
           <p:cNvSpPr/>
           <p:nvPr/>
         </p:nvSpPr>
@@ -7888,14 +8208,14 @@
       </p:sp>
       <p:sp>
         <p:nvSpPr>
-          <p:cNvPr id="9" name="Text 7"/>
+          <p:cNvPr id="10" name="Text 8"/>
           <p:cNvSpPr/>
           <p:nvPr/>
         </p:nvSpPr>
         <p:spPr>
           <a:xfrm>
             <a:off x="640080" y="621792"/>
-            <a:ext cx="10881360" cy="566928"/>
+            <a:ext cx="10881360" cy="713232"/>
           </a:xfrm>
           <a:prstGeom prst="rect">
             <a:avLst/>
@@ -7913,7 +8233,7 @@
               <a:buNone/>
             </a:pPr>
             <a:r>
-              <a:rPr lang="en-US" sz="2700" b="1" dirty="0">
+              <a:rPr lang="en-US" sz="3400" b="1" dirty="0">
                 <a:solidFill>
                   <a:srgbClr val="003A63"/>
                 </a:solidFill>
@@ -7923,20 +8243,20 @@
               </a:rPr>
               <a:t>Practical Exercise</a:t>
             </a:r>
-            <a:endParaRPr lang="en-US" sz="2700" dirty="0"/>
-          </a:p>
-        </p:txBody>
-      </p:sp>
-      <p:sp>
-        <p:nvSpPr>
-          <p:cNvPr id="10" name="Text 8"/>
-          <p:cNvSpPr/>
-          <p:nvPr/>
-        </p:nvSpPr>
-        <p:spPr>
-          <a:xfrm>
-            <a:off x="868680" y="1417320"/>
-            <a:ext cx="6675120" cy="4434840"/>
+            <a:endParaRPr lang="en-US" sz="3400" dirty="0"/>
+          </a:p>
+        </p:txBody>
+      </p:sp>
+      <p:sp>
+        <p:nvSpPr>
+          <p:cNvPr id="11" name="Text 9"/>
+          <p:cNvSpPr/>
+          <p:nvPr/>
+        </p:nvSpPr>
+        <p:spPr>
+          <a:xfrm>
+            <a:off x="868680" y="1508760"/>
+            <a:ext cx="6537960" cy="4160520"/>
           </a:xfrm>
           <a:prstGeom prst="rect">
             <a:avLst/>
@@ -7951,7 +8271,7 @@
           <a:lstStyle/>
           <a:p>
             <a:r>
-              <a:rPr lang="en-US" sz="1700" dirty="0">
+              <a:rPr lang="en-US" sz="2100" dirty="0">
                 <a:solidFill>
                   <a:srgbClr val="17364A"/>
                 </a:solidFill>
@@ -7961,11 +8281,11 @@
               </a:rPr>
               <a:t>Create a lab data quality checklist for one AI-supported surveillance use case.</a:t>
             </a:r>
-            <a:endParaRPr lang="en-US" sz="1700" dirty="0"/>
-          </a:p>
-          <a:p>
-            <a:r>
-              <a:rPr lang="en-US" sz="1700" dirty="0">
+            <a:endParaRPr lang="en-US" sz="2100" dirty="0"/>
+          </a:p>
+          <a:p>
+            <a:r>
+              <a:rPr lang="en-US" sz="2100" dirty="0">
                 <a:solidFill>
                   <a:srgbClr val="17364A"/>
                 </a:solidFill>
@@ -7973,15 +8293,15 @@
                 <a:ea typeface="Aptos" pitchFamily="34" charset="-122"/>
                 <a:cs typeface="Aptos" pitchFamily="34" charset="-120"/>
               </a:rPr>
-              <a:t>Include required lab fields, terminology standards, mapping requirements, missingness checks, unit checks, test-result.</a:t>
-            </a:r>
-            <a:endParaRPr lang="en-US" sz="1700" dirty="0"/>
-          </a:p>
-        </p:txBody>
-      </p:sp>
-      <p:sp>
-        <p:nvSpPr>
-          <p:cNvPr id="11" name="Shape 9"/>
+              <a:t>Include required lab fields, terminology standards, mapping requirements, missingness checks, unit.</a:t>
+            </a:r>
+            <a:endParaRPr lang="en-US" sz="2100" dirty="0"/>
+          </a:p>
+        </p:txBody>
+      </p:sp>
+      <p:sp>
+        <p:nvSpPr>
+          <p:cNvPr id="12" name="Shape 10"/>
           <p:cNvSpPr/>
           <p:nvPr/>
         </p:nvSpPr>
@@ -8008,14 +8328,14 @@
       </p:sp>
       <p:sp>
         <p:nvSpPr>
-          <p:cNvPr id="12" name="Text 10"/>
+          <p:cNvPr id="13" name="Text 11"/>
           <p:cNvSpPr/>
           <p:nvPr/>
         </p:nvSpPr>
         <p:spPr>
           <a:xfrm>
             <a:off x="8074152" y="1563624"/>
-            <a:ext cx="2825496" cy="201168"/>
+            <a:ext cx="2825496" cy="256032"/>
           </a:xfrm>
           <a:prstGeom prst="rect">
             <a:avLst/>
@@ -8031,7 +8351,7 @@
               <a:buNone/>
             </a:pPr>
             <a:r>
-              <a:rPr lang="en-US" sz="950" b="1" dirty="0">
+              <a:rPr lang="en-US" sz="1300" b="1" dirty="0">
                 <a:solidFill>
                   <a:srgbClr val="0068B7"/>
                 </a:solidFill>
@@ -8041,20 +8361,20 @@
               </a:rPr>
               <a:t>Key idea</a:t>
             </a:r>
-            <a:endParaRPr lang="en-US" sz="950" dirty="0"/>
-          </a:p>
-        </p:txBody>
-      </p:sp>
-      <p:sp>
-        <p:nvSpPr>
-          <p:cNvPr id="13" name="Text 11"/>
-          <p:cNvSpPr/>
-          <p:nvPr/>
-        </p:nvSpPr>
-        <p:spPr>
-          <a:xfrm>
-            <a:off x="8074152" y="1856232"/>
-            <a:ext cx="2825496" cy="1261872"/>
+            <a:endParaRPr lang="en-US" sz="1300" dirty="0"/>
+          </a:p>
+        </p:txBody>
+      </p:sp>
+      <p:sp>
+        <p:nvSpPr>
+          <p:cNvPr id="14" name="Text 12"/>
+          <p:cNvSpPr/>
+          <p:nvPr/>
+        </p:nvSpPr>
+        <p:spPr>
+          <a:xfrm>
+            <a:off x="8074152" y="1920240"/>
+            <a:ext cx="2825496" cy="1188720"/>
           </a:xfrm>
           <a:prstGeom prst="rect">
             <a:avLst/>
@@ -8072,7 +8392,7 @@
               <a:buNone/>
             </a:pPr>
             <a:r>
-              <a:rPr lang="en-US" sz="1250" dirty="0">
+              <a:rPr lang="en-US" sz="1550" dirty="0">
                 <a:solidFill>
                   <a:srgbClr val="17364A"/>
                 </a:solidFill>
@@ -8082,13 +8402,13 @@
               </a:rPr>
               <a:t>Create a lab data quality checklist for one AI-supported surveillance use case.</a:t>
             </a:r>
-            <a:endParaRPr lang="en-US" sz="1250" dirty="0"/>
-          </a:p>
-        </p:txBody>
-      </p:sp>
-      <p:sp>
-        <p:nvSpPr>
-          <p:cNvPr id="14" name="Shape 12"/>
+            <a:endParaRPr lang="en-US" sz="1550" dirty="0"/>
+          </a:p>
+        </p:txBody>
+      </p:sp>
+      <p:sp>
+        <p:nvSpPr>
+          <p:cNvPr id="15" name="Shape 13"/>
           <p:cNvSpPr/>
           <p:nvPr/>
         </p:nvSpPr>
@@ -8115,14 +8435,14 @@
       </p:sp>
       <p:sp>
         <p:nvSpPr>
-          <p:cNvPr id="15" name="Text 13"/>
+          <p:cNvPr id="16" name="Text 14"/>
           <p:cNvSpPr/>
           <p:nvPr/>
         </p:nvSpPr>
         <p:spPr>
           <a:xfrm>
             <a:off x="8074152" y="3666744"/>
-            <a:ext cx="2825496" cy="201168"/>
+            <a:ext cx="2825496" cy="256032"/>
           </a:xfrm>
           <a:prstGeom prst="rect">
             <a:avLst/>
@@ -8138,7 +8458,7 @@
               <a:buNone/>
             </a:pPr>
             <a:r>
-              <a:rPr lang="en-US" sz="950" b="1" dirty="0">
+              <a:rPr lang="en-US" sz="1300" b="1" dirty="0">
                 <a:solidFill>
                   <a:srgbClr val="0068B7"/>
                 </a:solidFill>
@@ -8148,20 +8468,20 @@
               </a:rPr>
               <a:t>Use this for</a:t>
             </a:r>
-            <a:endParaRPr lang="en-US" sz="950" dirty="0"/>
-          </a:p>
-        </p:txBody>
-      </p:sp>
-      <p:sp>
-        <p:nvSpPr>
-          <p:cNvPr id="16" name="Text 14"/>
-          <p:cNvSpPr/>
-          <p:nvPr/>
-        </p:nvSpPr>
-        <p:spPr>
-          <a:xfrm>
-            <a:off x="8074152" y="3959352"/>
-            <a:ext cx="2825496" cy="1170432"/>
+            <a:endParaRPr lang="en-US" sz="1300" dirty="0"/>
+          </a:p>
+        </p:txBody>
+      </p:sp>
+      <p:sp>
+        <p:nvSpPr>
+          <p:cNvPr id="17" name="Text 15"/>
+          <p:cNvSpPr/>
+          <p:nvPr/>
+        </p:nvSpPr>
+        <p:spPr>
+          <a:xfrm>
+            <a:off x="8074152" y="4023360"/>
+            <a:ext cx="2825496" cy="1097280"/>
           </a:xfrm>
           <a:prstGeom prst="rect">
             <a:avLst/>
@@ -8179,7 +8499,7 @@
               <a:buNone/>
             </a:pPr>
             <a:r>
-              <a:rPr lang="en-US" sz="1250" dirty="0">
+              <a:rPr lang="en-US" sz="1550" dirty="0">
                 <a:solidFill>
                   <a:srgbClr val="17364A"/>
                 </a:solidFill>
@@ -8189,7 +8509,7 @@
               </a:rPr>
               <a:t>Connect the concept to public health decisions, safeguards, documentation, or implementation work.</a:t>
             </a:r>
-            <a:endParaRPr lang="en-US" sz="1250" dirty="0"/>
+            <a:endParaRPr lang="en-US" sz="1550" dirty="0"/>
           </a:p>
         </p:txBody>
       </p:sp>
@@ -8386,7 +8706,7 @@
                 <a:ea typeface="Aptos" pitchFamily="34" charset="-122"/>
                 <a:cs typeface="Aptos" pitchFamily="34" charset="-120"/>
               </a:rPr>
-              <a:t>© Paula Soper</a:t>
+              <a:t>Â© Paula Soper</a:t>
             </a:r>
             <a:endParaRPr lang="en-US" sz="800" dirty="0"/>
           </a:p>
@@ -8394,7 +8714,46 @@
       </p:sp>
       <p:sp>
         <p:nvSpPr>
-          <p:cNvPr id="7" name="Shape 5"/>
+          <p:cNvPr id="7" name="Text 5"/>
+          <p:cNvSpPr/>
+          <p:nvPr/>
+        </p:nvSpPr>
+        <p:spPr>
+          <a:xfrm>
+            <a:off x="11137392" y="6510528"/>
+            <a:ext cx="411480" cy="201168"/>
+          </a:xfrm>
+          <a:prstGeom prst="rect">
+            <a:avLst/>
+          </a:prstGeom>
+          <a:noFill/>
+          <a:ln/>
+        </p:spPr>
+        <p:txBody>
+          <a:bodyPr wrap="square" lIns="0" tIns="0" rIns="0" bIns="0" rtlCol="0" anchor="ctr"/>
+          <a:lstStyle/>
+          <a:p>
+            <a:pPr algn="r" indent="0" marL="0">
+              <a:buNone/>
+            </a:pPr>
+            <a:r>
+              <a:rPr lang="en-US" sz="900" dirty="0">
+                <a:solidFill>
+                  <a:srgbClr val="5F7181"/>
+                </a:solidFill>
+                <a:latin typeface="Aptos" pitchFamily="34" charset="0"/>
+                <a:ea typeface="Aptos" pitchFamily="34" charset="-122"/>
+                <a:cs typeface="Aptos" pitchFamily="34" charset="-120"/>
+              </a:rPr>
+              <a:t>19</a:t>
+            </a:r>
+            <a:endParaRPr lang="en-US" sz="900" dirty="0"/>
+          </a:p>
+        </p:txBody>
+      </p:sp>
+      <p:sp>
+        <p:nvSpPr>
+          <p:cNvPr id="8" name="Shape 6"/>
           <p:cNvSpPr/>
           <p:nvPr/>
         </p:nvSpPr>
@@ -8419,7 +8778,7 @@
       </p:sp>
       <p:sp>
         <p:nvSpPr>
-          <p:cNvPr id="8" name="Text 6"/>
+          <p:cNvPr id="9" name="Text 7"/>
           <p:cNvSpPr/>
           <p:nvPr/>
         </p:nvSpPr>
@@ -8458,14 +8817,14 @@
       </p:sp>
       <p:sp>
         <p:nvSpPr>
-          <p:cNvPr id="9" name="Text 7"/>
+          <p:cNvPr id="10" name="Text 8"/>
           <p:cNvSpPr/>
           <p:nvPr/>
         </p:nvSpPr>
         <p:spPr>
           <a:xfrm>
             <a:off x="640080" y="621792"/>
-            <a:ext cx="10881360" cy="566928"/>
+            <a:ext cx="10881360" cy="713232"/>
           </a:xfrm>
           <a:prstGeom prst="rect">
             <a:avLst/>
@@ -8483,7 +8842,7 @@
               <a:buNone/>
             </a:pPr>
             <a:r>
-              <a:rPr lang="en-US" sz="2700" b="1" dirty="0">
+              <a:rPr lang="en-US" sz="3400" b="1" dirty="0">
                 <a:solidFill>
                   <a:srgbClr val="003A63"/>
                 </a:solidFill>
@@ -8493,20 +8852,20 @@
               </a:rPr>
               <a:t>Expected Artifact or Evidence</a:t>
             </a:r>
-            <a:endParaRPr lang="en-US" sz="2700" dirty="0"/>
-          </a:p>
-        </p:txBody>
-      </p:sp>
-      <p:sp>
-        <p:nvSpPr>
-          <p:cNvPr id="10" name="Text 8"/>
-          <p:cNvSpPr/>
-          <p:nvPr/>
-        </p:nvSpPr>
-        <p:spPr>
-          <a:xfrm>
-            <a:off x="868680" y="1417320"/>
-            <a:ext cx="6675120" cy="4434840"/>
+            <a:endParaRPr lang="en-US" sz="3400" dirty="0"/>
+          </a:p>
+        </p:txBody>
+      </p:sp>
+      <p:sp>
+        <p:nvSpPr>
+          <p:cNvPr id="11" name="Text 9"/>
+          <p:cNvSpPr/>
+          <p:nvPr/>
+        </p:nvSpPr>
+        <p:spPr>
+          <a:xfrm>
+            <a:off x="868680" y="1508760"/>
+            <a:ext cx="6537960" cy="4160520"/>
           </a:xfrm>
           <a:prstGeom prst="rect">
             <a:avLst/>
@@ -8521,7 +8880,7 @@
           <a:lstStyle/>
           <a:p>
             <a:r>
-              <a:rPr lang="en-US" sz="1700" dirty="0">
+              <a:rPr lang="en-US" sz="2100" dirty="0">
                 <a:solidFill>
                   <a:srgbClr val="17364A"/>
                 </a:solidFill>
@@ -8531,11 +8890,11 @@
               </a:rPr>
               <a:t>Lab data quality checklist</a:t>
             </a:r>
-            <a:endParaRPr lang="en-US" sz="1700" dirty="0"/>
-          </a:p>
-          <a:p>
-            <a:r>
-              <a:rPr lang="en-US" sz="1700" dirty="0">
+            <a:endParaRPr lang="en-US" sz="2100" dirty="0"/>
+          </a:p>
+          <a:p>
+            <a:r>
+              <a:rPr lang="en-US" sz="2100" dirty="0">
                 <a:solidFill>
                   <a:srgbClr val="17364A"/>
                 </a:solidFill>
@@ -8545,11 +8904,11 @@
               </a:rPr>
               <a:t>Terminology mapping questions</a:t>
             </a:r>
-            <a:endParaRPr lang="en-US" sz="1700" dirty="0"/>
-          </a:p>
-          <a:p>
-            <a:r>
-              <a:rPr lang="en-US" sz="1700" dirty="0">
+            <a:endParaRPr lang="en-US" sz="2100" dirty="0"/>
+          </a:p>
+          <a:p>
+            <a:r>
+              <a:rPr lang="en-US" sz="2100" dirty="0">
                 <a:solidFill>
                   <a:srgbClr val="17364A"/>
                 </a:solidFill>
@@ -8559,13 +8918,13 @@
               </a:rPr>
               <a:t>Required-field list</a:t>
             </a:r>
-            <a:endParaRPr lang="en-US" sz="1700" dirty="0"/>
-          </a:p>
-        </p:txBody>
-      </p:sp>
-      <p:sp>
-        <p:nvSpPr>
-          <p:cNvPr id="11" name="Shape 9"/>
+            <a:endParaRPr lang="en-US" sz="2100" dirty="0"/>
+          </a:p>
+        </p:txBody>
+      </p:sp>
+      <p:sp>
+        <p:nvSpPr>
+          <p:cNvPr id="12" name="Shape 10"/>
           <p:cNvSpPr/>
           <p:nvPr/>
         </p:nvSpPr>
@@ -8592,14 +8951,14 @@
       </p:sp>
       <p:sp>
         <p:nvSpPr>
-          <p:cNvPr id="12" name="Text 10"/>
+          <p:cNvPr id="13" name="Text 11"/>
           <p:cNvSpPr/>
           <p:nvPr/>
         </p:nvSpPr>
         <p:spPr>
           <a:xfrm>
             <a:off x="8074152" y="1563624"/>
-            <a:ext cx="2825496" cy="201168"/>
+            <a:ext cx="2825496" cy="256032"/>
           </a:xfrm>
           <a:prstGeom prst="rect">
             <a:avLst/>
@@ -8615,7 +8974,7 @@
               <a:buNone/>
             </a:pPr>
             <a:r>
-              <a:rPr lang="en-US" sz="950" b="1" dirty="0">
+              <a:rPr lang="en-US" sz="1300" b="1" dirty="0">
                 <a:solidFill>
                   <a:srgbClr val="0068B7"/>
                 </a:solidFill>
@@ -8625,20 +8984,20 @@
               </a:rPr>
               <a:t>Key idea</a:t>
             </a:r>
-            <a:endParaRPr lang="en-US" sz="950" dirty="0"/>
-          </a:p>
-        </p:txBody>
-      </p:sp>
-      <p:sp>
-        <p:nvSpPr>
-          <p:cNvPr id="13" name="Text 11"/>
-          <p:cNvSpPr/>
-          <p:nvPr/>
-        </p:nvSpPr>
-        <p:spPr>
-          <a:xfrm>
-            <a:off x="8074152" y="1856232"/>
-            <a:ext cx="2825496" cy="1261872"/>
+            <a:endParaRPr lang="en-US" sz="1300" dirty="0"/>
+          </a:p>
+        </p:txBody>
+      </p:sp>
+      <p:sp>
+        <p:nvSpPr>
+          <p:cNvPr id="14" name="Text 12"/>
+          <p:cNvSpPr/>
+          <p:nvPr/>
+        </p:nvSpPr>
+        <p:spPr>
+          <a:xfrm>
+            <a:off x="8074152" y="1920240"/>
+            <a:ext cx="2825496" cy="1188720"/>
           </a:xfrm>
           <a:prstGeom prst="rect">
             <a:avLst/>
@@ -8656,7 +9015,7 @@
               <a:buNone/>
             </a:pPr>
             <a:r>
-              <a:rPr lang="en-US" sz="1250" dirty="0">
+              <a:rPr lang="en-US" sz="1550" dirty="0">
                 <a:solidFill>
                   <a:srgbClr val="17364A"/>
                 </a:solidFill>
@@ -8666,13 +9025,13 @@
               </a:rPr>
               <a:t>Lab data quality checklist</a:t>
             </a:r>
-            <a:endParaRPr lang="en-US" sz="1250" dirty="0"/>
-          </a:p>
-        </p:txBody>
-      </p:sp>
-      <p:sp>
-        <p:nvSpPr>
-          <p:cNvPr id="14" name="Shape 12"/>
+            <a:endParaRPr lang="en-US" sz="1550" dirty="0"/>
+          </a:p>
+        </p:txBody>
+      </p:sp>
+      <p:sp>
+        <p:nvSpPr>
+          <p:cNvPr id="15" name="Shape 13"/>
           <p:cNvSpPr/>
           <p:nvPr/>
         </p:nvSpPr>
@@ -8699,14 +9058,14 @@
       </p:sp>
       <p:sp>
         <p:nvSpPr>
-          <p:cNvPr id="15" name="Text 13"/>
+          <p:cNvPr id="16" name="Text 14"/>
           <p:cNvSpPr/>
           <p:nvPr/>
         </p:nvSpPr>
         <p:spPr>
           <a:xfrm>
             <a:off x="8074152" y="3666744"/>
-            <a:ext cx="2825496" cy="201168"/>
+            <a:ext cx="2825496" cy="256032"/>
           </a:xfrm>
           <a:prstGeom prst="rect">
             <a:avLst/>
@@ -8722,7 +9081,7 @@
               <a:buNone/>
             </a:pPr>
             <a:r>
-              <a:rPr lang="en-US" sz="950" b="1" dirty="0">
+              <a:rPr lang="en-US" sz="1300" b="1" dirty="0">
                 <a:solidFill>
                   <a:srgbClr val="0068B7"/>
                 </a:solidFill>
@@ -8732,20 +9091,20 @@
               </a:rPr>
               <a:t>Use this for</a:t>
             </a:r>
-            <a:endParaRPr lang="en-US" sz="950" dirty="0"/>
-          </a:p>
-        </p:txBody>
-      </p:sp>
-      <p:sp>
-        <p:nvSpPr>
-          <p:cNvPr id="16" name="Text 14"/>
-          <p:cNvSpPr/>
-          <p:nvPr/>
-        </p:nvSpPr>
-        <p:spPr>
-          <a:xfrm>
-            <a:off x="8074152" y="3959352"/>
-            <a:ext cx="2825496" cy="1170432"/>
+            <a:endParaRPr lang="en-US" sz="1300" dirty="0"/>
+          </a:p>
+        </p:txBody>
+      </p:sp>
+      <p:sp>
+        <p:nvSpPr>
+          <p:cNvPr id="17" name="Text 15"/>
+          <p:cNvSpPr/>
+          <p:nvPr/>
+        </p:nvSpPr>
+        <p:spPr>
+          <a:xfrm>
+            <a:off x="8074152" y="4023360"/>
+            <a:ext cx="2825496" cy="1097280"/>
           </a:xfrm>
           <a:prstGeom prst="rect">
             <a:avLst/>
@@ -8763,7 +9122,7 @@
               <a:buNone/>
             </a:pPr>
             <a:r>
-              <a:rPr lang="en-US" sz="1250" dirty="0">
+              <a:rPr lang="en-US" sz="1550" dirty="0">
                 <a:solidFill>
                   <a:srgbClr val="17364A"/>
                 </a:solidFill>
@@ -8773,7 +9132,7 @@
               </a:rPr>
               <a:t>Connect the concept to public health decisions, safeguards, documentation, or implementation work.</a:t>
             </a:r>
-            <a:endParaRPr lang="en-US" sz="1250" dirty="0"/>
+            <a:endParaRPr lang="en-US" sz="1550" dirty="0"/>
           </a:p>
         </p:txBody>
       </p:sp>
@@ -8970,7 +9329,7 @@
                 <a:ea typeface="Aptos" pitchFamily="34" charset="-122"/>
                 <a:cs typeface="Aptos" pitchFamily="34" charset="-120"/>
               </a:rPr>
-              <a:t>© Paula Soper</a:t>
+              <a:t>Â© Paula Soper</a:t>
             </a:r>
             <a:endParaRPr lang="en-US" sz="800" dirty="0"/>
           </a:p>
@@ -8984,8 +9343,47 @@
         </p:nvSpPr>
         <p:spPr>
           <a:xfrm>
+            <a:off x="11137392" y="6510528"/>
+            <a:ext cx="411480" cy="201168"/>
+          </a:xfrm>
+          <a:prstGeom prst="rect">
+            <a:avLst/>
+          </a:prstGeom>
+          <a:noFill/>
+          <a:ln/>
+        </p:spPr>
+        <p:txBody>
+          <a:bodyPr wrap="square" lIns="0" tIns="0" rIns="0" bIns="0" rtlCol="0" anchor="ctr"/>
+          <a:lstStyle/>
+          <a:p>
+            <a:pPr algn="r" indent="0" marL="0">
+              <a:buNone/>
+            </a:pPr>
+            <a:r>
+              <a:rPr lang="en-US" sz="900" dirty="0">
+                <a:solidFill>
+                  <a:srgbClr val="5F7181"/>
+                </a:solidFill>
+                <a:latin typeface="Aptos" pitchFamily="34" charset="0"/>
+                <a:ea typeface="Aptos" pitchFamily="34" charset="-122"/>
+                <a:cs typeface="Aptos" pitchFamily="34" charset="-120"/>
+              </a:rPr>
+              <a:t>2</a:t>
+            </a:r>
+            <a:endParaRPr lang="en-US" sz="900" dirty="0"/>
+          </a:p>
+        </p:txBody>
+      </p:sp>
+      <p:sp>
+        <p:nvSpPr>
+          <p:cNvPr id="8" name="Text 6"/>
+          <p:cNvSpPr/>
+          <p:nvPr/>
+        </p:nvSpPr>
+        <p:spPr>
+          <a:xfrm>
             <a:off x="640080" y="658368"/>
-            <a:ext cx="10881360" cy="566928"/>
+            <a:ext cx="10881360" cy="713232"/>
           </a:xfrm>
           <a:prstGeom prst="rect">
             <a:avLst/>
@@ -9003,7 +9401,7 @@
               <a:buNone/>
             </a:pPr>
             <a:r>
-              <a:rPr lang="en-US" sz="2700" b="1" dirty="0">
+              <a:rPr lang="en-US" sz="3400" b="1" dirty="0">
                 <a:solidFill>
                   <a:srgbClr val="003A63"/>
                 </a:solidFill>
@@ -9013,20 +9411,20 @@
               </a:rPr>
               <a:t>What this module helps you do</a:t>
             </a:r>
-            <a:endParaRPr lang="en-US" sz="2700" dirty="0"/>
-          </a:p>
-        </p:txBody>
-      </p:sp>
-      <p:sp>
-        <p:nvSpPr>
-          <p:cNvPr id="8" name="Text 6"/>
-          <p:cNvSpPr/>
-          <p:nvPr/>
-        </p:nvSpPr>
-        <p:spPr>
-          <a:xfrm>
-            <a:off x="868680" y="1417320"/>
-            <a:ext cx="6675120" cy="3291840"/>
+            <a:endParaRPr lang="en-US" sz="3400" dirty="0"/>
+          </a:p>
+        </p:txBody>
+      </p:sp>
+      <p:sp>
+        <p:nvSpPr>
+          <p:cNvPr id="9" name="Text 7"/>
+          <p:cNvSpPr/>
+          <p:nvPr/>
+        </p:nvSpPr>
+        <p:spPr>
+          <a:xfrm>
+            <a:off x="868680" y="1508760"/>
+            <a:ext cx="6446520" cy="2926080"/>
           </a:xfrm>
           <a:prstGeom prst="rect">
             <a:avLst/>
@@ -9041,7 +9439,7 @@
           <a:lstStyle/>
           <a:p>
             <a:r>
-              <a:rPr lang="en-US" sz="1700" dirty="0">
+              <a:rPr lang="en-US" sz="2100" dirty="0">
                 <a:solidFill>
                   <a:srgbClr val="17364A"/>
                 </a:solidFill>
@@ -9049,13 +9447,13 @@
                 <a:ea typeface="Aptos" pitchFamily="34" charset="-122"/>
                 <a:cs typeface="Aptos" pitchFamily="34" charset="-120"/>
               </a:rPr>
-              <a:t>Electronic laboratory reporting supplies critical evidence for infectious disease surveillance, outbreak detection, case investigation, and program.</a:t>
-            </a:r>
-            <a:endParaRPr lang="en-US" sz="1700" dirty="0"/>
-          </a:p>
-          <a:p>
-            <a:r>
-              <a:rPr lang="en-US" sz="1700" dirty="0">
+              <a:t>Electronic laboratory reporting supplies critical evidence for infectious disease surveillance, outbreak.</a:t>
+            </a:r>
+            <a:endParaRPr lang="en-US" sz="2100" dirty="0"/>
+          </a:p>
+          <a:p>
+            <a:r>
+              <a:rPr lang="en-US" sz="2100" dirty="0">
                 <a:solidFill>
                   <a:srgbClr val="17364A"/>
                 </a:solidFill>
@@ -9063,13 +9461,13 @@
                 <a:ea typeface="Aptos" pitchFamily="34" charset="-122"/>
                 <a:cs typeface="Aptos" pitchFamily="34" charset="-120"/>
               </a:rPr>
-              <a:t>AI tools that use laboratory data depend on the quality of test codes, result codes, units, specimen information, dates, and mappings to reportable.</a:t>
-            </a:r>
-            <a:endParaRPr lang="en-US" sz="1700" dirty="0"/>
-          </a:p>
-          <a:p>
-            <a:r>
-              <a:rPr lang="en-US" sz="1700" dirty="0">
+              <a:t>AI tools that use laboratory data depend on the quality of test codes, result codes, units, specimen information,.</a:t>
+            </a:r>
+            <a:endParaRPr lang="en-US" sz="2100" dirty="0"/>
+          </a:p>
+          <a:p>
+            <a:r>
+              <a:rPr lang="en-US" sz="2100" dirty="0">
                 <a:solidFill>
                   <a:srgbClr val="17364A"/>
                 </a:solidFill>
@@ -9077,15 +9475,15 @@
                 <a:ea typeface="Aptos" pitchFamily="34" charset="-122"/>
                 <a:cs typeface="Aptos" pitchFamily="34" charset="-120"/>
               </a:rPr>
-              <a:t>This module teaches learners how laboratory data quality and terminology mapping affect AI-supported public health work.</a:t>
-            </a:r>
-            <a:endParaRPr lang="en-US" sz="1700" dirty="0"/>
-          </a:p>
-        </p:txBody>
-      </p:sp>
-      <p:sp>
-        <p:nvSpPr>
-          <p:cNvPr id="9" name="Shape 7"/>
+              <a:t>This module teaches learners how laboratory data quality and terminology mapping affect AI-supported public.</a:t>
+            </a:r>
+            <a:endParaRPr lang="en-US" sz="2100" dirty="0"/>
+          </a:p>
+        </p:txBody>
+      </p:sp>
+      <p:sp>
+        <p:nvSpPr>
+          <p:cNvPr id="10" name="Shape 8"/>
           <p:cNvSpPr/>
           <p:nvPr/>
         </p:nvSpPr>
@@ -9112,14 +9510,14 @@
       </p:sp>
       <p:sp>
         <p:nvSpPr>
-          <p:cNvPr id="10" name="Text 8"/>
+          <p:cNvPr id="11" name="Text 9"/>
           <p:cNvSpPr/>
           <p:nvPr/>
         </p:nvSpPr>
         <p:spPr>
           <a:xfrm>
             <a:off x="8074152" y="1563624"/>
-            <a:ext cx="2825496" cy="201168"/>
+            <a:ext cx="2825496" cy="256032"/>
           </a:xfrm>
           <a:prstGeom prst="rect">
             <a:avLst/>
@@ -9135,7 +9533,7 @@
               <a:buNone/>
             </a:pPr>
             <a:r>
-              <a:rPr lang="en-US" sz="950" b="1" dirty="0">
+              <a:rPr lang="en-US" sz="1300" b="1" dirty="0">
                 <a:solidFill>
                   <a:srgbClr val="0068B7"/>
                 </a:solidFill>
@@ -9145,20 +9543,20 @@
               </a:rPr>
               <a:t>Module details</a:t>
             </a:r>
-            <a:endParaRPr lang="en-US" sz="950" dirty="0"/>
-          </a:p>
-        </p:txBody>
-      </p:sp>
-      <p:sp>
-        <p:nvSpPr>
-          <p:cNvPr id="11" name="Text 9"/>
-          <p:cNvSpPr/>
-          <p:nvPr/>
-        </p:nvSpPr>
-        <p:spPr>
-          <a:xfrm>
-            <a:off x="8074152" y="1856232"/>
-            <a:ext cx="2825496" cy="1353312"/>
+            <a:endParaRPr lang="en-US" sz="1300" dirty="0"/>
+          </a:p>
+        </p:txBody>
+      </p:sp>
+      <p:sp>
+        <p:nvSpPr>
+          <p:cNvPr id="12" name="Text 10"/>
+          <p:cNvSpPr/>
+          <p:nvPr/>
+        </p:nvSpPr>
+        <p:spPr>
+          <a:xfrm>
+            <a:off x="8074152" y="1920240"/>
+            <a:ext cx="2825496" cy="1280160"/>
           </a:xfrm>
           <a:prstGeom prst="rect">
             <a:avLst/>
@@ -9176,7 +9574,7 @@
               <a:buNone/>
             </a:pPr>
             <a:r>
-              <a:rPr lang="en-US" sz="1250" dirty="0">
+              <a:rPr lang="en-US" sz="1550" dirty="0">
                 <a:solidFill>
                   <a:srgbClr val="17364A"/>
                 </a:solidFill>
@@ -9186,14 +9584,14 @@
               </a:rPr>
               <a:t>Level: applied/foundational</a:t>
             </a:r>
-            <a:endParaRPr lang="en-US" sz="1250" dirty="0"/>
+            <a:endParaRPr lang="en-US" sz="1550" dirty="0"/>
           </a:p>
           <a:p>
             <a:pPr indent="0" marL="0">
               <a:buNone/>
             </a:pPr>
             <a:r>
-              <a:rPr lang="en-US" sz="1250" dirty="0">
+              <a:rPr lang="en-US" sz="1550" dirty="0">
                 <a:solidFill>
                   <a:srgbClr val="17364A"/>
                 </a:solidFill>
@@ -9203,14 +9601,14 @@
               </a:rPr>
               <a:t>Primary track: Technical Architecture Track</a:t>
             </a:r>
-            <a:endParaRPr lang="en-US" sz="1250" dirty="0"/>
+            <a:endParaRPr lang="en-US" sz="1550" dirty="0"/>
           </a:p>
           <a:p>
             <a:pPr indent="0" marL="0">
               <a:buNone/>
             </a:pPr>
             <a:r>
-              <a:rPr lang="en-US" sz="1250" dirty="0">
+              <a:rPr lang="en-US" sz="1550" dirty="0">
                 <a:solidFill>
                   <a:srgbClr val="17364A"/>
                 </a:solidFill>
@@ -9220,32 +9618,32 @@
               </a:rPr>
               <a:t>Appears in tracks: technical-architecture</a:t>
             </a:r>
-            <a:endParaRPr lang="en-US" sz="1250" dirty="0"/>
-          </a:p>
-        </p:txBody>
-      </p:sp>
-      <p:sp>
-        <p:nvSpPr>
-          <p:cNvPr id="12" name="Shape 10"/>
-          <p:cNvSpPr/>
-          <p:nvPr/>
-        </p:nvSpPr>
-        <p:spPr>
-          <a:xfrm>
-            <a:off x="7909560" y="3611880"/>
-            <a:ext cx="3154680" cy="1783080"/>
+            <a:endParaRPr lang="en-US" sz="1550" dirty="0"/>
+          </a:p>
+        </p:txBody>
+      </p:sp>
+      <p:sp>
+        <p:nvSpPr>
+          <p:cNvPr id="13" name="Shape 11"/>
+          <p:cNvSpPr/>
+          <p:nvPr/>
+        </p:nvSpPr>
+        <p:spPr>
+          <a:xfrm>
+            <a:off x="7635240" y="3730752"/>
+            <a:ext cx="1033272" cy="749808"/>
           </a:xfrm>
           <a:prstGeom prst="roundRect">
             <a:avLst>
-              <a:gd name="adj" fmla="val 6154"/>
+              <a:gd name="adj" fmla="val 14634"/>
             </a:avLst>
           </a:prstGeom>
           <a:solidFill>
-            <a:srgbClr val="EEF8ED"/>
+            <a:srgbClr val="0068B7"/>
           </a:solidFill>
           <a:ln w="12700">
             <a:solidFill>
-              <a:srgbClr val="B9D7E6"/>
+              <a:srgbClr val="0068B7"/>
             </a:solidFill>
             <a:prstDash val="solid"/>
           </a:ln>
@@ -9253,81 +9651,256 @@
       </p:sp>
       <p:sp>
         <p:nvSpPr>
-          <p:cNvPr id="13" name="Text 11"/>
-          <p:cNvSpPr/>
-          <p:nvPr/>
-        </p:nvSpPr>
-        <p:spPr>
-          <a:xfrm>
-            <a:off x="8074152" y="3758184"/>
-            <a:ext cx="2825496" cy="201168"/>
-          </a:xfrm>
-          <a:prstGeom prst="rect">
-            <a:avLst/>
-          </a:prstGeom>
-          <a:noFill/>
-          <a:ln/>
-        </p:spPr>
-        <p:txBody>
-          <a:bodyPr wrap="square" lIns="0" tIns="0" rIns="0" bIns="0" rtlCol="0" anchor="ctr"/>
-          <a:lstStyle/>
-          <a:p>
-            <a:pPr indent="0" marL="0">
-              <a:buNone/>
-            </a:pPr>
-            <a:r>
-              <a:rPr lang="en-US" sz="950" b="1" dirty="0">
-                <a:solidFill>
-                  <a:srgbClr val="0068B7"/>
-                </a:solidFill>
-                <a:latin typeface="Aptos" pitchFamily="34" charset="0"/>
-                <a:ea typeface="Aptos" pitchFamily="34" charset="-122"/>
-                <a:cs typeface="Aptos" pitchFamily="34" charset="-120"/>
-              </a:rPr>
-              <a:t>Learning approach</a:t>
-            </a:r>
-            <a:endParaRPr lang="en-US" sz="950" dirty="0"/>
-          </a:p>
-        </p:txBody>
-      </p:sp>
-      <p:sp>
-        <p:nvSpPr>
           <p:cNvPr id="14" name="Text 12"/>
           <p:cNvSpPr/>
           <p:nvPr/>
         </p:nvSpPr>
         <p:spPr>
           <a:xfrm>
-            <a:off x="8074152" y="4050792"/>
-            <a:ext cx="2825496" cy="1216152"/>
-          </a:xfrm>
-          <a:prstGeom prst="rect">
-            <a:avLst/>
-          </a:prstGeom>
-          <a:noFill/>
-          <a:ln/>
-        </p:spPr>
-        <p:txBody>
-          <a:bodyPr wrap="square" lIns="0" tIns="0" rIns="0" bIns="0" rtlCol="0" anchor="t">
+            <a:off x="7708392" y="3922776"/>
+            <a:ext cx="886968" cy="310896"/>
+          </a:xfrm>
+          <a:prstGeom prst="rect">
+            <a:avLst/>
+          </a:prstGeom>
+          <a:noFill/>
+          <a:ln/>
+        </p:spPr>
+        <p:txBody>
+          <a:bodyPr wrap="square" lIns="0" tIns="0" rIns="0" bIns="0" rtlCol="0" anchor="ctr">
             <a:normAutofit/>
           </a:bodyPr>
           <a:lstStyle/>
           <a:p>
-            <a:pPr indent="0" marL="0">
-              <a:buNone/>
-            </a:pPr>
-            <a:r>
-              <a:rPr lang="en-US" sz="1250" dirty="0">
-                <a:solidFill>
-                  <a:srgbClr val="17364A"/>
-                </a:solidFill>
-                <a:latin typeface="Aptos" pitchFamily="34" charset="0"/>
-                <a:ea typeface="Aptos" pitchFamily="34" charset="-122"/>
-                <a:cs typeface="Aptos" pitchFamily="34" charset="-120"/>
-              </a:rPr>
-              <a:t>Review the core ideas, complete the practical exercise, check your understanding, and use the related plays and tools to apply the lesson.</a:t>
-            </a:r>
-            <a:endParaRPr lang="en-US" sz="1250" dirty="0"/>
+            <a:pPr algn="ctr" indent="0" marL="0">
+              <a:buNone/>
+            </a:pPr>
+            <a:r>
+              <a:rPr lang="en-US" sz="1500" b="1" dirty="0">
+                <a:solidFill>
+                  <a:srgbClr val="FFFFFF"/>
+                </a:solidFill>
+                <a:latin typeface="Aptos" pitchFamily="34" charset="0"/>
+                <a:ea typeface="Aptos" pitchFamily="34" charset="-122"/>
+                <a:cs typeface="Aptos" pitchFamily="34" charset="-120"/>
+              </a:rPr>
+              <a:t>Learn</a:t>
+            </a:r>
+            <a:endParaRPr lang="en-US" sz="1500" dirty="0"/>
+          </a:p>
+        </p:txBody>
+      </p:sp>
+      <p:sp>
+        <p:nvSpPr>
+          <p:cNvPr id="15" name="Text 13"/>
+          <p:cNvSpPr/>
+          <p:nvPr/>
+        </p:nvSpPr>
+        <p:spPr>
+          <a:xfrm>
+            <a:off x="8695944" y="3941064"/>
+            <a:ext cx="201168" cy="256032"/>
+          </a:xfrm>
+          <a:prstGeom prst="rect">
+            <a:avLst/>
+          </a:prstGeom>
+          <a:noFill/>
+          <a:ln/>
+        </p:spPr>
+        <p:txBody>
+          <a:bodyPr wrap="square" lIns="0" tIns="0" rIns="0" bIns="0" rtlCol="0" anchor="ctr"/>
+          <a:lstStyle/>
+          <a:p>
+            <a:pPr algn="ctr" indent="0" marL="0">
+              <a:buNone/>
+            </a:pPr>
+            <a:r>
+              <a:rPr lang="en-US" sz="1800" b="1" dirty="0">
+                <a:solidFill>
+                  <a:srgbClr val="0068B7"/>
+                </a:solidFill>
+                <a:latin typeface="Aptos" pitchFamily="34" charset="0"/>
+                <a:ea typeface="Aptos" pitchFamily="34" charset="-122"/>
+                <a:cs typeface="Aptos" pitchFamily="34" charset="-120"/>
+              </a:rPr>
+              <a:t>â†’</a:t>
+            </a:r>
+            <a:endParaRPr lang="en-US" sz="1800" dirty="0"/>
+          </a:p>
+        </p:txBody>
+      </p:sp>
+      <p:sp>
+        <p:nvSpPr>
+          <p:cNvPr id="16" name="Shape 14"/>
+          <p:cNvSpPr/>
+          <p:nvPr/>
+        </p:nvSpPr>
+        <p:spPr>
+          <a:xfrm>
+            <a:off x="8924544" y="3730752"/>
+            <a:ext cx="1033272" cy="749808"/>
+          </a:xfrm>
+          <a:prstGeom prst="roundRect">
+            <a:avLst>
+              <a:gd name="adj" fmla="val 14634"/>
+            </a:avLst>
+          </a:prstGeom>
+          <a:solidFill>
+            <a:srgbClr val="2F8A28"/>
+          </a:solidFill>
+          <a:ln w="12700">
+            <a:solidFill>
+              <a:srgbClr val="2F8A28"/>
+            </a:solidFill>
+            <a:prstDash val="solid"/>
+          </a:ln>
+        </p:spPr>
+      </p:sp>
+      <p:sp>
+        <p:nvSpPr>
+          <p:cNvPr id="17" name="Text 15"/>
+          <p:cNvSpPr/>
+          <p:nvPr/>
+        </p:nvSpPr>
+        <p:spPr>
+          <a:xfrm>
+            <a:off x="8997696" y="3922776"/>
+            <a:ext cx="886968" cy="310896"/>
+          </a:xfrm>
+          <a:prstGeom prst="rect">
+            <a:avLst/>
+          </a:prstGeom>
+          <a:noFill/>
+          <a:ln/>
+        </p:spPr>
+        <p:txBody>
+          <a:bodyPr wrap="square" lIns="0" tIns="0" rIns="0" bIns="0" rtlCol="0" anchor="ctr">
+            <a:normAutofit/>
+          </a:bodyPr>
+          <a:lstStyle/>
+          <a:p>
+            <a:pPr algn="ctr" indent="0" marL="0">
+              <a:buNone/>
+            </a:pPr>
+            <a:r>
+              <a:rPr lang="en-US" sz="1500" b="1" dirty="0">
+                <a:solidFill>
+                  <a:srgbClr val="FFFFFF"/>
+                </a:solidFill>
+                <a:latin typeface="Aptos" pitchFamily="34" charset="0"/>
+                <a:ea typeface="Aptos" pitchFamily="34" charset="-122"/>
+                <a:cs typeface="Aptos" pitchFamily="34" charset="-120"/>
+              </a:rPr>
+              <a:t>Apply</a:t>
+            </a:r>
+            <a:endParaRPr lang="en-US" sz="1500" dirty="0"/>
+          </a:p>
+        </p:txBody>
+      </p:sp>
+      <p:sp>
+        <p:nvSpPr>
+          <p:cNvPr id="18" name="Text 16"/>
+          <p:cNvSpPr/>
+          <p:nvPr/>
+        </p:nvSpPr>
+        <p:spPr>
+          <a:xfrm>
+            <a:off x="9985248" y="3941064"/>
+            <a:ext cx="201168" cy="256032"/>
+          </a:xfrm>
+          <a:prstGeom prst="rect">
+            <a:avLst/>
+          </a:prstGeom>
+          <a:noFill/>
+          <a:ln/>
+        </p:spPr>
+        <p:txBody>
+          <a:bodyPr wrap="square" lIns="0" tIns="0" rIns="0" bIns="0" rtlCol="0" anchor="ctr"/>
+          <a:lstStyle/>
+          <a:p>
+            <a:pPr algn="ctr" indent="0" marL="0">
+              <a:buNone/>
+            </a:pPr>
+            <a:r>
+              <a:rPr lang="en-US" sz="1800" b="1" dirty="0">
+                <a:solidFill>
+                  <a:srgbClr val="0068B7"/>
+                </a:solidFill>
+                <a:latin typeface="Aptos" pitchFamily="34" charset="0"/>
+                <a:ea typeface="Aptos" pitchFamily="34" charset="-122"/>
+                <a:cs typeface="Aptos" pitchFamily="34" charset="-120"/>
+              </a:rPr>
+              <a:t>â†’</a:t>
+            </a:r>
+            <a:endParaRPr lang="en-US" sz="1800" dirty="0"/>
+          </a:p>
+        </p:txBody>
+      </p:sp>
+      <p:sp>
+        <p:nvSpPr>
+          <p:cNvPr id="19" name="Shape 17"/>
+          <p:cNvSpPr/>
+          <p:nvPr/>
+        </p:nvSpPr>
+        <p:spPr>
+          <a:xfrm>
+            <a:off x="10213848" y="3730752"/>
+            <a:ext cx="1033272" cy="749808"/>
+          </a:xfrm>
+          <a:prstGeom prst="roundRect">
+            <a:avLst>
+              <a:gd name="adj" fmla="val 14634"/>
+            </a:avLst>
+          </a:prstGeom>
+          <a:solidFill>
+            <a:srgbClr val="6A4CA3"/>
+          </a:solidFill>
+          <a:ln w="12700">
+            <a:solidFill>
+              <a:srgbClr val="6A4CA3"/>
+            </a:solidFill>
+            <a:prstDash val="solid"/>
+          </a:ln>
+        </p:spPr>
+      </p:sp>
+      <p:sp>
+        <p:nvSpPr>
+          <p:cNvPr id="20" name="Text 18"/>
+          <p:cNvSpPr/>
+          <p:nvPr/>
+        </p:nvSpPr>
+        <p:spPr>
+          <a:xfrm>
+            <a:off x="10287000" y="3922776"/>
+            <a:ext cx="886968" cy="310896"/>
+          </a:xfrm>
+          <a:prstGeom prst="rect">
+            <a:avLst/>
+          </a:prstGeom>
+          <a:noFill/>
+          <a:ln/>
+        </p:spPr>
+        <p:txBody>
+          <a:bodyPr wrap="square" lIns="0" tIns="0" rIns="0" bIns="0" rtlCol="0" anchor="ctr">
+            <a:normAutofit/>
+          </a:bodyPr>
+          <a:lstStyle/>
+          <a:p>
+            <a:pPr algn="ctr" indent="0" marL="0">
+              <a:buNone/>
+            </a:pPr>
+            <a:r>
+              <a:rPr lang="en-US" sz="1500" b="1" dirty="0">
+                <a:solidFill>
+                  <a:srgbClr val="FFFFFF"/>
+                </a:solidFill>
+                <a:latin typeface="Aptos" pitchFamily="34" charset="0"/>
+                <a:ea typeface="Aptos" pitchFamily="34" charset="-122"/>
+                <a:cs typeface="Aptos" pitchFamily="34" charset="-120"/>
+              </a:rPr>
+              <a:t>Document</a:t>
+            </a:r>
+            <a:endParaRPr lang="en-US" sz="1500" dirty="0"/>
           </a:p>
         </p:txBody>
       </p:sp>
@@ -9524,7 +10097,7 @@
                 <a:ea typeface="Aptos" pitchFamily="34" charset="-122"/>
                 <a:cs typeface="Aptos" pitchFamily="34" charset="-120"/>
               </a:rPr>
-              <a:t>© Paula Soper</a:t>
+              <a:t>Â© Paula Soper</a:t>
             </a:r>
             <a:endParaRPr lang="en-US" sz="800" dirty="0"/>
           </a:p>
@@ -9538,8 +10111,47 @@
         </p:nvSpPr>
         <p:spPr>
           <a:xfrm>
+            <a:off x="11137392" y="6510528"/>
+            <a:ext cx="411480" cy="201168"/>
+          </a:xfrm>
+          <a:prstGeom prst="rect">
+            <a:avLst/>
+          </a:prstGeom>
+          <a:noFill/>
+          <a:ln/>
+        </p:spPr>
+        <p:txBody>
+          <a:bodyPr wrap="square" lIns="0" tIns="0" rIns="0" bIns="0" rtlCol="0" anchor="ctr"/>
+          <a:lstStyle/>
+          <a:p>
+            <a:pPr algn="r" indent="0" marL="0">
+              <a:buNone/>
+            </a:pPr>
+            <a:r>
+              <a:rPr lang="en-US" sz="900" dirty="0">
+                <a:solidFill>
+                  <a:srgbClr val="5F7181"/>
+                </a:solidFill>
+                <a:latin typeface="Aptos" pitchFamily="34" charset="0"/>
+                <a:ea typeface="Aptos" pitchFamily="34" charset="-122"/>
+                <a:cs typeface="Aptos" pitchFamily="34" charset="-120"/>
+              </a:rPr>
+              <a:t>20</a:t>
+            </a:r>
+            <a:endParaRPr lang="en-US" sz="900" dirty="0"/>
+          </a:p>
+        </p:txBody>
+      </p:sp>
+      <p:sp>
+        <p:nvSpPr>
+          <p:cNvPr id="8" name="Text 6"/>
+          <p:cNvSpPr/>
+          <p:nvPr/>
+        </p:nvSpPr>
+        <p:spPr>
+          <a:xfrm>
             <a:off x="640080" y="658368"/>
-            <a:ext cx="10881360" cy="566928"/>
+            <a:ext cx="10881360" cy="713232"/>
           </a:xfrm>
           <a:prstGeom prst="rect">
             <a:avLst/>
@@ -9557,7 +10169,7 @@
               <a:buNone/>
             </a:pPr>
             <a:r>
-              <a:rPr lang="en-US" sz="2700" b="1" dirty="0">
+              <a:rPr lang="en-US" sz="3400" b="1" dirty="0">
                 <a:solidFill>
                   <a:srgbClr val="003A63"/>
                 </a:solidFill>
@@ -9567,20 +10179,20 @@
               </a:rPr>
               <a:t>Expected Artifact or Evidence Continued</a:t>
             </a:r>
-            <a:endParaRPr lang="en-US" sz="2700" dirty="0"/>
-          </a:p>
-        </p:txBody>
-      </p:sp>
-      <p:sp>
-        <p:nvSpPr>
-          <p:cNvPr id="8" name="Text 6"/>
-          <p:cNvSpPr/>
-          <p:nvPr/>
-        </p:nvSpPr>
-        <p:spPr>
-          <a:xfrm>
-            <a:off x="868680" y="1417320"/>
-            <a:ext cx="6675120" cy="4434840"/>
+            <a:endParaRPr lang="en-US" sz="3400" dirty="0"/>
+          </a:p>
+        </p:txBody>
+      </p:sp>
+      <p:sp>
+        <p:nvSpPr>
+          <p:cNvPr id="9" name="Text 7"/>
+          <p:cNvSpPr/>
+          <p:nvPr/>
+        </p:nvSpPr>
+        <p:spPr>
+          <a:xfrm>
+            <a:off x="868680" y="1508760"/>
+            <a:ext cx="6537960" cy="4160520"/>
           </a:xfrm>
           <a:prstGeom prst="rect">
             <a:avLst/>
@@ -9595,7 +10207,7 @@
           <a:lstStyle/>
           <a:p>
             <a:r>
-              <a:rPr lang="en-US" sz="1700" dirty="0">
+              <a:rPr lang="en-US" sz="2100" dirty="0">
                 <a:solidFill>
                   <a:srgbClr val="17364A"/>
                 </a:solidFill>
@@ -9605,13 +10217,13 @@
               </a:rPr>
               <a:t>Data quality issue log</a:t>
             </a:r>
-            <a:endParaRPr lang="en-US" sz="1700" dirty="0"/>
-          </a:p>
-        </p:txBody>
-      </p:sp>
-      <p:sp>
-        <p:nvSpPr>
-          <p:cNvPr id="9" name="Shape 7"/>
+            <a:endParaRPr lang="en-US" sz="2100" dirty="0"/>
+          </a:p>
+        </p:txBody>
+      </p:sp>
+      <p:sp>
+        <p:nvSpPr>
+          <p:cNvPr id="10" name="Shape 8"/>
           <p:cNvSpPr/>
           <p:nvPr/>
         </p:nvSpPr>
@@ -9638,14 +10250,14 @@
       </p:sp>
       <p:sp>
         <p:nvSpPr>
-          <p:cNvPr id="10" name="Text 8"/>
+          <p:cNvPr id="11" name="Text 9"/>
           <p:cNvSpPr/>
           <p:nvPr/>
         </p:nvSpPr>
         <p:spPr>
           <a:xfrm>
             <a:off x="8074152" y="1563624"/>
-            <a:ext cx="2825496" cy="201168"/>
+            <a:ext cx="2825496" cy="256032"/>
           </a:xfrm>
           <a:prstGeom prst="rect">
             <a:avLst/>
@@ -9661,7 +10273,7 @@
               <a:buNone/>
             </a:pPr>
             <a:r>
-              <a:rPr lang="en-US" sz="950" b="1" dirty="0">
+              <a:rPr lang="en-US" sz="1300" b="1" dirty="0">
                 <a:solidFill>
                   <a:srgbClr val="0068B7"/>
                 </a:solidFill>
@@ -9671,20 +10283,20 @@
               </a:rPr>
               <a:t>Key idea</a:t>
             </a:r>
-            <a:endParaRPr lang="en-US" sz="950" dirty="0"/>
-          </a:p>
-        </p:txBody>
-      </p:sp>
-      <p:sp>
-        <p:nvSpPr>
-          <p:cNvPr id="11" name="Text 9"/>
-          <p:cNvSpPr/>
-          <p:nvPr/>
-        </p:nvSpPr>
-        <p:spPr>
-          <a:xfrm>
-            <a:off x="8074152" y="1856232"/>
-            <a:ext cx="2825496" cy="1261872"/>
+            <a:endParaRPr lang="en-US" sz="1300" dirty="0"/>
+          </a:p>
+        </p:txBody>
+      </p:sp>
+      <p:sp>
+        <p:nvSpPr>
+          <p:cNvPr id="12" name="Text 10"/>
+          <p:cNvSpPr/>
+          <p:nvPr/>
+        </p:nvSpPr>
+        <p:spPr>
+          <a:xfrm>
+            <a:off x="8074152" y="1920240"/>
+            <a:ext cx="2825496" cy="1188720"/>
           </a:xfrm>
           <a:prstGeom prst="rect">
             <a:avLst/>
@@ -9702,7 +10314,7 @@
               <a:buNone/>
             </a:pPr>
             <a:r>
-              <a:rPr lang="en-US" sz="1250" dirty="0">
+              <a:rPr lang="en-US" sz="1550" dirty="0">
                 <a:solidFill>
                   <a:srgbClr val="17364A"/>
                 </a:solidFill>
@@ -9712,13 +10324,13 @@
               </a:rPr>
               <a:t>Data quality issue log</a:t>
             </a:r>
-            <a:endParaRPr lang="en-US" sz="1250" dirty="0"/>
-          </a:p>
-        </p:txBody>
-      </p:sp>
-      <p:sp>
-        <p:nvSpPr>
-          <p:cNvPr id="12" name="Shape 10"/>
+            <a:endParaRPr lang="en-US" sz="1550" dirty="0"/>
+          </a:p>
+        </p:txBody>
+      </p:sp>
+      <p:sp>
+        <p:nvSpPr>
+          <p:cNvPr id="13" name="Shape 11"/>
           <p:cNvSpPr/>
           <p:nvPr/>
         </p:nvSpPr>
@@ -9745,14 +10357,14 @@
       </p:sp>
       <p:sp>
         <p:nvSpPr>
-          <p:cNvPr id="13" name="Text 11"/>
+          <p:cNvPr id="14" name="Text 12"/>
           <p:cNvSpPr/>
           <p:nvPr/>
         </p:nvSpPr>
         <p:spPr>
           <a:xfrm>
             <a:off x="8074152" y="3666744"/>
-            <a:ext cx="2825496" cy="201168"/>
+            <a:ext cx="2825496" cy="256032"/>
           </a:xfrm>
           <a:prstGeom prst="rect">
             <a:avLst/>
@@ -9768,7 +10380,7 @@
               <a:buNone/>
             </a:pPr>
             <a:r>
-              <a:rPr lang="en-US" sz="950" b="1" dirty="0">
+              <a:rPr lang="en-US" sz="1300" b="1" dirty="0">
                 <a:solidFill>
                   <a:srgbClr val="0068B7"/>
                 </a:solidFill>
@@ -9778,20 +10390,20 @@
               </a:rPr>
               <a:t>Use this for</a:t>
             </a:r>
-            <a:endParaRPr lang="en-US" sz="950" dirty="0"/>
-          </a:p>
-        </p:txBody>
-      </p:sp>
-      <p:sp>
-        <p:nvSpPr>
-          <p:cNvPr id="14" name="Text 12"/>
-          <p:cNvSpPr/>
-          <p:nvPr/>
-        </p:nvSpPr>
-        <p:spPr>
-          <a:xfrm>
-            <a:off x="8074152" y="3959352"/>
-            <a:ext cx="2825496" cy="1170432"/>
+            <a:endParaRPr lang="en-US" sz="1300" dirty="0"/>
+          </a:p>
+        </p:txBody>
+      </p:sp>
+      <p:sp>
+        <p:nvSpPr>
+          <p:cNvPr id="15" name="Text 13"/>
+          <p:cNvSpPr/>
+          <p:nvPr/>
+        </p:nvSpPr>
+        <p:spPr>
+          <a:xfrm>
+            <a:off x="8074152" y="4023360"/>
+            <a:ext cx="2825496" cy="1097280"/>
           </a:xfrm>
           <a:prstGeom prst="rect">
             <a:avLst/>
@@ -9809,7 +10421,7 @@
               <a:buNone/>
             </a:pPr>
             <a:r>
-              <a:rPr lang="en-US" sz="1250" dirty="0">
+              <a:rPr lang="en-US" sz="1550" dirty="0">
                 <a:solidFill>
                   <a:srgbClr val="17364A"/>
                 </a:solidFill>
@@ -9819,7 +10431,7 @@
               </a:rPr>
               <a:t>Connect the concept to public health decisions, safeguards, documentation, or implementation work.</a:t>
             </a:r>
-            <a:endParaRPr lang="en-US" sz="1250" dirty="0"/>
+            <a:endParaRPr lang="en-US" sz="1550" dirty="0"/>
           </a:p>
         </p:txBody>
       </p:sp>
@@ -10016,7 +10628,7 @@
                 <a:ea typeface="Aptos" pitchFamily="34" charset="-122"/>
                 <a:cs typeface="Aptos" pitchFamily="34" charset="-120"/>
               </a:rPr>
-              <a:t>© Paula Soper</a:t>
+              <a:t>Â© Paula Soper</a:t>
             </a:r>
             <a:endParaRPr lang="en-US" sz="800" dirty="0"/>
           </a:p>
@@ -10024,7 +10636,46 @@
       </p:sp>
       <p:sp>
         <p:nvSpPr>
-          <p:cNvPr id="7" name="Shape 5"/>
+          <p:cNvPr id="7" name="Text 5"/>
+          <p:cNvSpPr/>
+          <p:nvPr/>
+        </p:nvSpPr>
+        <p:spPr>
+          <a:xfrm>
+            <a:off x="11137392" y="6510528"/>
+            <a:ext cx="411480" cy="201168"/>
+          </a:xfrm>
+          <a:prstGeom prst="rect">
+            <a:avLst/>
+          </a:prstGeom>
+          <a:noFill/>
+          <a:ln/>
+        </p:spPr>
+        <p:txBody>
+          <a:bodyPr wrap="square" lIns="0" tIns="0" rIns="0" bIns="0" rtlCol="0" anchor="ctr"/>
+          <a:lstStyle/>
+          <a:p>
+            <a:pPr algn="r" indent="0" marL="0">
+              <a:buNone/>
+            </a:pPr>
+            <a:r>
+              <a:rPr lang="en-US" sz="900" dirty="0">
+                <a:solidFill>
+                  <a:srgbClr val="5F7181"/>
+                </a:solidFill>
+                <a:latin typeface="Aptos" pitchFamily="34" charset="0"/>
+                <a:ea typeface="Aptos" pitchFamily="34" charset="-122"/>
+                <a:cs typeface="Aptos" pitchFamily="34" charset="-120"/>
+              </a:rPr>
+              <a:t>21</a:t>
+            </a:r>
+            <a:endParaRPr lang="en-US" sz="900" dirty="0"/>
+          </a:p>
+        </p:txBody>
+      </p:sp>
+      <p:sp>
+        <p:nvSpPr>
+          <p:cNvPr id="8" name="Shape 6"/>
           <p:cNvSpPr/>
           <p:nvPr/>
         </p:nvSpPr>
@@ -10049,7 +10700,7 @@
       </p:sp>
       <p:sp>
         <p:nvSpPr>
-          <p:cNvPr id="8" name="Text 6"/>
+          <p:cNvPr id="9" name="Text 7"/>
           <p:cNvSpPr/>
           <p:nvPr/>
         </p:nvSpPr>
@@ -10088,14 +10739,14 @@
       </p:sp>
       <p:sp>
         <p:nvSpPr>
-          <p:cNvPr id="9" name="Text 7"/>
+          <p:cNvPr id="10" name="Text 8"/>
           <p:cNvSpPr/>
           <p:nvPr/>
         </p:nvSpPr>
         <p:spPr>
           <a:xfrm>
             <a:off x="640080" y="621792"/>
-            <a:ext cx="10881360" cy="566928"/>
+            <a:ext cx="10881360" cy="713232"/>
           </a:xfrm>
           <a:prstGeom prst="rect">
             <a:avLst/>
@@ -10113,7 +10764,7 @@
               <a:buNone/>
             </a:pPr>
             <a:r>
-              <a:rPr lang="en-US" sz="2700" b="1" dirty="0">
+              <a:rPr lang="en-US" sz="3400" b="1" dirty="0">
                 <a:solidFill>
                   <a:srgbClr val="003A63"/>
                 </a:solidFill>
@@ -10123,20 +10774,20 @@
               </a:rPr>
               <a:t>Expected Assignment</a:t>
             </a:r>
-            <a:endParaRPr lang="en-US" sz="2700" dirty="0"/>
-          </a:p>
-        </p:txBody>
-      </p:sp>
-      <p:sp>
-        <p:nvSpPr>
-          <p:cNvPr id="10" name="Text 8"/>
-          <p:cNvSpPr/>
-          <p:nvPr/>
-        </p:nvSpPr>
-        <p:spPr>
-          <a:xfrm>
-            <a:off x="868680" y="1417320"/>
-            <a:ext cx="6675120" cy="4434840"/>
+            <a:endParaRPr lang="en-US" sz="3400" dirty="0"/>
+          </a:p>
+        </p:txBody>
+      </p:sp>
+      <p:sp>
+        <p:nvSpPr>
+          <p:cNvPr id="11" name="Text 9"/>
+          <p:cNvSpPr/>
+          <p:nvPr/>
+        </p:nvSpPr>
+        <p:spPr>
+          <a:xfrm>
+            <a:off x="868680" y="1508760"/>
+            <a:ext cx="6537960" cy="4160520"/>
           </a:xfrm>
           <a:prstGeom prst="rect">
             <a:avLst/>
@@ -10151,7 +10802,7 @@
           <a:lstStyle/>
           <a:p>
             <a:r>
-              <a:rPr lang="en-US" sz="1700" dirty="0">
+              <a:rPr lang="en-US" sz="2100" dirty="0">
                 <a:solidFill>
                   <a:srgbClr val="17364A"/>
                 </a:solidFill>
@@ -10161,11 +10812,11 @@
               </a:rPr>
               <a:t>Lab data quality checklist</a:t>
             </a:r>
-            <a:endParaRPr lang="en-US" sz="1700" dirty="0"/>
-          </a:p>
-          <a:p>
-            <a:r>
-              <a:rPr lang="en-US" sz="1700" dirty="0">
+            <a:endParaRPr lang="en-US" sz="2100" dirty="0"/>
+          </a:p>
+          <a:p>
+            <a:r>
+              <a:rPr lang="en-US" sz="2100" dirty="0">
                 <a:solidFill>
                   <a:srgbClr val="17364A"/>
                 </a:solidFill>
@@ -10175,11 +10826,11 @@
               </a:rPr>
               <a:t>Terminology mapping questions</a:t>
             </a:r>
-            <a:endParaRPr lang="en-US" sz="1700" dirty="0"/>
-          </a:p>
-          <a:p>
-            <a:r>
-              <a:rPr lang="en-US" sz="1700" dirty="0">
+            <a:endParaRPr lang="en-US" sz="2100" dirty="0"/>
+          </a:p>
+          <a:p>
+            <a:r>
+              <a:rPr lang="en-US" sz="2100" dirty="0">
                 <a:solidFill>
                   <a:srgbClr val="17364A"/>
                 </a:solidFill>
@@ -10189,27 +10840,13 @@
               </a:rPr>
               <a:t>Required-field list</a:t>
             </a:r>
-            <a:endParaRPr lang="en-US" sz="1700" dirty="0"/>
-          </a:p>
-          <a:p>
-            <a:r>
-              <a:rPr lang="en-US" sz="1700" dirty="0">
-                <a:solidFill>
-                  <a:srgbClr val="17364A"/>
-                </a:solidFill>
-                <a:latin typeface="Aptos" pitchFamily="34" charset="0"/>
-                <a:ea typeface="Aptos" pitchFamily="34" charset="-122"/>
-                <a:cs typeface="Aptos" pitchFamily="34" charset="-120"/>
-              </a:rPr>
-              <a:t>Data quality issue log</a:t>
-            </a:r>
-            <a:endParaRPr lang="en-US" sz="1700" dirty="0"/>
-          </a:p>
-        </p:txBody>
-      </p:sp>
-      <p:sp>
-        <p:nvSpPr>
-          <p:cNvPr id="11" name="Shape 9"/>
+            <a:endParaRPr lang="en-US" sz="2100" dirty="0"/>
+          </a:p>
+        </p:txBody>
+      </p:sp>
+      <p:sp>
+        <p:nvSpPr>
+          <p:cNvPr id="12" name="Shape 10"/>
           <p:cNvSpPr/>
           <p:nvPr/>
         </p:nvSpPr>
@@ -10236,14 +10873,14 @@
       </p:sp>
       <p:sp>
         <p:nvSpPr>
-          <p:cNvPr id="12" name="Text 10"/>
+          <p:cNvPr id="13" name="Text 11"/>
           <p:cNvSpPr/>
           <p:nvPr/>
         </p:nvSpPr>
         <p:spPr>
           <a:xfrm>
             <a:off x="8074152" y="1563624"/>
-            <a:ext cx="2825496" cy="201168"/>
+            <a:ext cx="2825496" cy="256032"/>
           </a:xfrm>
           <a:prstGeom prst="rect">
             <a:avLst/>
@@ -10259,7 +10896,7 @@
               <a:buNone/>
             </a:pPr>
             <a:r>
-              <a:rPr lang="en-US" sz="950" b="1" dirty="0">
+              <a:rPr lang="en-US" sz="1300" b="1" dirty="0">
                 <a:solidFill>
                   <a:srgbClr val="0068B7"/>
                 </a:solidFill>
@@ -10269,20 +10906,20 @@
               </a:rPr>
               <a:t>Key idea</a:t>
             </a:r>
-            <a:endParaRPr lang="en-US" sz="950" dirty="0"/>
-          </a:p>
-        </p:txBody>
-      </p:sp>
-      <p:sp>
-        <p:nvSpPr>
-          <p:cNvPr id="13" name="Text 11"/>
-          <p:cNvSpPr/>
-          <p:nvPr/>
-        </p:nvSpPr>
-        <p:spPr>
-          <a:xfrm>
-            <a:off x="8074152" y="1856232"/>
-            <a:ext cx="2825496" cy="1261872"/>
+            <a:endParaRPr lang="en-US" sz="1300" dirty="0"/>
+          </a:p>
+        </p:txBody>
+      </p:sp>
+      <p:sp>
+        <p:nvSpPr>
+          <p:cNvPr id="14" name="Text 12"/>
+          <p:cNvSpPr/>
+          <p:nvPr/>
+        </p:nvSpPr>
+        <p:spPr>
+          <a:xfrm>
+            <a:off x="8074152" y="1920240"/>
+            <a:ext cx="2825496" cy="1188720"/>
           </a:xfrm>
           <a:prstGeom prst="rect">
             <a:avLst/>
@@ -10300,7 +10937,7 @@
               <a:buNone/>
             </a:pPr>
             <a:r>
-              <a:rPr lang="en-US" sz="1250" dirty="0">
+              <a:rPr lang="en-US" sz="1550" dirty="0">
                 <a:solidFill>
                   <a:srgbClr val="17364A"/>
                 </a:solidFill>
@@ -10310,13 +10947,13 @@
               </a:rPr>
               <a:t>Lab data quality checklist</a:t>
             </a:r>
-            <a:endParaRPr lang="en-US" sz="1250" dirty="0"/>
-          </a:p>
-        </p:txBody>
-      </p:sp>
-      <p:sp>
-        <p:nvSpPr>
-          <p:cNvPr id="14" name="Shape 12"/>
+            <a:endParaRPr lang="en-US" sz="1550" dirty="0"/>
+          </a:p>
+        </p:txBody>
+      </p:sp>
+      <p:sp>
+        <p:nvSpPr>
+          <p:cNvPr id="15" name="Shape 13"/>
           <p:cNvSpPr/>
           <p:nvPr/>
         </p:nvSpPr>
@@ -10343,14 +10980,14 @@
       </p:sp>
       <p:sp>
         <p:nvSpPr>
-          <p:cNvPr id="15" name="Text 13"/>
+          <p:cNvPr id="16" name="Text 14"/>
           <p:cNvSpPr/>
           <p:nvPr/>
         </p:nvSpPr>
         <p:spPr>
           <a:xfrm>
             <a:off x="8074152" y="3666744"/>
-            <a:ext cx="2825496" cy="201168"/>
+            <a:ext cx="2825496" cy="256032"/>
           </a:xfrm>
           <a:prstGeom prst="rect">
             <a:avLst/>
@@ -10366,7 +11003,7 @@
               <a:buNone/>
             </a:pPr>
             <a:r>
-              <a:rPr lang="en-US" sz="950" b="1" dirty="0">
+              <a:rPr lang="en-US" sz="1300" b="1" dirty="0">
                 <a:solidFill>
                   <a:srgbClr val="0068B7"/>
                 </a:solidFill>
@@ -10376,20 +11013,20 @@
               </a:rPr>
               <a:t>Use this for</a:t>
             </a:r>
-            <a:endParaRPr lang="en-US" sz="950" dirty="0"/>
-          </a:p>
-        </p:txBody>
-      </p:sp>
-      <p:sp>
-        <p:nvSpPr>
-          <p:cNvPr id="16" name="Text 14"/>
-          <p:cNvSpPr/>
-          <p:nvPr/>
-        </p:nvSpPr>
-        <p:spPr>
-          <a:xfrm>
-            <a:off x="8074152" y="3959352"/>
-            <a:ext cx="2825496" cy="1170432"/>
+            <a:endParaRPr lang="en-US" sz="1300" dirty="0"/>
+          </a:p>
+        </p:txBody>
+      </p:sp>
+      <p:sp>
+        <p:nvSpPr>
+          <p:cNvPr id="17" name="Text 15"/>
+          <p:cNvSpPr/>
+          <p:nvPr/>
+        </p:nvSpPr>
+        <p:spPr>
+          <a:xfrm>
+            <a:off x="8074152" y="4023360"/>
+            <a:ext cx="2825496" cy="1097280"/>
           </a:xfrm>
           <a:prstGeom prst="rect">
             <a:avLst/>
@@ -10407,7 +11044,7 @@
               <a:buNone/>
             </a:pPr>
             <a:r>
-              <a:rPr lang="en-US" sz="1250" dirty="0">
+              <a:rPr lang="en-US" sz="1550" dirty="0">
                 <a:solidFill>
                   <a:srgbClr val="17364A"/>
                 </a:solidFill>
@@ -10417,7 +11054,7 @@
               </a:rPr>
               <a:t>Connect the concept to public health decisions, safeguards, documentation, or implementation work.</a:t>
             </a:r>
-            <a:endParaRPr lang="en-US" sz="1250" dirty="0"/>
+            <a:endParaRPr lang="en-US" sz="1550" dirty="0"/>
           </a:p>
         </p:txBody>
       </p:sp>
@@ -10614,7 +11251,7 @@
                 <a:ea typeface="Aptos" pitchFamily="34" charset="-122"/>
                 <a:cs typeface="Aptos" pitchFamily="34" charset="-120"/>
               </a:rPr>
-              <a:t>© Paula Soper</a:t>
+              <a:t>Â© Paula Soper</a:t>
             </a:r>
             <a:endParaRPr lang="en-US" sz="800" dirty="0"/>
           </a:p>
@@ -10622,7 +11259,46 @@
       </p:sp>
       <p:sp>
         <p:nvSpPr>
-          <p:cNvPr id="7" name="Shape 5"/>
+          <p:cNvPr id="7" name="Text 5"/>
+          <p:cNvSpPr/>
+          <p:nvPr/>
+        </p:nvSpPr>
+        <p:spPr>
+          <a:xfrm>
+            <a:off x="11137392" y="6510528"/>
+            <a:ext cx="411480" cy="201168"/>
+          </a:xfrm>
+          <a:prstGeom prst="rect">
+            <a:avLst/>
+          </a:prstGeom>
+          <a:noFill/>
+          <a:ln/>
+        </p:spPr>
+        <p:txBody>
+          <a:bodyPr wrap="square" lIns="0" tIns="0" rIns="0" bIns="0" rtlCol="0" anchor="ctr"/>
+          <a:lstStyle/>
+          <a:p>
+            <a:pPr algn="r" indent="0" marL="0">
+              <a:buNone/>
+            </a:pPr>
+            <a:r>
+              <a:rPr lang="en-US" sz="900" dirty="0">
+                <a:solidFill>
+                  <a:srgbClr val="5F7181"/>
+                </a:solidFill>
+                <a:latin typeface="Aptos" pitchFamily="34" charset="0"/>
+                <a:ea typeface="Aptos" pitchFamily="34" charset="-122"/>
+                <a:cs typeface="Aptos" pitchFamily="34" charset="-120"/>
+              </a:rPr>
+              <a:t>22</a:t>
+            </a:r>
+            <a:endParaRPr lang="en-US" sz="900" dirty="0"/>
+          </a:p>
+        </p:txBody>
+      </p:sp>
+      <p:sp>
+        <p:nvSpPr>
+          <p:cNvPr id="8" name="Shape 6"/>
           <p:cNvSpPr/>
           <p:nvPr/>
         </p:nvSpPr>
@@ -10647,7 +11323,7 @@
       </p:sp>
       <p:sp>
         <p:nvSpPr>
-          <p:cNvPr id="8" name="Text 6"/>
+          <p:cNvPr id="9" name="Text 7"/>
           <p:cNvSpPr/>
           <p:nvPr/>
         </p:nvSpPr>
@@ -10686,14 +11362,14 @@
       </p:sp>
       <p:sp>
         <p:nvSpPr>
-          <p:cNvPr id="9" name="Text 7"/>
+          <p:cNvPr id="10" name="Text 8"/>
           <p:cNvSpPr/>
           <p:nvPr/>
         </p:nvSpPr>
         <p:spPr>
           <a:xfrm>
             <a:off x="640080" y="621792"/>
-            <a:ext cx="10881360" cy="566928"/>
+            <a:ext cx="10881360" cy="713232"/>
           </a:xfrm>
           <a:prstGeom prst="rect">
             <a:avLst/>
@@ -10711,7 +11387,7 @@
               <a:buNone/>
             </a:pPr>
             <a:r>
-              <a:rPr lang="en-US" sz="2700" b="1" dirty="0">
+              <a:rPr lang="en-US" sz="3400" b="1" dirty="0">
                 <a:solidFill>
                   <a:srgbClr val="003A63"/>
                 </a:solidFill>
@@ -10721,20 +11397,20 @@
               </a:rPr>
               <a:t>Knowledge Check</a:t>
             </a:r>
-            <a:endParaRPr lang="en-US" sz="2700" dirty="0"/>
-          </a:p>
-        </p:txBody>
-      </p:sp>
-      <p:sp>
-        <p:nvSpPr>
-          <p:cNvPr id="10" name="Text 8"/>
-          <p:cNvSpPr/>
-          <p:nvPr/>
-        </p:nvSpPr>
-        <p:spPr>
-          <a:xfrm>
-            <a:off x="868680" y="1417320"/>
-            <a:ext cx="6675120" cy="4434840"/>
+            <a:endParaRPr lang="en-US" sz="3400" dirty="0"/>
+          </a:p>
+        </p:txBody>
+      </p:sp>
+      <p:sp>
+        <p:nvSpPr>
+          <p:cNvPr id="11" name="Text 9"/>
+          <p:cNvSpPr/>
+          <p:nvPr/>
+        </p:nvSpPr>
+        <p:spPr>
+          <a:xfrm>
+            <a:off x="868680" y="1508760"/>
+            <a:ext cx="6537960" cy="4160520"/>
           </a:xfrm>
           <a:prstGeom prst="rect">
             <a:avLst/>
@@ -10749,7 +11425,7 @@
           <a:lstStyle/>
           <a:p>
             <a:r>
-              <a:rPr lang="en-US" sz="1700" dirty="0">
+              <a:rPr lang="en-US" sz="2100" dirty="0">
                 <a:solidFill>
                   <a:srgbClr val="17364A"/>
                 </a:solidFill>
@@ -10759,11 +11435,11 @@
               </a:rPr>
               <a:t>1. Why is terminology mapping important for AI-supported surveillance?</a:t>
             </a:r>
-            <a:endParaRPr lang="en-US" sz="1700" dirty="0"/>
-          </a:p>
-          <a:p>
-            <a:r>
-              <a:rPr lang="en-US" sz="1700" dirty="0">
+            <a:endParaRPr lang="en-US" sz="2100" dirty="0"/>
+          </a:p>
+          <a:p>
+            <a:r>
+              <a:rPr lang="en-US" sz="2100" dirty="0">
                 <a:solidFill>
                   <a:srgbClr val="17364A"/>
                 </a:solidFill>
@@ -10773,11 +11449,11 @@
               </a:rPr>
               <a:t>2. What is LOINC commonly used for?</a:t>
             </a:r>
-            <a:endParaRPr lang="en-US" sz="1700" dirty="0"/>
-          </a:p>
-          <a:p>
-            <a:r>
-              <a:rPr lang="en-US" sz="1700" dirty="0">
+            <a:endParaRPr lang="en-US" sz="2100" dirty="0"/>
+          </a:p>
+          <a:p>
+            <a:r>
+              <a:rPr lang="en-US" sz="2100" dirty="0">
                 <a:solidFill>
                   <a:srgbClr val="17364A"/>
                 </a:solidFill>
@@ -10787,27 +11463,13 @@
               </a:rPr>
               <a:t>3. Which issue can make a quantitative lab result difficult to interpret?</a:t>
             </a:r>
-            <a:endParaRPr lang="en-US" sz="1700" dirty="0"/>
-          </a:p>
-          <a:p>
-            <a:r>
-              <a:rPr lang="en-US" sz="1700" dirty="0">
-                <a:solidFill>
-                  <a:srgbClr val="17364A"/>
-                </a:solidFill>
-                <a:latin typeface="Aptos" pitchFamily="34" charset="0"/>
-                <a:ea typeface="Aptos" pitchFamily="34" charset="-122"/>
-                <a:cs typeface="Aptos" pitchFamily="34" charset="-120"/>
-              </a:rPr>
-              <a:t>4. What should happen before AI is used to classify lab reports?</a:t>
-            </a:r>
-            <a:endParaRPr lang="en-US" sz="1700" dirty="0"/>
-          </a:p>
-        </p:txBody>
-      </p:sp>
-      <p:sp>
-        <p:nvSpPr>
-          <p:cNvPr id="11" name="Shape 9"/>
+            <a:endParaRPr lang="en-US" sz="2100" dirty="0"/>
+          </a:p>
+        </p:txBody>
+      </p:sp>
+      <p:sp>
+        <p:nvSpPr>
+          <p:cNvPr id="12" name="Shape 10"/>
           <p:cNvSpPr/>
           <p:nvPr/>
         </p:nvSpPr>
@@ -10834,14 +11496,14 @@
       </p:sp>
       <p:sp>
         <p:nvSpPr>
-          <p:cNvPr id="12" name="Text 10"/>
+          <p:cNvPr id="13" name="Text 11"/>
           <p:cNvSpPr/>
           <p:nvPr/>
         </p:nvSpPr>
         <p:spPr>
           <a:xfrm>
             <a:off x="8074152" y="1563624"/>
-            <a:ext cx="2825496" cy="201168"/>
+            <a:ext cx="2825496" cy="256032"/>
           </a:xfrm>
           <a:prstGeom prst="rect">
             <a:avLst/>
@@ -10857,7 +11519,7 @@
               <a:buNone/>
             </a:pPr>
             <a:r>
-              <a:rPr lang="en-US" sz="950" b="1" dirty="0">
+              <a:rPr lang="en-US" sz="1300" b="1" dirty="0">
                 <a:solidFill>
                   <a:srgbClr val="0068B7"/>
                 </a:solidFill>
@@ -10867,20 +11529,20 @@
               </a:rPr>
               <a:t>Key idea</a:t>
             </a:r>
-            <a:endParaRPr lang="en-US" sz="950" dirty="0"/>
-          </a:p>
-        </p:txBody>
-      </p:sp>
-      <p:sp>
-        <p:nvSpPr>
-          <p:cNvPr id="13" name="Text 11"/>
-          <p:cNvSpPr/>
-          <p:nvPr/>
-        </p:nvSpPr>
-        <p:spPr>
-          <a:xfrm>
-            <a:off x="8074152" y="1856232"/>
-            <a:ext cx="2825496" cy="1261872"/>
+            <a:endParaRPr lang="en-US" sz="1300" dirty="0"/>
+          </a:p>
+        </p:txBody>
+      </p:sp>
+      <p:sp>
+        <p:nvSpPr>
+          <p:cNvPr id="14" name="Text 12"/>
+          <p:cNvSpPr/>
+          <p:nvPr/>
+        </p:nvSpPr>
+        <p:spPr>
+          <a:xfrm>
+            <a:off x="8074152" y="1920240"/>
+            <a:ext cx="2825496" cy="1188720"/>
           </a:xfrm>
           <a:prstGeom prst="rect">
             <a:avLst/>
@@ -10898,7 +11560,7 @@
               <a:buNone/>
             </a:pPr>
             <a:r>
-              <a:rPr lang="en-US" sz="1250" dirty="0">
+              <a:rPr lang="en-US" sz="1550" dirty="0">
                 <a:solidFill>
                   <a:srgbClr val="17364A"/>
                 </a:solidFill>
@@ -10908,13 +11570,13 @@
               </a:rPr>
               <a:t>1. Why is terminology mapping important for AI-supported surveillance?</a:t>
             </a:r>
-            <a:endParaRPr lang="en-US" sz="1250" dirty="0"/>
-          </a:p>
-        </p:txBody>
-      </p:sp>
-      <p:sp>
-        <p:nvSpPr>
-          <p:cNvPr id="14" name="Shape 12"/>
+            <a:endParaRPr lang="en-US" sz="1550" dirty="0"/>
+          </a:p>
+        </p:txBody>
+      </p:sp>
+      <p:sp>
+        <p:nvSpPr>
+          <p:cNvPr id="15" name="Shape 13"/>
           <p:cNvSpPr/>
           <p:nvPr/>
         </p:nvSpPr>
@@ -10941,14 +11603,14 @@
       </p:sp>
       <p:sp>
         <p:nvSpPr>
-          <p:cNvPr id="15" name="Text 13"/>
+          <p:cNvPr id="16" name="Text 14"/>
           <p:cNvSpPr/>
           <p:nvPr/>
         </p:nvSpPr>
         <p:spPr>
           <a:xfrm>
             <a:off x="8074152" y="3666744"/>
-            <a:ext cx="2825496" cy="201168"/>
+            <a:ext cx="2825496" cy="256032"/>
           </a:xfrm>
           <a:prstGeom prst="rect">
             <a:avLst/>
@@ -10964,7 +11626,7 @@
               <a:buNone/>
             </a:pPr>
             <a:r>
-              <a:rPr lang="en-US" sz="950" b="1" dirty="0">
+              <a:rPr lang="en-US" sz="1300" b="1" dirty="0">
                 <a:solidFill>
                   <a:srgbClr val="0068B7"/>
                 </a:solidFill>
@@ -10974,20 +11636,20 @@
               </a:rPr>
               <a:t>Use this for</a:t>
             </a:r>
-            <a:endParaRPr lang="en-US" sz="950" dirty="0"/>
-          </a:p>
-        </p:txBody>
-      </p:sp>
-      <p:sp>
-        <p:nvSpPr>
-          <p:cNvPr id="16" name="Text 14"/>
-          <p:cNvSpPr/>
-          <p:nvPr/>
-        </p:nvSpPr>
-        <p:spPr>
-          <a:xfrm>
-            <a:off x="8074152" y="3959352"/>
-            <a:ext cx="2825496" cy="1170432"/>
+            <a:endParaRPr lang="en-US" sz="1300" dirty="0"/>
+          </a:p>
+        </p:txBody>
+      </p:sp>
+      <p:sp>
+        <p:nvSpPr>
+          <p:cNvPr id="17" name="Text 15"/>
+          <p:cNvSpPr/>
+          <p:nvPr/>
+        </p:nvSpPr>
+        <p:spPr>
+          <a:xfrm>
+            <a:off x="8074152" y="4023360"/>
+            <a:ext cx="2825496" cy="1097280"/>
           </a:xfrm>
           <a:prstGeom prst="rect">
             <a:avLst/>
@@ -11005,7 +11667,7 @@
               <a:buNone/>
             </a:pPr>
             <a:r>
-              <a:rPr lang="en-US" sz="1250" dirty="0">
+              <a:rPr lang="en-US" sz="1550" dirty="0">
                 <a:solidFill>
                   <a:srgbClr val="17364A"/>
                 </a:solidFill>
@@ -11015,7 +11677,7 @@
               </a:rPr>
               <a:t>Connect the concept to public health decisions, safeguards, documentation, or implementation work.</a:t>
             </a:r>
-            <a:endParaRPr lang="en-US" sz="1250" dirty="0"/>
+            <a:endParaRPr lang="en-US" sz="1550" dirty="0"/>
           </a:p>
         </p:txBody>
       </p:sp>
@@ -11212,7 +11874,7 @@
                 <a:ea typeface="Aptos" pitchFamily="34" charset="-122"/>
                 <a:cs typeface="Aptos" pitchFamily="34" charset="-120"/>
               </a:rPr>
-              <a:t>© Paula Soper</a:t>
+              <a:t>Â© Paula Soper</a:t>
             </a:r>
             <a:endParaRPr lang="en-US" sz="800" dirty="0"/>
           </a:p>
@@ -11220,7 +11882,46 @@
       </p:sp>
       <p:sp>
         <p:nvSpPr>
-          <p:cNvPr id="7" name="Shape 5"/>
+          <p:cNvPr id="7" name="Text 5"/>
+          <p:cNvSpPr/>
+          <p:nvPr/>
+        </p:nvSpPr>
+        <p:spPr>
+          <a:xfrm>
+            <a:off x="11137392" y="6510528"/>
+            <a:ext cx="411480" cy="201168"/>
+          </a:xfrm>
+          <a:prstGeom prst="rect">
+            <a:avLst/>
+          </a:prstGeom>
+          <a:noFill/>
+          <a:ln/>
+        </p:spPr>
+        <p:txBody>
+          <a:bodyPr wrap="square" lIns="0" tIns="0" rIns="0" bIns="0" rtlCol="0" anchor="ctr"/>
+          <a:lstStyle/>
+          <a:p>
+            <a:pPr algn="r" indent="0" marL="0">
+              <a:buNone/>
+            </a:pPr>
+            <a:r>
+              <a:rPr lang="en-US" sz="900" dirty="0">
+                <a:solidFill>
+                  <a:srgbClr val="5F7181"/>
+                </a:solidFill>
+                <a:latin typeface="Aptos" pitchFamily="34" charset="0"/>
+                <a:ea typeface="Aptos" pitchFamily="34" charset="-122"/>
+                <a:cs typeface="Aptos" pitchFamily="34" charset="-120"/>
+              </a:rPr>
+              <a:t>23</a:t>
+            </a:r>
+            <a:endParaRPr lang="en-US" sz="900" dirty="0"/>
+          </a:p>
+        </p:txBody>
+      </p:sp>
+      <p:sp>
+        <p:nvSpPr>
+          <p:cNvPr id="8" name="Shape 6"/>
           <p:cNvSpPr/>
           <p:nvPr/>
         </p:nvSpPr>
@@ -11245,7 +11946,7 @@
       </p:sp>
       <p:sp>
         <p:nvSpPr>
-          <p:cNvPr id="8" name="Text 6"/>
+          <p:cNvPr id="9" name="Text 7"/>
           <p:cNvSpPr/>
           <p:nvPr/>
         </p:nvSpPr>
@@ -11284,14 +11985,14 @@
       </p:sp>
       <p:sp>
         <p:nvSpPr>
-          <p:cNvPr id="9" name="Text 7"/>
+          <p:cNvPr id="10" name="Text 8"/>
           <p:cNvSpPr/>
           <p:nvPr/>
         </p:nvSpPr>
         <p:spPr>
           <a:xfrm>
             <a:off x="640080" y="621792"/>
-            <a:ext cx="10881360" cy="566928"/>
+            <a:ext cx="10881360" cy="713232"/>
           </a:xfrm>
           <a:prstGeom prst="rect">
             <a:avLst/>
@@ -11309,7 +12010,7 @@
               <a:buNone/>
             </a:pPr>
             <a:r>
-              <a:rPr lang="en-US" sz="2700" b="1" dirty="0">
+              <a:rPr lang="en-US" sz="3400" b="1" dirty="0">
                 <a:solidFill>
                   <a:srgbClr val="003A63"/>
                 </a:solidFill>
@@ -11319,20 +12020,20 @@
               </a:rPr>
               <a:t>References and Resources</a:t>
             </a:r>
-            <a:endParaRPr lang="en-US" sz="2700" dirty="0"/>
-          </a:p>
-        </p:txBody>
-      </p:sp>
-      <p:sp>
-        <p:nvSpPr>
-          <p:cNvPr id="10" name="Text 8"/>
-          <p:cNvSpPr/>
-          <p:nvPr/>
-        </p:nvSpPr>
-        <p:spPr>
-          <a:xfrm>
-            <a:off x="868680" y="1417320"/>
-            <a:ext cx="6675120" cy="4434840"/>
+            <a:endParaRPr lang="en-US" sz="3400" dirty="0"/>
+          </a:p>
+        </p:txBody>
+      </p:sp>
+      <p:sp>
+        <p:nvSpPr>
+          <p:cNvPr id="11" name="Text 9"/>
+          <p:cNvSpPr/>
+          <p:nvPr/>
+        </p:nvSpPr>
+        <p:spPr>
+          <a:xfrm>
+            <a:off x="868680" y="1508760"/>
+            <a:ext cx="6537960" cy="4160520"/>
           </a:xfrm>
           <a:prstGeom prst="rect">
             <a:avLst/>
@@ -11347,7 +12048,7 @@
           <a:lstStyle/>
           <a:p>
             <a:r>
-              <a:rPr lang="en-US" sz="1700" dirty="0">
+              <a:rPr lang="en-US" sz="2100" dirty="0">
                 <a:solidFill>
                   <a:srgbClr val="17364A"/>
                 </a:solidFill>
@@ -11357,11 +12058,11 @@
               </a:rPr>
               <a:t>CDC PHIN VADS</a:t>
             </a:r>
-            <a:endParaRPr lang="en-US" sz="1700" dirty="0"/>
-          </a:p>
-          <a:p>
-            <a:r>
-              <a:rPr lang="en-US" sz="1700" dirty="0">
+            <a:endParaRPr lang="en-US" sz="2100" dirty="0"/>
+          </a:p>
+          <a:p>
+            <a:r>
+              <a:rPr lang="en-US" sz="2100" dirty="0">
                 <a:solidFill>
                   <a:srgbClr val="17364A"/>
                 </a:solidFill>
@@ -11371,11 +12072,11 @@
               </a:rPr>
               <a:t>Reportable Condition Mapping Table resources</a:t>
             </a:r>
-            <a:endParaRPr lang="en-US" sz="1700" dirty="0"/>
-          </a:p>
-          <a:p>
-            <a:r>
-              <a:rPr lang="en-US" sz="1700" dirty="0">
+            <a:endParaRPr lang="en-US" sz="2100" dirty="0"/>
+          </a:p>
+          <a:p>
+            <a:r>
+              <a:rPr lang="en-US" sz="2100" dirty="0">
                 <a:solidFill>
                   <a:srgbClr val="17364A"/>
                 </a:solidFill>
@@ -11385,27 +12086,13 @@
               </a:rPr>
               <a:t>APHL laboratory informatics resources</a:t>
             </a:r>
-            <a:endParaRPr lang="en-US" sz="1700" dirty="0"/>
-          </a:p>
-          <a:p>
-            <a:r>
-              <a:rPr lang="en-US" sz="1700" dirty="0">
-                <a:solidFill>
-                  <a:srgbClr val="17364A"/>
-                </a:solidFill>
-                <a:latin typeface="Aptos" pitchFamily="34" charset="0"/>
-                <a:ea typeface="Aptos" pitchFamily="34" charset="-122"/>
-                <a:cs typeface="Aptos" pitchFamily="34" charset="-120"/>
-              </a:rPr>
-              <a:t>Jurisdictional ELR onboarding and data quality documentation</a:t>
-            </a:r>
-            <a:endParaRPr lang="en-US" sz="1700" dirty="0"/>
-          </a:p>
-        </p:txBody>
-      </p:sp>
-      <p:sp>
-        <p:nvSpPr>
-          <p:cNvPr id="11" name="Shape 9"/>
+            <a:endParaRPr lang="en-US" sz="2100" dirty="0"/>
+          </a:p>
+        </p:txBody>
+      </p:sp>
+      <p:sp>
+        <p:nvSpPr>
+          <p:cNvPr id="12" name="Shape 10"/>
           <p:cNvSpPr/>
           <p:nvPr/>
         </p:nvSpPr>
@@ -11432,14 +12119,14 @@
       </p:sp>
       <p:sp>
         <p:nvSpPr>
-          <p:cNvPr id="12" name="Text 10"/>
+          <p:cNvPr id="13" name="Text 11"/>
           <p:cNvSpPr/>
           <p:nvPr/>
         </p:nvSpPr>
         <p:spPr>
           <a:xfrm>
             <a:off x="8074152" y="1563624"/>
-            <a:ext cx="2825496" cy="201168"/>
+            <a:ext cx="2825496" cy="256032"/>
           </a:xfrm>
           <a:prstGeom prst="rect">
             <a:avLst/>
@@ -11455,7 +12142,7 @@
               <a:buNone/>
             </a:pPr>
             <a:r>
-              <a:rPr lang="en-US" sz="950" b="1" dirty="0">
+              <a:rPr lang="en-US" sz="1300" b="1" dirty="0">
                 <a:solidFill>
                   <a:srgbClr val="0068B7"/>
                 </a:solidFill>
@@ -11465,20 +12152,20 @@
               </a:rPr>
               <a:t>Key idea</a:t>
             </a:r>
-            <a:endParaRPr lang="en-US" sz="950" dirty="0"/>
-          </a:p>
-        </p:txBody>
-      </p:sp>
-      <p:sp>
-        <p:nvSpPr>
-          <p:cNvPr id="13" name="Text 11"/>
-          <p:cNvSpPr/>
-          <p:nvPr/>
-        </p:nvSpPr>
-        <p:spPr>
-          <a:xfrm>
-            <a:off x="8074152" y="1856232"/>
-            <a:ext cx="2825496" cy="1261872"/>
+            <a:endParaRPr lang="en-US" sz="1300" dirty="0"/>
+          </a:p>
+        </p:txBody>
+      </p:sp>
+      <p:sp>
+        <p:nvSpPr>
+          <p:cNvPr id="14" name="Text 12"/>
+          <p:cNvSpPr/>
+          <p:nvPr/>
+        </p:nvSpPr>
+        <p:spPr>
+          <a:xfrm>
+            <a:off x="8074152" y="1920240"/>
+            <a:ext cx="2825496" cy="1188720"/>
           </a:xfrm>
           <a:prstGeom prst="rect">
             <a:avLst/>
@@ -11496,7 +12183,7 @@
               <a:buNone/>
             </a:pPr>
             <a:r>
-              <a:rPr lang="en-US" sz="1250" dirty="0">
+              <a:rPr lang="en-US" sz="1550" dirty="0">
                 <a:solidFill>
                   <a:srgbClr val="17364A"/>
                 </a:solidFill>
@@ -11506,13 +12193,13 @@
               </a:rPr>
               <a:t>CDC PHIN VADS</a:t>
             </a:r>
-            <a:endParaRPr lang="en-US" sz="1250" dirty="0"/>
-          </a:p>
-        </p:txBody>
-      </p:sp>
-      <p:sp>
-        <p:nvSpPr>
-          <p:cNvPr id="14" name="Shape 12"/>
+            <a:endParaRPr lang="en-US" sz="1550" dirty="0"/>
+          </a:p>
+        </p:txBody>
+      </p:sp>
+      <p:sp>
+        <p:nvSpPr>
+          <p:cNvPr id="15" name="Shape 13"/>
           <p:cNvSpPr/>
           <p:nvPr/>
         </p:nvSpPr>
@@ -11539,14 +12226,14 @@
       </p:sp>
       <p:sp>
         <p:nvSpPr>
-          <p:cNvPr id="15" name="Text 13"/>
+          <p:cNvPr id="16" name="Text 14"/>
           <p:cNvSpPr/>
           <p:nvPr/>
         </p:nvSpPr>
         <p:spPr>
           <a:xfrm>
             <a:off x="8074152" y="3666744"/>
-            <a:ext cx="2825496" cy="201168"/>
+            <a:ext cx="2825496" cy="256032"/>
           </a:xfrm>
           <a:prstGeom prst="rect">
             <a:avLst/>
@@ -11562,7 +12249,7 @@
               <a:buNone/>
             </a:pPr>
             <a:r>
-              <a:rPr lang="en-US" sz="950" b="1" dirty="0">
+              <a:rPr lang="en-US" sz="1300" b="1" dirty="0">
                 <a:solidFill>
                   <a:srgbClr val="0068B7"/>
                 </a:solidFill>
@@ -11572,20 +12259,20 @@
               </a:rPr>
               <a:t>Use this for</a:t>
             </a:r>
-            <a:endParaRPr lang="en-US" sz="950" dirty="0"/>
-          </a:p>
-        </p:txBody>
-      </p:sp>
-      <p:sp>
-        <p:nvSpPr>
-          <p:cNvPr id="16" name="Text 14"/>
-          <p:cNvSpPr/>
-          <p:nvPr/>
-        </p:nvSpPr>
-        <p:spPr>
-          <a:xfrm>
-            <a:off x="8074152" y="3959352"/>
-            <a:ext cx="2825496" cy="1170432"/>
+            <a:endParaRPr lang="en-US" sz="1300" dirty="0"/>
+          </a:p>
+        </p:txBody>
+      </p:sp>
+      <p:sp>
+        <p:nvSpPr>
+          <p:cNvPr id="17" name="Text 15"/>
+          <p:cNvSpPr/>
+          <p:nvPr/>
+        </p:nvSpPr>
+        <p:spPr>
+          <a:xfrm>
+            <a:off x="8074152" y="4023360"/>
+            <a:ext cx="2825496" cy="1097280"/>
           </a:xfrm>
           <a:prstGeom prst="rect">
             <a:avLst/>
@@ -11603,7 +12290,7 @@
               <a:buNone/>
             </a:pPr>
             <a:r>
-              <a:rPr lang="en-US" sz="1250" dirty="0">
+              <a:rPr lang="en-US" sz="1550" dirty="0">
                 <a:solidFill>
                   <a:srgbClr val="17364A"/>
                 </a:solidFill>
@@ -11613,7 +12300,7 @@
               </a:rPr>
               <a:t>Connect the concept to public health decisions, safeguards, documentation, or implementation work.</a:t>
             </a:r>
-            <a:endParaRPr lang="en-US" sz="1250" dirty="0"/>
+            <a:endParaRPr lang="en-US" sz="1550" dirty="0"/>
           </a:p>
         </p:txBody>
       </p:sp>
@@ -11810,7 +12497,7 @@
                 <a:ea typeface="Aptos" pitchFamily="34" charset="-122"/>
                 <a:cs typeface="Aptos" pitchFamily="34" charset="-120"/>
               </a:rPr>
-              <a:t>© Paula Soper</a:t>
+              <a:t>Â© Paula Soper</a:t>
             </a:r>
             <a:endParaRPr lang="en-US" sz="800" dirty="0"/>
           </a:p>
@@ -11824,8 +12511,47 @@
         </p:nvSpPr>
         <p:spPr>
           <a:xfrm>
+            <a:off x="11137392" y="6510528"/>
+            <a:ext cx="411480" cy="201168"/>
+          </a:xfrm>
+          <a:prstGeom prst="rect">
+            <a:avLst/>
+          </a:prstGeom>
+          <a:noFill/>
+          <a:ln/>
+        </p:spPr>
+        <p:txBody>
+          <a:bodyPr wrap="square" lIns="0" tIns="0" rIns="0" bIns="0" rtlCol="0" anchor="ctr"/>
+          <a:lstStyle/>
+          <a:p>
+            <a:pPr algn="r" indent="0" marL="0">
+              <a:buNone/>
+            </a:pPr>
+            <a:r>
+              <a:rPr lang="en-US" sz="900" dirty="0">
+                <a:solidFill>
+                  <a:srgbClr val="5F7181"/>
+                </a:solidFill>
+                <a:latin typeface="Aptos" pitchFamily="34" charset="0"/>
+                <a:ea typeface="Aptos" pitchFamily="34" charset="-122"/>
+                <a:cs typeface="Aptos" pitchFamily="34" charset="-120"/>
+              </a:rPr>
+              <a:t>3</a:t>
+            </a:r>
+            <a:endParaRPr lang="en-US" sz="900" dirty="0"/>
+          </a:p>
+        </p:txBody>
+      </p:sp>
+      <p:sp>
+        <p:nvSpPr>
+          <p:cNvPr id="8" name="Text 6"/>
+          <p:cNvSpPr/>
+          <p:nvPr/>
+        </p:nvSpPr>
+        <p:spPr>
+          <a:xfrm>
             <a:off x="640080" y="658368"/>
-            <a:ext cx="10881360" cy="566928"/>
+            <a:ext cx="10881360" cy="713232"/>
           </a:xfrm>
           <a:prstGeom prst="rect">
             <a:avLst/>
@@ -11843,7 +12569,7 @@
               <a:buNone/>
             </a:pPr>
             <a:r>
-              <a:rPr lang="en-US" sz="2700" b="1" dirty="0">
+              <a:rPr lang="en-US" sz="3400" b="1" dirty="0">
                 <a:solidFill>
                   <a:srgbClr val="003A63"/>
                 </a:solidFill>
@@ -11853,20 +12579,20 @@
               </a:rPr>
               <a:t>How this module connects to the playbook</a:t>
             </a:r>
-            <a:endParaRPr lang="en-US" sz="2700" dirty="0"/>
-          </a:p>
-        </p:txBody>
-      </p:sp>
-      <p:sp>
-        <p:nvSpPr>
-          <p:cNvPr id="8" name="Text 6"/>
-          <p:cNvSpPr/>
-          <p:nvPr/>
-        </p:nvSpPr>
-        <p:spPr>
-          <a:xfrm>
-            <a:off x="868680" y="1417320"/>
-            <a:ext cx="6903720" cy="4480560"/>
+            <a:endParaRPr lang="en-US" sz="3400" dirty="0"/>
+          </a:p>
+        </p:txBody>
+      </p:sp>
+      <p:sp>
+        <p:nvSpPr>
+          <p:cNvPr id="9" name="Text 7"/>
+          <p:cNvSpPr/>
+          <p:nvPr/>
+        </p:nvSpPr>
+        <p:spPr>
+          <a:xfrm>
+            <a:off x="868680" y="1508760"/>
+            <a:ext cx="6812280" cy="3977640"/>
           </a:xfrm>
           <a:prstGeom prst="rect">
             <a:avLst/>
@@ -11881,7 +12607,7 @@
           <a:lstStyle/>
           <a:p>
             <a:r>
-              <a:rPr lang="en-US" sz="1540" dirty="0">
+              <a:rPr lang="en-US" sz="1900" dirty="0">
                 <a:solidFill>
                   <a:srgbClr val="17364A"/>
                 </a:solidFill>
@@ -11889,13 +12615,13 @@
                 <a:ea typeface="Aptos" pitchFamily="34" charset="-122"/>
                 <a:cs typeface="Aptos" pitchFamily="34" charset="-120"/>
               </a:rPr>
-              <a:t>Play 11: Build and Deploy AI Solutions - This lesson informs Play 11 by helping learners connect the lesson topic to build and deploy.</a:t>
-            </a:r>
-            <a:endParaRPr lang="en-US" sz="1540" dirty="0"/>
-          </a:p>
-          <a:p>
-            <a:r>
-              <a:rPr lang="en-US" sz="1540" dirty="0">
+              <a:t>Play 11: Build and Deploy AI Solutions - This lesson informs Play 11 by helping learners connect the lesson.</a:t>
+            </a:r>
+            <a:endParaRPr lang="en-US" sz="1900" dirty="0"/>
+          </a:p>
+          <a:p>
+            <a:r>
+              <a:rPr lang="en-US" sz="1900" dirty="0">
                 <a:solidFill>
                   <a:srgbClr val="17364A"/>
                 </a:solidFill>
@@ -11903,13 +12629,13 @@
                 <a:ea typeface="Aptos" pitchFamily="34" charset="-122"/>
                 <a:cs typeface="Aptos" pitchFamily="34" charset="-120"/>
               </a:rPr>
-              <a:t>Play 7: Prioritize Use Cases - This lesson informs Play 7 by helping learners connect the lesson topic to prioritize use cases work.</a:t>
-            </a:r>
-            <a:endParaRPr lang="en-US" sz="1540" dirty="0"/>
-          </a:p>
-          <a:p>
-            <a:r>
-              <a:rPr lang="en-US" sz="1540" dirty="0">
+              <a:t>Play 7: Prioritize Use Cases - This lesson informs Play 7 by helping learners connect the lesson topic to.</a:t>
+            </a:r>
+            <a:endParaRPr lang="en-US" sz="1900" dirty="0"/>
+          </a:p>
+          <a:p>
+            <a:r>
+              <a:rPr lang="en-US" sz="1900" dirty="0">
                 <a:solidFill>
                   <a:srgbClr val="17364A"/>
                 </a:solidFill>
@@ -11917,13 +12643,13 @@
                 <a:ea typeface="Aptos" pitchFamily="34" charset="-122"/>
                 <a:cs typeface="Aptos" pitchFamily="34" charset="-120"/>
               </a:rPr>
-              <a:t>Play 2: Readiness Assessment - This lesson informs Play 2 by helping learners connect the lesson topic to readiness assessment work.</a:t>
-            </a:r>
-            <a:endParaRPr lang="en-US" sz="1540" dirty="0"/>
-          </a:p>
-          <a:p>
-            <a:r>
-              <a:rPr lang="en-US" sz="1540" dirty="0">
+              <a:t>Play 2: Readiness Assessment - This lesson informs Play 2 by helping learners connect the lesson topic to.</a:t>
+            </a:r>
+            <a:endParaRPr lang="en-US" sz="1900" dirty="0"/>
+          </a:p>
+          <a:p>
+            <a:r>
+              <a:rPr lang="en-US" sz="1900" dirty="0">
                 <a:solidFill>
                   <a:srgbClr val="17364A"/>
                 </a:solidFill>
@@ -11931,15 +12657,15 @@
                 <a:ea typeface="Aptos" pitchFamily="34" charset="-122"/>
                 <a:cs typeface="Aptos" pitchFamily="34" charset="-120"/>
               </a:rPr>
-              <a:t>Play 1: Vision &amp; Guardrails - This lesson informs Play 1 by helping learners connect the lesson topic to vision &amp; guardrails work in.</a:t>
-            </a:r>
-            <a:endParaRPr lang="en-US" sz="1540" dirty="0"/>
-          </a:p>
-        </p:txBody>
-      </p:sp>
-      <p:sp>
-        <p:nvSpPr>
-          <p:cNvPr id="9" name="Shape 7"/>
+              <a:t>Play 1: Vision &amp; Guardrails - This lesson informs Play 1 by helping learners connect the lesson topic to.</a:t>
+            </a:r>
+            <a:endParaRPr lang="en-US" sz="1900" dirty="0"/>
+          </a:p>
+        </p:txBody>
+      </p:sp>
+      <p:sp>
+        <p:nvSpPr>
+          <p:cNvPr id="10" name="Shape 8"/>
           <p:cNvSpPr/>
           <p:nvPr/>
         </p:nvSpPr>
@@ -11966,14 +12692,14 @@
       </p:sp>
       <p:sp>
         <p:nvSpPr>
-          <p:cNvPr id="10" name="Text 8"/>
+          <p:cNvPr id="11" name="Text 9"/>
           <p:cNvSpPr/>
           <p:nvPr/>
         </p:nvSpPr>
         <p:spPr>
           <a:xfrm>
             <a:off x="8211312" y="1563624"/>
-            <a:ext cx="2734056" cy="201168"/>
+            <a:ext cx="2734056" cy="256032"/>
           </a:xfrm>
           <a:prstGeom prst="rect">
             <a:avLst/>
@@ -11989,7 +12715,7 @@
               <a:buNone/>
             </a:pPr>
             <a:r>
-              <a:rPr lang="en-US" sz="950" b="1" dirty="0">
+              <a:rPr lang="en-US" sz="1300" b="1" dirty="0">
                 <a:solidFill>
                   <a:srgbClr val="0068B7"/>
                 </a:solidFill>
@@ -11999,20 +12725,20 @@
               </a:rPr>
               <a:t>Apply the lesson</a:t>
             </a:r>
-            <a:endParaRPr lang="en-US" sz="950" dirty="0"/>
-          </a:p>
-        </p:txBody>
-      </p:sp>
-      <p:sp>
-        <p:nvSpPr>
-          <p:cNvPr id="11" name="Text 9"/>
-          <p:cNvSpPr/>
-          <p:nvPr/>
-        </p:nvSpPr>
-        <p:spPr>
-          <a:xfrm>
-            <a:off x="8211312" y="1856232"/>
-            <a:ext cx="2734056" cy="1536192"/>
+            <a:endParaRPr lang="en-US" sz="1300" dirty="0"/>
+          </a:p>
+        </p:txBody>
+      </p:sp>
+      <p:sp>
+        <p:nvSpPr>
+          <p:cNvPr id="12" name="Text 10"/>
+          <p:cNvSpPr/>
+          <p:nvPr/>
+        </p:nvSpPr>
+        <p:spPr>
+          <a:xfrm>
+            <a:off x="8211312" y="1920240"/>
+            <a:ext cx="2734056" cy="1463040"/>
           </a:xfrm>
           <a:prstGeom prst="rect">
             <a:avLst/>
@@ -12030,7 +12756,7 @@
               <a:buNone/>
             </a:pPr>
             <a:r>
-              <a:rPr lang="en-US" sz="1250" dirty="0">
+              <a:rPr lang="en-US" sz="1550" dirty="0">
                 <a:solidFill>
                   <a:srgbClr val="17364A"/>
                 </a:solidFill>
@@ -12040,32 +12766,32 @@
               </a:rPr>
               <a:t>Use the related plays to identify decisions, participants, timing, approvals, and documentation needed for responsible implementation.</a:t>
             </a:r>
-            <a:endParaRPr lang="en-US" sz="1250" dirty="0"/>
-          </a:p>
-        </p:txBody>
-      </p:sp>
-      <p:sp>
-        <p:nvSpPr>
-          <p:cNvPr id="12" name="Shape 10"/>
-          <p:cNvSpPr/>
-          <p:nvPr/>
-        </p:nvSpPr>
-        <p:spPr>
-          <a:xfrm>
-            <a:off x="8046720" y="3794760"/>
-            <a:ext cx="3063240" cy="1508760"/>
+            <a:endParaRPr lang="en-US" sz="1550" dirty="0"/>
+          </a:p>
+        </p:txBody>
+      </p:sp>
+      <p:sp>
+        <p:nvSpPr>
+          <p:cNvPr id="13" name="Shape 11"/>
+          <p:cNvSpPr/>
+          <p:nvPr/>
+        </p:nvSpPr>
+        <p:spPr>
+          <a:xfrm>
+            <a:off x="7818120" y="3977640"/>
+            <a:ext cx="972312" cy="749808"/>
           </a:xfrm>
           <a:prstGeom prst="roundRect">
             <a:avLst>
-              <a:gd name="adj" fmla="val 7273"/>
+              <a:gd name="adj" fmla="val 14634"/>
             </a:avLst>
           </a:prstGeom>
           <a:solidFill>
-            <a:srgbClr val="FFF4D9"/>
+            <a:srgbClr val="0068B7"/>
           </a:solidFill>
           <a:ln w="12700">
             <a:solidFill>
-              <a:srgbClr val="B9D7E6"/>
+              <a:srgbClr val="0068B7"/>
             </a:solidFill>
             <a:prstDash val="solid"/>
           </a:ln>
@@ -12073,81 +12799,256 @@
       </p:sp>
       <p:sp>
         <p:nvSpPr>
-          <p:cNvPr id="13" name="Text 11"/>
-          <p:cNvSpPr/>
-          <p:nvPr/>
-        </p:nvSpPr>
-        <p:spPr>
-          <a:xfrm>
-            <a:off x="8211312" y="3941064"/>
-            <a:ext cx="2734056" cy="201168"/>
-          </a:xfrm>
-          <a:prstGeom prst="rect">
-            <a:avLst/>
-          </a:prstGeom>
-          <a:noFill/>
-          <a:ln/>
-        </p:spPr>
-        <p:txBody>
-          <a:bodyPr wrap="square" lIns="0" tIns="0" rIns="0" bIns="0" rtlCol="0" anchor="ctr"/>
-          <a:lstStyle/>
-          <a:p>
-            <a:pPr indent="0" marL="0">
-              <a:buNone/>
-            </a:pPr>
-            <a:r>
-              <a:rPr lang="en-US" sz="950" b="1" dirty="0">
-                <a:solidFill>
-                  <a:srgbClr val="0068B7"/>
-                </a:solidFill>
-                <a:latin typeface="Aptos" pitchFamily="34" charset="0"/>
-                <a:ea typeface="Aptos" pitchFamily="34" charset="-122"/>
-                <a:cs typeface="Aptos" pitchFamily="34" charset="-120"/>
-              </a:rPr>
-              <a:t>Keep in mind</a:t>
-            </a:r>
-            <a:endParaRPr lang="en-US" sz="950" dirty="0"/>
-          </a:p>
-        </p:txBody>
-      </p:sp>
-      <p:sp>
-        <p:nvSpPr>
           <p:cNvPr id="14" name="Text 12"/>
           <p:cNvSpPr/>
           <p:nvPr/>
         </p:nvSpPr>
         <p:spPr>
           <a:xfrm>
-            <a:off x="8211312" y="4233672"/>
-            <a:ext cx="2734056" cy="941832"/>
-          </a:xfrm>
-          <a:prstGeom prst="rect">
-            <a:avLst/>
-          </a:prstGeom>
-          <a:noFill/>
-          <a:ln/>
-        </p:spPr>
-        <p:txBody>
-          <a:bodyPr wrap="square" lIns="0" tIns="0" rIns="0" bIns="0" rtlCol="0" anchor="t">
+            <a:off x="7891272" y="4169664"/>
+            <a:ext cx="826008" cy="310896"/>
+          </a:xfrm>
+          <a:prstGeom prst="rect">
+            <a:avLst/>
+          </a:prstGeom>
+          <a:noFill/>
+          <a:ln/>
+        </p:spPr>
+        <p:txBody>
+          <a:bodyPr wrap="square" lIns="0" tIns="0" rIns="0" bIns="0" rtlCol="0" anchor="ctr">
             <a:normAutofit/>
           </a:bodyPr>
           <a:lstStyle/>
           <a:p>
-            <a:pPr indent="0" marL="0">
-              <a:buNone/>
-            </a:pPr>
-            <a:r>
-              <a:rPr lang="en-US" sz="1250" dirty="0">
-                <a:solidFill>
-                  <a:srgbClr val="17364A"/>
-                </a:solidFill>
-                <a:latin typeface="Aptos" pitchFamily="34" charset="0"/>
-                <a:ea typeface="Aptos" pitchFamily="34" charset="-122"/>
-                <a:cs typeface="Aptos" pitchFamily="34" charset="-120"/>
-              </a:rPr>
-              <a:t>The playbook connection helps turn training into agency work, not just individual knowledge.</a:t>
-            </a:r>
-            <a:endParaRPr lang="en-US" sz="1250" dirty="0"/>
+            <a:pPr algn="ctr" indent="0" marL="0">
+              <a:buNone/>
+            </a:pPr>
+            <a:r>
+              <a:rPr lang="en-US" sz="1500" b="1" dirty="0">
+                <a:solidFill>
+                  <a:srgbClr val="FFFFFF"/>
+                </a:solidFill>
+                <a:latin typeface="Aptos" pitchFamily="34" charset="0"/>
+                <a:ea typeface="Aptos" pitchFamily="34" charset="-122"/>
+                <a:cs typeface="Aptos" pitchFamily="34" charset="-120"/>
+              </a:rPr>
+              <a:t>Lesson</a:t>
+            </a:r>
+            <a:endParaRPr lang="en-US" sz="1500" dirty="0"/>
+          </a:p>
+        </p:txBody>
+      </p:sp>
+      <p:sp>
+        <p:nvSpPr>
+          <p:cNvPr id="15" name="Text 13"/>
+          <p:cNvSpPr/>
+          <p:nvPr/>
+        </p:nvSpPr>
+        <p:spPr>
+          <a:xfrm>
+            <a:off x="8817864" y="4187952"/>
+            <a:ext cx="201168" cy="256032"/>
+          </a:xfrm>
+          <a:prstGeom prst="rect">
+            <a:avLst/>
+          </a:prstGeom>
+          <a:noFill/>
+          <a:ln/>
+        </p:spPr>
+        <p:txBody>
+          <a:bodyPr wrap="square" lIns="0" tIns="0" rIns="0" bIns="0" rtlCol="0" anchor="ctr"/>
+          <a:lstStyle/>
+          <a:p>
+            <a:pPr algn="ctr" indent="0" marL="0">
+              <a:buNone/>
+            </a:pPr>
+            <a:r>
+              <a:rPr lang="en-US" sz="1800" b="1" dirty="0">
+                <a:solidFill>
+                  <a:srgbClr val="0068B7"/>
+                </a:solidFill>
+                <a:latin typeface="Aptos" pitchFamily="34" charset="0"/>
+                <a:ea typeface="Aptos" pitchFamily="34" charset="-122"/>
+                <a:cs typeface="Aptos" pitchFamily="34" charset="-120"/>
+              </a:rPr>
+              <a:t>â†’</a:t>
+            </a:r>
+            <a:endParaRPr lang="en-US" sz="1800" dirty="0"/>
+          </a:p>
+        </p:txBody>
+      </p:sp>
+      <p:sp>
+        <p:nvSpPr>
+          <p:cNvPr id="16" name="Shape 14"/>
+          <p:cNvSpPr/>
+          <p:nvPr/>
+        </p:nvSpPr>
+        <p:spPr>
+          <a:xfrm>
+            <a:off x="9046464" y="3977640"/>
+            <a:ext cx="972312" cy="749808"/>
+          </a:xfrm>
+          <a:prstGeom prst="roundRect">
+            <a:avLst>
+              <a:gd name="adj" fmla="val 14634"/>
+            </a:avLst>
+          </a:prstGeom>
+          <a:solidFill>
+            <a:srgbClr val="2F8A28"/>
+          </a:solidFill>
+          <a:ln w="12700">
+            <a:solidFill>
+              <a:srgbClr val="2F8A28"/>
+            </a:solidFill>
+            <a:prstDash val="solid"/>
+          </a:ln>
+        </p:spPr>
+      </p:sp>
+      <p:sp>
+        <p:nvSpPr>
+          <p:cNvPr id="17" name="Text 15"/>
+          <p:cNvSpPr/>
+          <p:nvPr/>
+        </p:nvSpPr>
+        <p:spPr>
+          <a:xfrm>
+            <a:off x="9119616" y="4169664"/>
+            <a:ext cx="826008" cy="310896"/>
+          </a:xfrm>
+          <a:prstGeom prst="rect">
+            <a:avLst/>
+          </a:prstGeom>
+          <a:noFill/>
+          <a:ln/>
+        </p:spPr>
+        <p:txBody>
+          <a:bodyPr wrap="square" lIns="0" tIns="0" rIns="0" bIns="0" rtlCol="0" anchor="ctr">
+            <a:normAutofit/>
+          </a:bodyPr>
+          <a:lstStyle/>
+          <a:p>
+            <a:pPr algn="ctr" indent="0" marL="0">
+              <a:buNone/>
+            </a:pPr>
+            <a:r>
+              <a:rPr lang="en-US" sz="1500" b="1" dirty="0">
+                <a:solidFill>
+                  <a:srgbClr val="FFFFFF"/>
+                </a:solidFill>
+                <a:latin typeface="Aptos" pitchFamily="34" charset="0"/>
+                <a:ea typeface="Aptos" pitchFamily="34" charset="-122"/>
+                <a:cs typeface="Aptos" pitchFamily="34" charset="-120"/>
+              </a:rPr>
+              <a:t>Plays</a:t>
+            </a:r>
+            <a:endParaRPr lang="en-US" sz="1500" dirty="0"/>
+          </a:p>
+        </p:txBody>
+      </p:sp>
+      <p:sp>
+        <p:nvSpPr>
+          <p:cNvPr id="18" name="Text 16"/>
+          <p:cNvSpPr/>
+          <p:nvPr/>
+        </p:nvSpPr>
+        <p:spPr>
+          <a:xfrm>
+            <a:off x="10046208" y="4187952"/>
+            <a:ext cx="201168" cy="256032"/>
+          </a:xfrm>
+          <a:prstGeom prst="rect">
+            <a:avLst/>
+          </a:prstGeom>
+          <a:noFill/>
+          <a:ln/>
+        </p:spPr>
+        <p:txBody>
+          <a:bodyPr wrap="square" lIns="0" tIns="0" rIns="0" bIns="0" rtlCol="0" anchor="ctr"/>
+          <a:lstStyle/>
+          <a:p>
+            <a:pPr algn="ctr" indent="0" marL="0">
+              <a:buNone/>
+            </a:pPr>
+            <a:r>
+              <a:rPr lang="en-US" sz="1800" b="1" dirty="0">
+                <a:solidFill>
+                  <a:srgbClr val="0068B7"/>
+                </a:solidFill>
+                <a:latin typeface="Aptos" pitchFamily="34" charset="0"/>
+                <a:ea typeface="Aptos" pitchFamily="34" charset="-122"/>
+                <a:cs typeface="Aptos" pitchFamily="34" charset="-120"/>
+              </a:rPr>
+              <a:t>â†’</a:t>
+            </a:r>
+            <a:endParaRPr lang="en-US" sz="1800" dirty="0"/>
+          </a:p>
+        </p:txBody>
+      </p:sp>
+      <p:sp>
+        <p:nvSpPr>
+          <p:cNvPr id="19" name="Shape 17"/>
+          <p:cNvSpPr/>
+          <p:nvPr/>
+        </p:nvSpPr>
+        <p:spPr>
+          <a:xfrm>
+            <a:off x="10274808" y="3977640"/>
+            <a:ext cx="972312" cy="749808"/>
+          </a:xfrm>
+          <a:prstGeom prst="roundRect">
+            <a:avLst>
+              <a:gd name="adj" fmla="val 14634"/>
+            </a:avLst>
+          </a:prstGeom>
+          <a:solidFill>
+            <a:srgbClr val="6A4CA3"/>
+          </a:solidFill>
+          <a:ln w="12700">
+            <a:solidFill>
+              <a:srgbClr val="6A4CA3"/>
+            </a:solidFill>
+            <a:prstDash val="solid"/>
+          </a:ln>
+        </p:spPr>
+      </p:sp>
+      <p:sp>
+        <p:nvSpPr>
+          <p:cNvPr id="20" name="Text 18"/>
+          <p:cNvSpPr/>
+          <p:nvPr/>
+        </p:nvSpPr>
+        <p:spPr>
+          <a:xfrm>
+            <a:off x="10347960" y="4169664"/>
+            <a:ext cx="826008" cy="310896"/>
+          </a:xfrm>
+          <a:prstGeom prst="rect">
+            <a:avLst/>
+          </a:prstGeom>
+          <a:noFill/>
+          <a:ln/>
+        </p:spPr>
+        <p:txBody>
+          <a:bodyPr wrap="square" lIns="0" tIns="0" rIns="0" bIns="0" rtlCol="0" anchor="ctr">
+            <a:normAutofit/>
+          </a:bodyPr>
+          <a:lstStyle/>
+          <a:p>
+            <a:pPr algn="ctr" indent="0" marL="0">
+              <a:buNone/>
+            </a:pPr>
+            <a:r>
+              <a:rPr lang="en-US" sz="1500" b="1" dirty="0">
+                <a:solidFill>
+                  <a:srgbClr val="FFFFFF"/>
+                </a:solidFill>
+                <a:latin typeface="Aptos" pitchFamily="34" charset="0"/>
+                <a:ea typeface="Aptos" pitchFamily="34" charset="-122"/>
+                <a:cs typeface="Aptos" pitchFamily="34" charset="-120"/>
+              </a:rPr>
+              <a:t>Action</a:t>
+            </a:r>
+            <a:endParaRPr lang="en-US" sz="1500" dirty="0"/>
           </a:p>
         </p:txBody>
       </p:sp>
@@ -12344,7 +13245,7 @@
                 <a:ea typeface="Aptos" pitchFamily="34" charset="-122"/>
                 <a:cs typeface="Aptos" pitchFamily="34" charset="-120"/>
               </a:rPr>
-              <a:t>© Paula Soper</a:t>
+              <a:t>Â© Paula Soper</a:t>
             </a:r>
             <a:endParaRPr lang="en-US" sz="800" dirty="0"/>
           </a:p>
@@ -12358,8 +13259,47 @@
         </p:nvSpPr>
         <p:spPr>
           <a:xfrm>
+            <a:off x="11137392" y="6510528"/>
+            <a:ext cx="411480" cy="201168"/>
+          </a:xfrm>
+          <a:prstGeom prst="rect">
+            <a:avLst/>
+          </a:prstGeom>
+          <a:noFill/>
+          <a:ln/>
+        </p:spPr>
+        <p:txBody>
+          <a:bodyPr wrap="square" lIns="0" tIns="0" rIns="0" bIns="0" rtlCol="0" anchor="ctr"/>
+          <a:lstStyle/>
+          <a:p>
+            <a:pPr algn="r" indent="0" marL="0">
+              <a:buNone/>
+            </a:pPr>
+            <a:r>
+              <a:rPr lang="en-US" sz="900" dirty="0">
+                <a:solidFill>
+                  <a:srgbClr val="5F7181"/>
+                </a:solidFill>
+                <a:latin typeface="Aptos" pitchFamily="34" charset="0"/>
+                <a:ea typeface="Aptos" pitchFamily="34" charset="-122"/>
+                <a:cs typeface="Aptos" pitchFamily="34" charset="-120"/>
+              </a:rPr>
+              <a:t>4</a:t>
+            </a:r>
+            <a:endParaRPr lang="en-US" sz="900" dirty="0"/>
+          </a:p>
+        </p:txBody>
+      </p:sp>
+      <p:sp>
+        <p:nvSpPr>
+          <p:cNvPr id="8" name="Text 6"/>
+          <p:cNvSpPr/>
+          <p:nvPr/>
+        </p:nvSpPr>
+        <p:spPr>
+          <a:xfrm>
             <a:off x="640080" y="658368"/>
-            <a:ext cx="10881360" cy="566928"/>
+            <a:ext cx="10881360" cy="713232"/>
           </a:xfrm>
           <a:prstGeom prst="rect">
             <a:avLst/>
@@ -12377,7 +13317,7 @@
               <a:buNone/>
             </a:pPr>
             <a:r>
-              <a:rPr lang="en-US" sz="2700" b="1" dirty="0">
+              <a:rPr lang="en-US" sz="3400" b="1" dirty="0">
                 <a:solidFill>
                   <a:srgbClr val="003A63"/>
                 </a:solidFill>
@@ -12387,20 +13327,20 @@
               </a:rPr>
               <a:t>Related toolkit resources</a:t>
             </a:r>
-            <a:endParaRPr lang="en-US" sz="2700" dirty="0"/>
-          </a:p>
-        </p:txBody>
-      </p:sp>
-      <p:sp>
-        <p:nvSpPr>
-          <p:cNvPr id="8" name="Text 6"/>
-          <p:cNvSpPr/>
-          <p:nvPr/>
-        </p:nvSpPr>
-        <p:spPr>
-          <a:xfrm>
-            <a:off x="868680" y="1417320"/>
-            <a:ext cx="6903720" cy="4480560"/>
+            <a:endParaRPr lang="en-US" sz="3400" dirty="0"/>
+          </a:p>
+        </p:txBody>
+      </p:sp>
+      <p:sp>
+        <p:nvSpPr>
+          <p:cNvPr id="9" name="Text 7"/>
+          <p:cNvSpPr/>
+          <p:nvPr/>
+        </p:nvSpPr>
+        <p:spPr>
+          <a:xfrm>
+            <a:off x="868680" y="1508760"/>
+            <a:ext cx="6812280" cy="3977640"/>
           </a:xfrm>
           <a:prstGeom prst="rect">
             <a:avLst/>
@@ -12415,7 +13355,7 @@
           <a:lstStyle/>
           <a:p>
             <a:r>
-              <a:rPr lang="en-US" sz="1460" dirty="0">
+              <a:rPr lang="en-US" sz="1850" dirty="0">
                 <a:solidFill>
                   <a:srgbClr val="17364A"/>
                 </a:solidFill>
@@ -12423,13 +13363,13 @@
                 <a:ea typeface="Aptos" pitchFamily="34" charset="-122"/>
                 <a:cs typeface="Aptos" pitchFamily="34" charset="-120"/>
               </a:rPr>
-              <a:t>Tool 4: AI Policy Landscape Scan (Worksheet) - Use AI Policy Landscape Scan to translate this lesson into a documented public health.</a:t>
-            </a:r>
-            <a:endParaRPr lang="en-US" sz="1460" dirty="0"/>
-          </a:p>
-          <a:p>
-            <a:r>
-              <a:rPr lang="en-US" sz="1460" dirty="0">
+              <a:t>Tool 4: AI Policy Landscape Scan (Worksheet) - Use AI Policy Landscape Scan to translate this lesson into a.</a:t>
+            </a:r>
+            <a:endParaRPr lang="en-US" sz="1850" dirty="0"/>
+          </a:p>
+          <a:p>
+            <a:r>
+              <a:rPr lang="en-US" sz="1850" dirty="0">
                 <a:solidFill>
                   <a:srgbClr val="17364A"/>
                 </a:solidFill>
@@ -12437,13 +13377,13 @@
                 <a:ea typeface="Aptos" pitchFamily="34" charset="-122"/>
                 <a:cs typeface="Aptos" pitchFamily="34" charset="-120"/>
               </a:rPr>
-              <a:t>Tool 5: AI Environmental and Resource Impact Review (Checklist) - Use AI Environmental and Resource Impact Review to translate this.</a:t>
-            </a:r>
-            <a:endParaRPr lang="en-US" sz="1460" dirty="0"/>
-          </a:p>
-          <a:p>
-            <a:r>
-              <a:rPr lang="en-US" sz="1460" dirty="0">
+              <a:t>Tool 5: AI Environmental and Resource Impact Review (Checklist) - Use AI Environmental and Resource Impact.</a:t>
+            </a:r>
+            <a:endParaRPr lang="en-US" sz="1850" dirty="0"/>
+          </a:p>
+          <a:p>
+            <a:r>
+              <a:rPr lang="en-US" sz="1850" dirty="0">
                 <a:solidFill>
                   <a:srgbClr val="17364A"/>
                 </a:solidFill>
@@ -12451,13 +13391,13 @@
                 <a:ea typeface="Aptos" pitchFamily="34" charset="-122"/>
                 <a:cs typeface="Aptos" pitchFamily="34" charset="-120"/>
               </a:rPr>
-              <a:t>Tool 6: Human-Centered AI Decision Rule Checklist (Checklist) - Use Human-Centered AI Decision Rule Checklist to translate this.</a:t>
-            </a:r>
-            <a:endParaRPr lang="en-US" sz="1460" dirty="0"/>
-          </a:p>
-          <a:p>
-            <a:r>
-              <a:rPr lang="en-US" sz="1460" dirty="0">
+              <a:t>Tool 6: Human-Centered AI Decision Rule Checklist (Checklist) - Use Human-Centered AI Decision Rule.</a:t>
+            </a:r>
+            <a:endParaRPr lang="en-US" sz="1850" dirty="0"/>
+          </a:p>
+          <a:p>
+            <a:r>
+              <a:rPr lang="en-US" sz="1850" dirty="0">
                 <a:solidFill>
                   <a:srgbClr val="17364A"/>
                 </a:solidFill>
@@ -12465,29 +13405,15 @@
                 <a:ea typeface="Aptos" pitchFamily="34" charset="-122"/>
                 <a:cs typeface="Aptos" pitchFamily="34" charset="-120"/>
               </a:rPr>
-              <a:t>Tool 8: AI Project Charter (Planning) - Use AI Project Charter to translate this lesson into a documented public health AI planning,.</a:t>
-            </a:r>
-            <a:endParaRPr lang="en-US" sz="1460" dirty="0"/>
-          </a:p>
-          <a:p>
-            <a:r>
-              <a:rPr lang="en-US" sz="1460" dirty="0">
-                <a:solidFill>
-                  <a:srgbClr val="17364A"/>
-                </a:solidFill>
-                <a:latin typeface="Aptos" pitchFamily="34" charset="0"/>
-                <a:ea typeface="Aptos" pitchFamily="34" charset="-122"/>
-                <a:cs typeface="Aptos" pitchFamily="34" charset="-120"/>
-              </a:rPr>
-              <a:t>Tool 9: Data Quality Assessment Checklist (Checklist) - Use this tool to complete or strengthen the practical exercise for the module.</a:t>
-            </a:r>
-            <a:endParaRPr lang="en-US" sz="1460" dirty="0"/>
-          </a:p>
-        </p:txBody>
-      </p:sp>
-      <p:sp>
-        <p:nvSpPr>
-          <p:cNvPr id="9" name="Shape 7"/>
+              <a:t>Tool 8: AI Project Charter (Planning) - Use AI Project Charter to translate this lesson into a documented.</a:t>
+            </a:r>
+            <a:endParaRPr lang="en-US" sz="1850" dirty="0"/>
+          </a:p>
+        </p:txBody>
+      </p:sp>
+      <p:sp>
+        <p:nvSpPr>
+          <p:cNvPr id="10" name="Shape 8"/>
           <p:cNvSpPr/>
           <p:nvPr/>
         </p:nvSpPr>
@@ -12514,14 +13440,14 @@
       </p:sp>
       <p:sp>
         <p:nvSpPr>
-          <p:cNvPr id="10" name="Text 8"/>
+          <p:cNvPr id="11" name="Text 9"/>
           <p:cNvSpPr/>
           <p:nvPr/>
         </p:nvSpPr>
         <p:spPr>
           <a:xfrm>
             <a:off x="8211312" y="1563624"/>
-            <a:ext cx="2734056" cy="201168"/>
+            <a:ext cx="2734056" cy="256032"/>
           </a:xfrm>
           <a:prstGeom prst="rect">
             <a:avLst/>
@@ -12537,7 +13463,7 @@
               <a:buNone/>
             </a:pPr>
             <a:r>
-              <a:rPr lang="en-US" sz="950" b="1" dirty="0">
+              <a:rPr lang="en-US" sz="1300" b="1" dirty="0">
                 <a:solidFill>
                   <a:srgbClr val="0068B7"/>
                 </a:solidFill>
@@ -12547,20 +13473,20 @@
               </a:rPr>
               <a:t>Use the tools</a:t>
             </a:r>
-            <a:endParaRPr lang="en-US" sz="950" dirty="0"/>
-          </a:p>
-        </p:txBody>
-      </p:sp>
-      <p:sp>
-        <p:nvSpPr>
-          <p:cNvPr id="11" name="Text 9"/>
-          <p:cNvSpPr/>
-          <p:nvPr/>
-        </p:nvSpPr>
-        <p:spPr>
-          <a:xfrm>
-            <a:off x="8211312" y="1856232"/>
-            <a:ext cx="2734056" cy="1536192"/>
+            <a:endParaRPr lang="en-US" sz="1300" dirty="0"/>
+          </a:p>
+        </p:txBody>
+      </p:sp>
+      <p:sp>
+        <p:nvSpPr>
+          <p:cNvPr id="12" name="Text 10"/>
+          <p:cNvSpPr/>
+          <p:nvPr/>
+        </p:nvSpPr>
+        <p:spPr>
+          <a:xfrm>
+            <a:off x="8211312" y="1920240"/>
+            <a:ext cx="2734056" cy="1463040"/>
           </a:xfrm>
           <a:prstGeom prst="rect">
             <a:avLst/>
@@ -12578,7 +13504,7 @@
               <a:buNone/>
             </a:pPr>
             <a:r>
-              <a:rPr lang="en-US" sz="1250" dirty="0">
+              <a:rPr lang="en-US" sz="1550" dirty="0">
                 <a:solidFill>
                   <a:srgbClr val="17364A"/>
                 </a:solidFill>
@@ -12588,32 +13514,32 @@
               </a:rPr>
               <a:t>Use linked tools when your department needs a structured worksheet, template, checklist, review process, or documentation artifact.</a:t>
             </a:r>
-            <a:endParaRPr lang="en-US" sz="1250" dirty="0"/>
-          </a:p>
-        </p:txBody>
-      </p:sp>
-      <p:sp>
-        <p:nvSpPr>
-          <p:cNvPr id="12" name="Shape 10"/>
-          <p:cNvSpPr/>
-          <p:nvPr/>
-        </p:nvSpPr>
-        <p:spPr>
-          <a:xfrm>
-            <a:off x="8046720" y="3794760"/>
-            <a:ext cx="3063240" cy="1508760"/>
+            <a:endParaRPr lang="en-US" sz="1550" dirty="0"/>
+          </a:p>
+        </p:txBody>
+      </p:sp>
+      <p:sp>
+        <p:nvSpPr>
+          <p:cNvPr id="13" name="Shape 11"/>
+          <p:cNvSpPr/>
+          <p:nvPr/>
+        </p:nvSpPr>
+        <p:spPr>
+          <a:xfrm>
+            <a:off x="7818120" y="3977640"/>
+            <a:ext cx="972312" cy="749808"/>
           </a:xfrm>
           <a:prstGeom prst="roundRect">
             <a:avLst>
-              <a:gd name="adj" fmla="val 7273"/>
+              <a:gd name="adj" fmla="val 14634"/>
             </a:avLst>
           </a:prstGeom>
           <a:solidFill>
-            <a:srgbClr val="EEF8ED"/>
+            <a:srgbClr val="0068B7"/>
           </a:solidFill>
           <a:ln w="12700">
             <a:solidFill>
-              <a:srgbClr val="B9D7E6"/>
+              <a:srgbClr val="0068B7"/>
             </a:solidFill>
             <a:prstDash val="solid"/>
           </a:ln>
@@ -12621,81 +13547,256 @@
       </p:sp>
       <p:sp>
         <p:nvSpPr>
-          <p:cNvPr id="13" name="Text 11"/>
-          <p:cNvSpPr/>
-          <p:nvPr/>
-        </p:nvSpPr>
-        <p:spPr>
-          <a:xfrm>
-            <a:off x="8211312" y="3941064"/>
-            <a:ext cx="2734056" cy="201168"/>
-          </a:xfrm>
-          <a:prstGeom prst="rect">
-            <a:avLst/>
-          </a:prstGeom>
-          <a:noFill/>
-          <a:ln/>
-        </p:spPr>
-        <p:txBody>
-          <a:bodyPr wrap="square" lIns="0" tIns="0" rIns="0" bIns="0" rtlCol="0" anchor="ctr"/>
-          <a:lstStyle/>
-          <a:p>
-            <a:pPr indent="0" marL="0">
-              <a:buNone/>
-            </a:pPr>
-            <a:r>
-              <a:rPr lang="en-US" sz="950" b="1" dirty="0">
-                <a:solidFill>
-                  <a:srgbClr val="0068B7"/>
-                </a:solidFill>
-                <a:latin typeface="Aptos" pitchFamily="34" charset="0"/>
-                <a:ea typeface="Aptos" pitchFamily="34" charset="-122"/>
-                <a:cs typeface="Aptos" pitchFamily="34" charset="-120"/>
-              </a:rPr>
-              <a:t>Avoid duplication</a:t>
-            </a:r>
-            <a:endParaRPr lang="en-US" sz="950" dirty="0"/>
-          </a:p>
-        </p:txBody>
-      </p:sp>
-      <p:sp>
-        <p:nvSpPr>
           <p:cNvPr id="14" name="Text 12"/>
           <p:cNvSpPr/>
           <p:nvPr/>
         </p:nvSpPr>
         <p:spPr>
           <a:xfrm>
-            <a:off x="8211312" y="4233672"/>
-            <a:ext cx="2734056" cy="941832"/>
-          </a:xfrm>
-          <a:prstGeom prst="rect">
-            <a:avLst/>
-          </a:prstGeom>
-          <a:noFill/>
-          <a:ln/>
-        </p:spPr>
-        <p:txBody>
-          <a:bodyPr wrap="square" lIns="0" tIns="0" rIns="0" bIns="0" rtlCol="0" anchor="t">
+            <a:off x="7891272" y="4169664"/>
+            <a:ext cx="826008" cy="310896"/>
+          </a:xfrm>
+          <a:prstGeom prst="rect">
+            <a:avLst/>
+          </a:prstGeom>
+          <a:noFill/>
+          <a:ln/>
+        </p:spPr>
+        <p:txBody>
+          <a:bodyPr wrap="square" lIns="0" tIns="0" rIns="0" bIns="0" rtlCol="0" anchor="ctr">
             <a:normAutofit/>
           </a:bodyPr>
           <a:lstStyle/>
           <a:p>
-            <a:pPr indent="0" marL="0">
-              <a:buNone/>
-            </a:pPr>
-            <a:r>
-              <a:rPr lang="en-US" sz="1250" dirty="0">
-                <a:solidFill>
-                  <a:srgbClr val="17364A"/>
-                </a:solidFill>
-                <a:latin typeface="Aptos" pitchFamily="34" charset="0"/>
-                <a:ea typeface="Aptos" pitchFamily="34" charset="-122"/>
-                <a:cs typeface="Aptos" pitchFamily="34" charset="-120"/>
-              </a:rPr>
-              <a:t>If your department already has a strong equivalent tool, adapt or use the existing process instead of recreating it.</a:t>
-            </a:r>
-            <a:endParaRPr lang="en-US" sz="1250" dirty="0"/>
+            <a:pPr algn="ctr" indent="0" marL="0">
+              <a:buNone/>
+            </a:pPr>
+            <a:r>
+              <a:rPr lang="en-US" sz="1500" b="1" dirty="0">
+                <a:solidFill>
+                  <a:srgbClr val="FFFFFF"/>
+                </a:solidFill>
+                <a:latin typeface="Aptos" pitchFamily="34" charset="0"/>
+                <a:ea typeface="Aptos" pitchFamily="34" charset="-122"/>
+                <a:cs typeface="Aptos" pitchFamily="34" charset="-120"/>
+              </a:rPr>
+              <a:t>Concept</a:t>
+            </a:r>
+            <a:endParaRPr lang="en-US" sz="1500" dirty="0"/>
+          </a:p>
+        </p:txBody>
+      </p:sp>
+      <p:sp>
+        <p:nvSpPr>
+          <p:cNvPr id="15" name="Text 13"/>
+          <p:cNvSpPr/>
+          <p:nvPr/>
+        </p:nvSpPr>
+        <p:spPr>
+          <a:xfrm>
+            <a:off x="8817864" y="4187952"/>
+            <a:ext cx="201168" cy="256032"/>
+          </a:xfrm>
+          <a:prstGeom prst="rect">
+            <a:avLst/>
+          </a:prstGeom>
+          <a:noFill/>
+          <a:ln/>
+        </p:spPr>
+        <p:txBody>
+          <a:bodyPr wrap="square" lIns="0" tIns="0" rIns="0" bIns="0" rtlCol="0" anchor="ctr"/>
+          <a:lstStyle/>
+          <a:p>
+            <a:pPr algn="ctr" indent="0" marL="0">
+              <a:buNone/>
+            </a:pPr>
+            <a:r>
+              <a:rPr lang="en-US" sz="1800" b="1" dirty="0">
+                <a:solidFill>
+                  <a:srgbClr val="0068B7"/>
+                </a:solidFill>
+                <a:latin typeface="Aptos" pitchFamily="34" charset="0"/>
+                <a:ea typeface="Aptos" pitchFamily="34" charset="-122"/>
+                <a:cs typeface="Aptos" pitchFamily="34" charset="-120"/>
+              </a:rPr>
+              <a:t>â†’</a:t>
+            </a:r>
+            <a:endParaRPr lang="en-US" sz="1800" dirty="0"/>
+          </a:p>
+        </p:txBody>
+      </p:sp>
+      <p:sp>
+        <p:nvSpPr>
+          <p:cNvPr id="16" name="Shape 14"/>
+          <p:cNvSpPr/>
+          <p:nvPr/>
+        </p:nvSpPr>
+        <p:spPr>
+          <a:xfrm>
+            <a:off x="9046464" y="3977640"/>
+            <a:ext cx="972312" cy="749808"/>
+          </a:xfrm>
+          <a:prstGeom prst="roundRect">
+            <a:avLst>
+              <a:gd name="adj" fmla="val 14634"/>
+            </a:avLst>
+          </a:prstGeom>
+          <a:solidFill>
+            <a:srgbClr val="2F8A28"/>
+          </a:solidFill>
+          <a:ln w="12700">
+            <a:solidFill>
+              <a:srgbClr val="2F8A28"/>
+            </a:solidFill>
+            <a:prstDash val="solid"/>
+          </a:ln>
+        </p:spPr>
+      </p:sp>
+      <p:sp>
+        <p:nvSpPr>
+          <p:cNvPr id="17" name="Text 15"/>
+          <p:cNvSpPr/>
+          <p:nvPr/>
+        </p:nvSpPr>
+        <p:spPr>
+          <a:xfrm>
+            <a:off x="9119616" y="4169664"/>
+            <a:ext cx="826008" cy="310896"/>
+          </a:xfrm>
+          <a:prstGeom prst="rect">
+            <a:avLst/>
+          </a:prstGeom>
+          <a:noFill/>
+          <a:ln/>
+        </p:spPr>
+        <p:txBody>
+          <a:bodyPr wrap="square" lIns="0" tIns="0" rIns="0" bIns="0" rtlCol="0" anchor="ctr">
+            <a:normAutofit/>
+          </a:bodyPr>
+          <a:lstStyle/>
+          <a:p>
+            <a:pPr algn="ctr" indent="0" marL="0">
+              <a:buNone/>
+            </a:pPr>
+            <a:r>
+              <a:rPr lang="en-US" sz="1500" b="1" dirty="0">
+                <a:solidFill>
+                  <a:srgbClr val="FFFFFF"/>
+                </a:solidFill>
+                <a:latin typeface="Aptos" pitchFamily="34" charset="0"/>
+                <a:ea typeface="Aptos" pitchFamily="34" charset="-122"/>
+                <a:cs typeface="Aptos" pitchFamily="34" charset="-120"/>
+              </a:rPr>
+              <a:t>Tool</a:t>
+            </a:r>
+            <a:endParaRPr lang="en-US" sz="1500" dirty="0"/>
+          </a:p>
+        </p:txBody>
+      </p:sp>
+      <p:sp>
+        <p:nvSpPr>
+          <p:cNvPr id="18" name="Text 16"/>
+          <p:cNvSpPr/>
+          <p:nvPr/>
+        </p:nvSpPr>
+        <p:spPr>
+          <a:xfrm>
+            <a:off x="10046208" y="4187952"/>
+            <a:ext cx="201168" cy="256032"/>
+          </a:xfrm>
+          <a:prstGeom prst="rect">
+            <a:avLst/>
+          </a:prstGeom>
+          <a:noFill/>
+          <a:ln/>
+        </p:spPr>
+        <p:txBody>
+          <a:bodyPr wrap="square" lIns="0" tIns="0" rIns="0" bIns="0" rtlCol="0" anchor="ctr"/>
+          <a:lstStyle/>
+          <a:p>
+            <a:pPr algn="ctr" indent="0" marL="0">
+              <a:buNone/>
+            </a:pPr>
+            <a:r>
+              <a:rPr lang="en-US" sz="1800" b="1" dirty="0">
+                <a:solidFill>
+                  <a:srgbClr val="0068B7"/>
+                </a:solidFill>
+                <a:latin typeface="Aptos" pitchFamily="34" charset="0"/>
+                <a:ea typeface="Aptos" pitchFamily="34" charset="-122"/>
+                <a:cs typeface="Aptos" pitchFamily="34" charset="-120"/>
+              </a:rPr>
+              <a:t>â†’</a:t>
+            </a:r>
+            <a:endParaRPr lang="en-US" sz="1800" dirty="0"/>
+          </a:p>
+        </p:txBody>
+      </p:sp>
+      <p:sp>
+        <p:nvSpPr>
+          <p:cNvPr id="19" name="Shape 17"/>
+          <p:cNvSpPr/>
+          <p:nvPr/>
+        </p:nvSpPr>
+        <p:spPr>
+          <a:xfrm>
+            <a:off x="10274808" y="3977640"/>
+            <a:ext cx="972312" cy="749808"/>
+          </a:xfrm>
+          <a:prstGeom prst="roundRect">
+            <a:avLst>
+              <a:gd name="adj" fmla="val 14634"/>
+            </a:avLst>
+          </a:prstGeom>
+          <a:solidFill>
+            <a:srgbClr val="D69A2D"/>
+          </a:solidFill>
+          <a:ln w="12700">
+            <a:solidFill>
+              <a:srgbClr val="D69A2D"/>
+            </a:solidFill>
+            <a:prstDash val="solid"/>
+          </a:ln>
+        </p:spPr>
+      </p:sp>
+      <p:sp>
+        <p:nvSpPr>
+          <p:cNvPr id="20" name="Text 18"/>
+          <p:cNvSpPr/>
+          <p:nvPr/>
+        </p:nvSpPr>
+        <p:spPr>
+          <a:xfrm>
+            <a:off x="10347960" y="4169664"/>
+            <a:ext cx="826008" cy="310896"/>
+          </a:xfrm>
+          <a:prstGeom prst="rect">
+            <a:avLst/>
+          </a:prstGeom>
+          <a:noFill/>
+          <a:ln/>
+        </p:spPr>
+        <p:txBody>
+          <a:bodyPr wrap="square" lIns="0" tIns="0" rIns="0" bIns="0" rtlCol="0" anchor="ctr">
+            <a:normAutofit/>
+          </a:bodyPr>
+          <a:lstStyle/>
+          <a:p>
+            <a:pPr algn="ctr" indent="0" marL="0">
+              <a:buNone/>
+            </a:pPr>
+            <a:r>
+              <a:rPr lang="en-US" sz="1500" b="1" dirty="0">
+                <a:solidFill>
+                  <a:srgbClr val="FFFFFF"/>
+                </a:solidFill>
+                <a:latin typeface="Aptos" pitchFamily="34" charset="0"/>
+                <a:ea typeface="Aptos" pitchFamily="34" charset="-122"/>
+                <a:cs typeface="Aptos" pitchFamily="34" charset="-120"/>
+              </a:rPr>
+              <a:t>Artifact</a:t>
+            </a:r>
+            <a:endParaRPr lang="en-US" sz="1500" dirty="0"/>
           </a:p>
         </p:txBody>
       </p:sp>
@@ -12892,7 +13993,7 @@
                 <a:ea typeface="Aptos" pitchFamily="34" charset="-122"/>
                 <a:cs typeface="Aptos" pitchFamily="34" charset="-120"/>
               </a:rPr>
-              <a:t>© Paula Soper</a:t>
+              <a:t>Â© Paula Soper</a:t>
             </a:r>
             <a:endParaRPr lang="en-US" sz="800" dirty="0"/>
           </a:p>
@@ -12900,7 +14001,46 @@
       </p:sp>
       <p:sp>
         <p:nvSpPr>
-          <p:cNvPr id="7" name="Shape 5"/>
+          <p:cNvPr id="7" name="Text 5"/>
+          <p:cNvSpPr/>
+          <p:nvPr/>
+        </p:nvSpPr>
+        <p:spPr>
+          <a:xfrm>
+            <a:off x="11137392" y="6510528"/>
+            <a:ext cx="411480" cy="201168"/>
+          </a:xfrm>
+          <a:prstGeom prst="rect">
+            <a:avLst/>
+          </a:prstGeom>
+          <a:noFill/>
+          <a:ln/>
+        </p:spPr>
+        <p:txBody>
+          <a:bodyPr wrap="square" lIns="0" tIns="0" rIns="0" bIns="0" rtlCol="0" anchor="ctr"/>
+          <a:lstStyle/>
+          <a:p>
+            <a:pPr algn="r" indent="0" marL="0">
+              <a:buNone/>
+            </a:pPr>
+            <a:r>
+              <a:rPr lang="en-US" sz="900" dirty="0">
+                <a:solidFill>
+                  <a:srgbClr val="5F7181"/>
+                </a:solidFill>
+                <a:latin typeface="Aptos" pitchFamily="34" charset="0"/>
+                <a:ea typeface="Aptos" pitchFamily="34" charset="-122"/>
+                <a:cs typeface="Aptos" pitchFamily="34" charset="-120"/>
+              </a:rPr>
+              <a:t>5</a:t>
+            </a:r>
+            <a:endParaRPr lang="en-US" sz="900" dirty="0"/>
+          </a:p>
+        </p:txBody>
+      </p:sp>
+      <p:sp>
+        <p:nvSpPr>
+          <p:cNvPr id="8" name="Shape 6"/>
           <p:cNvSpPr/>
           <p:nvPr/>
         </p:nvSpPr>
@@ -12925,7 +14065,7 @@
       </p:sp>
       <p:sp>
         <p:nvSpPr>
-          <p:cNvPr id="8" name="Text 6"/>
+          <p:cNvPr id="9" name="Text 7"/>
           <p:cNvSpPr/>
           <p:nvPr/>
         </p:nvSpPr>
@@ -12964,14 +14104,14 @@
       </p:sp>
       <p:sp>
         <p:nvSpPr>
-          <p:cNvPr id="9" name="Text 7"/>
+          <p:cNvPr id="10" name="Text 8"/>
           <p:cNvSpPr/>
           <p:nvPr/>
         </p:nvSpPr>
         <p:spPr>
           <a:xfrm>
             <a:off x="640080" y="621792"/>
-            <a:ext cx="10881360" cy="566928"/>
+            <a:ext cx="10881360" cy="713232"/>
           </a:xfrm>
           <a:prstGeom prst="rect">
             <a:avLst/>
@@ -12989,7 +14129,7 @@
               <a:buNone/>
             </a:pPr>
             <a:r>
-              <a:rPr lang="en-US" sz="2700" b="1" dirty="0">
+              <a:rPr lang="en-US" sz="3400" b="1" dirty="0">
                 <a:solidFill>
                   <a:srgbClr val="003A63"/>
                 </a:solidFill>
@@ -12999,20 +14139,20 @@
               </a:rPr>
               <a:t>Learning Objectives</a:t>
             </a:r>
-            <a:endParaRPr lang="en-US" sz="2700" dirty="0"/>
-          </a:p>
-        </p:txBody>
-      </p:sp>
-      <p:sp>
-        <p:nvSpPr>
-          <p:cNvPr id="10" name="Text 8"/>
-          <p:cNvSpPr/>
-          <p:nvPr/>
-        </p:nvSpPr>
-        <p:spPr>
-          <a:xfrm>
-            <a:off x="868680" y="1417320"/>
-            <a:ext cx="6675120" cy="4434840"/>
+            <a:endParaRPr lang="en-US" sz="3400" dirty="0"/>
+          </a:p>
+        </p:txBody>
+      </p:sp>
+      <p:sp>
+        <p:nvSpPr>
+          <p:cNvPr id="11" name="Text 9"/>
+          <p:cNvSpPr/>
+          <p:nvPr/>
+        </p:nvSpPr>
+        <p:spPr>
+          <a:xfrm>
+            <a:off x="868680" y="1508760"/>
+            <a:ext cx="6537960" cy="4160520"/>
           </a:xfrm>
           <a:prstGeom prst="rect">
             <a:avLst/>
@@ -13027,7 +14167,7 @@
           <a:lstStyle/>
           <a:p>
             <a:r>
-              <a:rPr lang="en-US" sz="1700" dirty="0">
+              <a:rPr lang="en-US" sz="2100" dirty="0">
                 <a:solidFill>
                   <a:srgbClr val="17364A"/>
                 </a:solidFill>
@@ -13037,11 +14177,11 @@
               </a:rPr>
               <a:t>Describe how ELR supports public health surveillance and response.</a:t>
             </a:r>
-            <a:endParaRPr lang="en-US" sz="1700" dirty="0"/>
-          </a:p>
-          <a:p>
-            <a:r>
-              <a:rPr lang="en-US" sz="1700" dirty="0">
+            <a:endParaRPr lang="en-US" sz="2100" dirty="0"/>
+          </a:p>
+          <a:p>
+            <a:r>
+              <a:rPr lang="en-US" sz="2100" dirty="0">
                 <a:solidFill>
                   <a:srgbClr val="17364A"/>
                 </a:solidFill>
@@ -13051,11 +14191,11 @@
               </a:rPr>
               <a:t>Explain why LOINC, SNOMED CT, UCUM, local codes, and reportable condition mappings matter for AI.</a:t>
             </a:r>
-            <a:endParaRPr lang="en-US" sz="1700" dirty="0"/>
-          </a:p>
-          <a:p>
-            <a:r>
-              <a:rPr lang="en-US" sz="1700" dirty="0">
+            <a:endParaRPr lang="en-US" sz="2100" dirty="0"/>
+          </a:p>
+          <a:p>
+            <a:r>
+              <a:rPr lang="en-US" sz="2100" dirty="0">
                 <a:solidFill>
                   <a:srgbClr val="17364A"/>
                 </a:solidFill>
@@ -13065,27 +14205,13 @@
               </a:rPr>
               <a:t>Identify common laboratory data quality problems that can affect AI outputs.</a:t>
             </a:r>
-            <a:endParaRPr lang="en-US" sz="1700" dirty="0"/>
-          </a:p>
-          <a:p>
-            <a:r>
-              <a:rPr lang="en-US" sz="1700" dirty="0">
-                <a:solidFill>
-                  <a:srgbClr val="17364A"/>
-                </a:solidFill>
-                <a:latin typeface="Aptos" pitchFamily="34" charset="0"/>
-                <a:ea typeface="Aptos" pitchFamily="34" charset="-122"/>
-                <a:cs typeface="Aptos" pitchFamily="34" charset="-120"/>
-              </a:rPr>
-              <a:t>Assess whether lab data are fit for a specific AI-supported use case.</a:t>
-            </a:r>
-            <a:endParaRPr lang="en-US" sz="1700" dirty="0"/>
-          </a:p>
-        </p:txBody>
-      </p:sp>
-      <p:sp>
-        <p:nvSpPr>
-          <p:cNvPr id="11" name="Shape 9"/>
+            <a:endParaRPr lang="en-US" sz="2100" dirty="0"/>
+          </a:p>
+        </p:txBody>
+      </p:sp>
+      <p:sp>
+        <p:nvSpPr>
+          <p:cNvPr id="12" name="Shape 10"/>
           <p:cNvSpPr/>
           <p:nvPr/>
         </p:nvSpPr>
@@ -13112,14 +14238,14 @@
       </p:sp>
       <p:sp>
         <p:nvSpPr>
-          <p:cNvPr id="12" name="Text 10"/>
+          <p:cNvPr id="13" name="Text 11"/>
           <p:cNvSpPr/>
           <p:nvPr/>
         </p:nvSpPr>
         <p:spPr>
           <a:xfrm>
             <a:off x="8074152" y="1563624"/>
-            <a:ext cx="2825496" cy="201168"/>
+            <a:ext cx="2825496" cy="256032"/>
           </a:xfrm>
           <a:prstGeom prst="rect">
             <a:avLst/>
@@ -13135,7 +14261,7 @@
               <a:buNone/>
             </a:pPr>
             <a:r>
-              <a:rPr lang="en-US" sz="950" b="1" dirty="0">
+              <a:rPr lang="en-US" sz="1300" b="1" dirty="0">
                 <a:solidFill>
                   <a:srgbClr val="0068B7"/>
                 </a:solidFill>
@@ -13145,20 +14271,20 @@
               </a:rPr>
               <a:t>Key idea</a:t>
             </a:r>
-            <a:endParaRPr lang="en-US" sz="950" dirty="0"/>
-          </a:p>
-        </p:txBody>
-      </p:sp>
-      <p:sp>
-        <p:nvSpPr>
-          <p:cNvPr id="13" name="Text 11"/>
-          <p:cNvSpPr/>
-          <p:nvPr/>
-        </p:nvSpPr>
-        <p:spPr>
-          <a:xfrm>
-            <a:off x="8074152" y="1856232"/>
-            <a:ext cx="2825496" cy="1261872"/>
+            <a:endParaRPr lang="en-US" sz="1300" dirty="0"/>
+          </a:p>
+        </p:txBody>
+      </p:sp>
+      <p:sp>
+        <p:nvSpPr>
+          <p:cNvPr id="14" name="Text 12"/>
+          <p:cNvSpPr/>
+          <p:nvPr/>
+        </p:nvSpPr>
+        <p:spPr>
+          <a:xfrm>
+            <a:off x="8074152" y="1920240"/>
+            <a:ext cx="2825496" cy="1188720"/>
           </a:xfrm>
           <a:prstGeom prst="rect">
             <a:avLst/>
@@ -13176,7 +14302,7 @@
               <a:buNone/>
             </a:pPr>
             <a:r>
-              <a:rPr lang="en-US" sz="1250" dirty="0">
+              <a:rPr lang="en-US" sz="1550" dirty="0">
                 <a:solidFill>
                   <a:srgbClr val="17364A"/>
                 </a:solidFill>
@@ -13186,13 +14312,13 @@
               </a:rPr>
               <a:t>Describe how ELR supports public health surveillance and response.</a:t>
             </a:r>
-            <a:endParaRPr lang="en-US" sz="1250" dirty="0"/>
-          </a:p>
-        </p:txBody>
-      </p:sp>
-      <p:sp>
-        <p:nvSpPr>
-          <p:cNvPr id="14" name="Shape 12"/>
+            <a:endParaRPr lang="en-US" sz="1550" dirty="0"/>
+          </a:p>
+        </p:txBody>
+      </p:sp>
+      <p:sp>
+        <p:nvSpPr>
+          <p:cNvPr id="15" name="Shape 13"/>
           <p:cNvSpPr/>
           <p:nvPr/>
         </p:nvSpPr>
@@ -13219,14 +14345,14 @@
       </p:sp>
       <p:sp>
         <p:nvSpPr>
-          <p:cNvPr id="15" name="Text 13"/>
+          <p:cNvPr id="16" name="Text 14"/>
           <p:cNvSpPr/>
           <p:nvPr/>
         </p:nvSpPr>
         <p:spPr>
           <a:xfrm>
             <a:off x="8074152" y="3666744"/>
-            <a:ext cx="2825496" cy="201168"/>
+            <a:ext cx="2825496" cy="256032"/>
           </a:xfrm>
           <a:prstGeom prst="rect">
             <a:avLst/>
@@ -13242,7 +14368,7 @@
               <a:buNone/>
             </a:pPr>
             <a:r>
-              <a:rPr lang="en-US" sz="950" b="1" dirty="0">
+              <a:rPr lang="en-US" sz="1300" b="1" dirty="0">
                 <a:solidFill>
                   <a:srgbClr val="0068B7"/>
                 </a:solidFill>
@@ -13252,20 +14378,20 @@
               </a:rPr>
               <a:t>Use this for</a:t>
             </a:r>
-            <a:endParaRPr lang="en-US" sz="950" dirty="0"/>
-          </a:p>
-        </p:txBody>
-      </p:sp>
-      <p:sp>
-        <p:nvSpPr>
-          <p:cNvPr id="16" name="Text 14"/>
-          <p:cNvSpPr/>
-          <p:nvPr/>
-        </p:nvSpPr>
-        <p:spPr>
-          <a:xfrm>
-            <a:off x="8074152" y="3959352"/>
-            <a:ext cx="2825496" cy="1170432"/>
+            <a:endParaRPr lang="en-US" sz="1300" dirty="0"/>
+          </a:p>
+        </p:txBody>
+      </p:sp>
+      <p:sp>
+        <p:nvSpPr>
+          <p:cNvPr id="17" name="Text 15"/>
+          <p:cNvSpPr/>
+          <p:nvPr/>
+        </p:nvSpPr>
+        <p:spPr>
+          <a:xfrm>
+            <a:off x="8074152" y="4023360"/>
+            <a:ext cx="2825496" cy="1097280"/>
           </a:xfrm>
           <a:prstGeom prst="rect">
             <a:avLst/>
@@ -13283,7 +14409,7 @@
               <a:buNone/>
             </a:pPr>
             <a:r>
-              <a:rPr lang="en-US" sz="1250" dirty="0">
+              <a:rPr lang="en-US" sz="1550" dirty="0">
                 <a:solidFill>
                   <a:srgbClr val="17364A"/>
                 </a:solidFill>
@@ -13293,7 +14419,7 @@
               </a:rPr>
               <a:t>Connect the concept to public health decisions, safeguards, documentation, or implementation work.</a:t>
             </a:r>
-            <a:endParaRPr lang="en-US" sz="1250" dirty="0"/>
+            <a:endParaRPr lang="en-US" sz="1550" dirty="0"/>
           </a:p>
         </p:txBody>
       </p:sp>
@@ -13490,7 +14616,7 @@
                 <a:ea typeface="Aptos" pitchFamily="34" charset="-122"/>
                 <a:cs typeface="Aptos" pitchFamily="34" charset="-120"/>
               </a:rPr>
-              <a:t>© Paula Soper</a:t>
+              <a:t>Â© Paula Soper</a:t>
             </a:r>
             <a:endParaRPr lang="en-US" sz="800" dirty="0"/>
           </a:p>
@@ -13498,7 +14624,46 @@
       </p:sp>
       <p:sp>
         <p:nvSpPr>
-          <p:cNvPr id="7" name="Shape 5"/>
+          <p:cNvPr id="7" name="Text 5"/>
+          <p:cNvSpPr/>
+          <p:nvPr/>
+        </p:nvSpPr>
+        <p:spPr>
+          <a:xfrm>
+            <a:off x="11137392" y="6510528"/>
+            <a:ext cx="411480" cy="201168"/>
+          </a:xfrm>
+          <a:prstGeom prst="rect">
+            <a:avLst/>
+          </a:prstGeom>
+          <a:noFill/>
+          <a:ln/>
+        </p:spPr>
+        <p:txBody>
+          <a:bodyPr wrap="square" lIns="0" tIns="0" rIns="0" bIns="0" rtlCol="0" anchor="ctr"/>
+          <a:lstStyle/>
+          <a:p>
+            <a:pPr algn="r" indent="0" marL="0">
+              <a:buNone/>
+            </a:pPr>
+            <a:r>
+              <a:rPr lang="en-US" sz="900" dirty="0">
+                <a:solidFill>
+                  <a:srgbClr val="5F7181"/>
+                </a:solidFill>
+                <a:latin typeface="Aptos" pitchFamily="34" charset="0"/>
+                <a:ea typeface="Aptos" pitchFamily="34" charset="-122"/>
+                <a:cs typeface="Aptos" pitchFamily="34" charset="-120"/>
+              </a:rPr>
+              <a:t>6</a:t>
+            </a:r>
+            <a:endParaRPr lang="en-US" sz="900" dirty="0"/>
+          </a:p>
+        </p:txBody>
+      </p:sp>
+      <p:sp>
+        <p:nvSpPr>
+          <p:cNvPr id="8" name="Shape 6"/>
           <p:cNvSpPr/>
           <p:nvPr/>
         </p:nvSpPr>
@@ -13523,7 +14688,7 @@
       </p:sp>
       <p:sp>
         <p:nvSpPr>
-          <p:cNvPr id="8" name="Text 6"/>
+          <p:cNvPr id="9" name="Text 7"/>
           <p:cNvSpPr/>
           <p:nvPr/>
         </p:nvSpPr>
@@ -13562,14 +14727,14 @@
       </p:sp>
       <p:sp>
         <p:nvSpPr>
-          <p:cNvPr id="9" name="Text 7"/>
+          <p:cNvPr id="10" name="Text 8"/>
           <p:cNvSpPr/>
           <p:nvPr/>
         </p:nvSpPr>
         <p:spPr>
           <a:xfrm>
             <a:off x="640080" y="621792"/>
-            <a:ext cx="10881360" cy="566928"/>
+            <a:ext cx="10881360" cy="713232"/>
           </a:xfrm>
           <a:prstGeom prst="rect">
             <a:avLst/>
@@ -13587,7 +14752,7 @@
               <a:buNone/>
             </a:pPr>
             <a:r>
-              <a:rPr lang="en-US" sz="2700" b="1" dirty="0">
+              <a:rPr lang="en-US" sz="3400" b="1" dirty="0">
                 <a:solidFill>
                   <a:srgbClr val="003A63"/>
                 </a:solidFill>
@@ -13597,20 +14762,20 @@
               </a:rPr>
               <a:t>Module Overview</a:t>
             </a:r>
-            <a:endParaRPr lang="en-US" sz="2700" dirty="0"/>
-          </a:p>
-        </p:txBody>
-      </p:sp>
-      <p:sp>
-        <p:nvSpPr>
-          <p:cNvPr id="10" name="Text 8"/>
-          <p:cNvSpPr/>
-          <p:nvPr/>
-        </p:nvSpPr>
-        <p:spPr>
-          <a:xfrm>
-            <a:off x="868680" y="1417320"/>
-            <a:ext cx="6675120" cy="4434840"/>
+            <a:endParaRPr lang="en-US" sz="3400" dirty="0"/>
+          </a:p>
+        </p:txBody>
+      </p:sp>
+      <p:sp>
+        <p:nvSpPr>
+          <p:cNvPr id="11" name="Text 9"/>
+          <p:cNvSpPr/>
+          <p:nvPr/>
+        </p:nvSpPr>
+        <p:spPr>
+          <a:xfrm>
+            <a:off x="868680" y="1508760"/>
+            <a:ext cx="6537960" cy="4160520"/>
           </a:xfrm>
           <a:prstGeom prst="rect">
             <a:avLst/>
@@ -13625,7 +14790,7 @@
           <a:lstStyle/>
           <a:p>
             <a:r>
-              <a:rPr lang="en-US" sz="1700" dirty="0">
+              <a:rPr lang="en-US" sz="2100" dirty="0">
                 <a:solidFill>
                   <a:srgbClr val="17364A"/>
                 </a:solidFill>
@@ -13633,13 +14798,13 @@
                 <a:ea typeface="Aptos" pitchFamily="34" charset="-122"/>
                 <a:cs typeface="Aptos" pitchFamily="34" charset="-120"/>
               </a:rPr>
-              <a:t>Electronic laboratory reporting supplies critical evidence for infectious disease surveillance, outbreak detection, case.</a:t>
-            </a:r>
-            <a:endParaRPr lang="en-US" sz="1700" dirty="0"/>
-          </a:p>
-          <a:p>
-            <a:r>
-              <a:rPr lang="en-US" sz="1700" dirty="0">
+              <a:t>Electronic laboratory reporting supplies critical evidence for infectious disease surveillance,.</a:t>
+            </a:r>
+            <a:endParaRPr lang="en-US" sz="2100" dirty="0"/>
+          </a:p>
+          <a:p>
+            <a:r>
+              <a:rPr lang="en-US" sz="2100" dirty="0">
                 <a:solidFill>
                   <a:srgbClr val="17364A"/>
                 </a:solidFill>
@@ -13647,13 +14812,13 @@
                 <a:ea typeface="Aptos" pitchFamily="34" charset="-122"/>
                 <a:cs typeface="Aptos" pitchFamily="34" charset="-120"/>
               </a:rPr>
-              <a:t>AI tools that use laboratory data depend on the quality of test codes, result codes, units, specimen information, dates,.</a:t>
-            </a:r>
-            <a:endParaRPr lang="en-US" sz="1700" dirty="0"/>
-          </a:p>
-          <a:p>
-            <a:r>
-              <a:rPr lang="en-US" sz="1700" dirty="0">
+              <a:t>AI tools that use laboratory data depend on the quality of test codes, result codes, units, specimen.</a:t>
+            </a:r>
+            <a:endParaRPr lang="en-US" sz="2100" dirty="0"/>
+          </a:p>
+          <a:p>
+            <a:r>
+              <a:rPr lang="en-US" sz="2100" dirty="0">
                 <a:solidFill>
                   <a:srgbClr val="17364A"/>
                 </a:solidFill>
@@ -13661,15 +14826,15 @@
                 <a:ea typeface="Aptos" pitchFamily="34" charset="-122"/>
                 <a:cs typeface="Aptos" pitchFamily="34" charset="-120"/>
               </a:rPr>
-              <a:t>This module teaches learners how laboratory data quality and terminology mapping affect AI-supported public health work.</a:t>
-            </a:r>
-            <a:endParaRPr lang="en-US" sz="1700" dirty="0"/>
-          </a:p>
-        </p:txBody>
-      </p:sp>
-      <p:sp>
-        <p:nvSpPr>
-          <p:cNvPr id="11" name="Shape 9"/>
+              <a:t>This module teaches learners how laboratory data quality and terminology mapping affect AI-supported.</a:t>
+            </a:r>
+            <a:endParaRPr lang="en-US" sz="2100" dirty="0"/>
+          </a:p>
+        </p:txBody>
+      </p:sp>
+      <p:sp>
+        <p:nvSpPr>
+          <p:cNvPr id="12" name="Shape 10"/>
           <p:cNvSpPr/>
           <p:nvPr/>
         </p:nvSpPr>
@@ -13696,14 +14861,14 @@
       </p:sp>
       <p:sp>
         <p:nvSpPr>
-          <p:cNvPr id="12" name="Text 10"/>
+          <p:cNvPr id="13" name="Text 11"/>
           <p:cNvSpPr/>
           <p:nvPr/>
         </p:nvSpPr>
         <p:spPr>
           <a:xfrm>
             <a:off x="8074152" y="1563624"/>
-            <a:ext cx="2825496" cy="201168"/>
+            <a:ext cx="2825496" cy="256032"/>
           </a:xfrm>
           <a:prstGeom prst="rect">
             <a:avLst/>
@@ -13719,7 +14884,7 @@
               <a:buNone/>
             </a:pPr>
             <a:r>
-              <a:rPr lang="en-US" sz="950" b="1" dirty="0">
+              <a:rPr lang="en-US" sz="1300" b="1" dirty="0">
                 <a:solidFill>
                   <a:srgbClr val="0068B7"/>
                 </a:solidFill>
@@ -13729,20 +14894,20 @@
               </a:rPr>
               <a:t>Key idea</a:t>
             </a:r>
-            <a:endParaRPr lang="en-US" sz="950" dirty="0"/>
-          </a:p>
-        </p:txBody>
-      </p:sp>
-      <p:sp>
-        <p:nvSpPr>
-          <p:cNvPr id="13" name="Text 11"/>
-          <p:cNvSpPr/>
-          <p:nvPr/>
-        </p:nvSpPr>
-        <p:spPr>
-          <a:xfrm>
-            <a:off x="8074152" y="1856232"/>
-            <a:ext cx="2825496" cy="1261872"/>
+            <a:endParaRPr lang="en-US" sz="1300" dirty="0"/>
+          </a:p>
+        </p:txBody>
+      </p:sp>
+      <p:sp>
+        <p:nvSpPr>
+          <p:cNvPr id="14" name="Text 12"/>
+          <p:cNvSpPr/>
+          <p:nvPr/>
+        </p:nvSpPr>
+        <p:spPr>
+          <a:xfrm>
+            <a:off x="8074152" y="1920240"/>
+            <a:ext cx="2825496" cy="1188720"/>
           </a:xfrm>
           <a:prstGeom prst="rect">
             <a:avLst/>
@@ -13760,7 +14925,7 @@
               <a:buNone/>
             </a:pPr>
             <a:r>
-              <a:rPr lang="en-US" sz="1250" dirty="0">
+              <a:rPr lang="en-US" sz="1550" dirty="0">
                 <a:solidFill>
                   <a:srgbClr val="17364A"/>
                 </a:solidFill>
@@ -13768,15 +14933,15 @@
                 <a:ea typeface="Aptos" pitchFamily="34" charset="-122"/>
                 <a:cs typeface="Aptos" pitchFamily="34" charset="-120"/>
               </a:rPr>
-              <a:t>Electronic laboratory reporting supplies critical evidence for infectious disease surveillance, outbreak detection, case.</a:t>
-            </a:r>
-            <a:endParaRPr lang="en-US" sz="1250" dirty="0"/>
-          </a:p>
-        </p:txBody>
-      </p:sp>
-      <p:sp>
-        <p:nvSpPr>
-          <p:cNvPr id="14" name="Shape 12"/>
+              <a:t>Electronic laboratory reporting supplies critical evidence for infectious disease surveillance,.</a:t>
+            </a:r>
+            <a:endParaRPr lang="en-US" sz="1550" dirty="0"/>
+          </a:p>
+        </p:txBody>
+      </p:sp>
+      <p:sp>
+        <p:nvSpPr>
+          <p:cNvPr id="15" name="Shape 13"/>
           <p:cNvSpPr/>
           <p:nvPr/>
         </p:nvSpPr>
@@ -13803,14 +14968,14 @@
       </p:sp>
       <p:sp>
         <p:nvSpPr>
-          <p:cNvPr id="15" name="Text 13"/>
+          <p:cNvPr id="16" name="Text 14"/>
           <p:cNvSpPr/>
           <p:nvPr/>
         </p:nvSpPr>
         <p:spPr>
           <a:xfrm>
             <a:off x="8074152" y="3666744"/>
-            <a:ext cx="2825496" cy="201168"/>
+            <a:ext cx="2825496" cy="256032"/>
           </a:xfrm>
           <a:prstGeom prst="rect">
             <a:avLst/>
@@ -13826,7 +14991,7 @@
               <a:buNone/>
             </a:pPr>
             <a:r>
-              <a:rPr lang="en-US" sz="950" b="1" dirty="0">
+              <a:rPr lang="en-US" sz="1300" b="1" dirty="0">
                 <a:solidFill>
                   <a:srgbClr val="0068B7"/>
                 </a:solidFill>
@@ -13836,20 +15001,20 @@
               </a:rPr>
               <a:t>Use this for</a:t>
             </a:r>
-            <a:endParaRPr lang="en-US" sz="950" dirty="0"/>
-          </a:p>
-        </p:txBody>
-      </p:sp>
-      <p:sp>
-        <p:nvSpPr>
-          <p:cNvPr id="16" name="Text 14"/>
-          <p:cNvSpPr/>
-          <p:nvPr/>
-        </p:nvSpPr>
-        <p:spPr>
-          <a:xfrm>
-            <a:off x="8074152" y="3959352"/>
-            <a:ext cx="2825496" cy="1170432"/>
+            <a:endParaRPr lang="en-US" sz="1300" dirty="0"/>
+          </a:p>
+        </p:txBody>
+      </p:sp>
+      <p:sp>
+        <p:nvSpPr>
+          <p:cNvPr id="17" name="Text 15"/>
+          <p:cNvSpPr/>
+          <p:nvPr/>
+        </p:nvSpPr>
+        <p:spPr>
+          <a:xfrm>
+            <a:off x="8074152" y="4023360"/>
+            <a:ext cx="2825496" cy="1097280"/>
           </a:xfrm>
           <a:prstGeom prst="rect">
             <a:avLst/>
@@ -13867,7 +15032,7 @@
               <a:buNone/>
             </a:pPr>
             <a:r>
-              <a:rPr lang="en-US" sz="1250" dirty="0">
+              <a:rPr lang="en-US" sz="1550" dirty="0">
                 <a:solidFill>
                   <a:srgbClr val="17364A"/>
                 </a:solidFill>
@@ -13877,7 +15042,7 @@
               </a:rPr>
               <a:t>Connect the concept to public health decisions, safeguards, documentation, or implementation work.</a:t>
             </a:r>
-            <a:endParaRPr lang="en-US" sz="1250" dirty="0"/>
+            <a:endParaRPr lang="en-US" sz="1550" dirty="0"/>
           </a:p>
         </p:txBody>
       </p:sp>
@@ -14074,7 +15239,7 @@
                 <a:ea typeface="Aptos" pitchFamily="34" charset="-122"/>
                 <a:cs typeface="Aptos" pitchFamily="34" charset="-120"/>
               </a:rPr>
-              <a:t>© Paula Soper</a:t>
+              <a:t>Â© Paula Soper</a:t>
             </a:r>
             <a:endParaRPr lang="en-US" sz="800" dirty="0"/>
           </a:p>
@@ -14082,7 +15247,46 @@
       </p:sp>
       <p:sp>
         <p:nvSpPr>
-          <p:cNvPr id="7" name="Shape 5"/>
+          <p:cNvPr id="7" name="Text 5"/>
+          <p:cNvSpPr/>
+          <p:nvPr/>
+        </p:nvSpPr>
+        <p:spPr>
+          <a:xfrm>
+            <a:off x="11137392" y="6510528"/>
+            <a:ext cx="411480" cy="201168"/>
+          </a:xfrm>
+          <a:prstGeom prst="rect">
+            <a:avLst/>
+          </a:prstGeom>
+          <a:noFill/>
+          <a:ln/>
+        </p:spPr>
+        <p:txBody>
+          <a:bodyPr wrap="square" lIns="0" tIns="0" rIns="0" bIns="0" rtlCol="0" anchor="ctr"/>
+          <a:lstStyle/>
+          <a:p>
+            <a:pPr algn="r" indent="0" marL="0">
+              <a:buNone/>
+            </a:pPr>
+            <a:r>
+              <a:rPr lang="en-US" sz="900" dirty="0">
+                <a:solidFill>
+                  <a:srgbClr val="5F7181"/>
+                </a:solidFill>
+                <a:latin typeface="Aptos" pitchFamily="34" charset="0"/>
+                <a:ea typeface="Aptos" pitchFamily="34" charset="-122"/>
+                <a:cs typeface="Aptos" pitchFamily="34" charset="-120"/>
+              </a:rPr>
+              <a:t>7</a:t>
+            </a:r>
+            <a:endParaRPr lang="en-US" sz="900" dirty="0"/>
+          </a:p>
+        </p:txBody>
+      </p:sp>
+      <p:sp>
+        <p:nvSpPr>
+          <p:cNvPr id="8" name="Shape 6"/>
           <p:cNvSpPr/>
           <p:nvPr/>
         </p:nvSpPr>
@@ -14107,7 +15311,7 @@
       </p:sp>
       <p:sp>
         <p:nvSpPr>
-          <p:cNvPr id="8" name="Text 6"/>
+          <p:cNvPr id="9" name="Text 7"/>
           <p:cNvSpPr/>
           <p:nvPr/>
         </p:nvSpPr>
@@ -14146,14 +15350,14 @@
       </p:sp>
       <p:sp>
         <p:nvSpPr>
-          <p:cNvPr id="9" name="Text 7"/>
+          <p:cNvPr id="10" name="Text 8"/>
           <p:cNvSpPr/>
           <p:nvPr/>
         </p:nvSpPr>
         <p:spPr>
           <a:xfrm>
             <a:off x="640080" y="621792"/>
-            <a:ext cx="10881360" cy="566928"/>
+            <a:ext cx="10881360" cy="713232"/>
           </a:xfrm>
           <a:prstGeom prst="rect">
             <a:avLst/>
@@ -14171,7 +15375,7 @@
               <a:buNone/>
             </a:pPr>
             <a:r>
-              <a:rPr lang="en-US" sz="2700" b="1" dirty="0">
+              <a:rPr lang="en-US" sz="3400" b="1" dirty="0">
                 <a:solidFill>
                   <a:srgbClr val="003A63"/>
                 </a:solidFill>
@@ -14181,20 +15385,20 @@
               </a:rPr>
               <a:t>Jurisdiction and Agency Policy Note</a:t>
             </a:r>
-            <a:endParaRPr lang="en-US" sz="2700" dirty="0"/>
-          </a:p>
-        </p:txBody>
-      </p:sp>
-      <p:sp>
-        <p:nvSpPr>
-          <p:cNvPr id="10" name="Text 8"/>
-          <p:cNvSpPr/>
-          <p:nvPr/>
-        </p:nvSpPr>
-        <p:spPr>
-          <a:xfrm>
-            <a:off x="868680" y="1417320"/>
-            <a:ext cx="6675120" cy="4434840"/>
+            <a:endParaRPr lang="en-US" sz="3400" dirty="0"/>
+          </a:p>
+        </p:txBody>
+      </p:sp>
+      <p:sp>
+        <p:nvSpPr>
+          <p:cNvPr id="11" name="Text 9"/>
+          <p:cNvSpPr/>
+          <p:nvPr/>
+        </p:nvSpPr>
+        <p:spPr>
+          <a:xfrm>
+            <a:off x="868680" y="1508760"/>
+            <a:ext cx="6537960" cy="4160520"/>
           </a:xfrm>
           <a:prstGeom prst="rect">
             <a:avLst/>
@@ -14209,7 +15413,7 @@
           <a:lstStyle/>
           <a:p>
             <a:r>
-              <a:rPr lang="en-US" sz="1700" dirty="0">
+              <a:rPr lang="en-US" sz="2100" dirty="0">
                 <a:solidFill>
                   <a:srgbClr val="17364A"/>
                 </a:solidFill>
@@ -14219,11 +15423,11 @@
               </a:rPr>
               <a:t>This national-level module is intended for training and planning purposes.</a:t>
             </a:r>
-            <a:endParaRPr lang="en-US" sz="1700" dirty="0"/>
-          </a:p>
-          <a:p>
-            <a:r>
-              <a:rPr lang="en-US" sz="1700" dirty="0">
+            <a:endParaRPr lang="en-US" sz="2100" dirty="0"/>
+          </a:p>
+          <a:p>
+            <a:r>
+              <a:rPr lang="en-US" sz="2100" dirty="0">
                 <a:solidFill>
                   <a:srgbClr val="17364A"/>
                 </a:solidFill>
@@ -14233,11 +15437,11 @@
               </a:rPr>
               <a:t>It does not replace legal, privacy, procurement, civil rights, records, or agency policy review.</a:t>
             </a:r>
-            <a:endParaRPr lang="en-US" sz="1700" dirty="0"/>
-          </a:p>
-          <a:p>
-            <a:r>
-              <a:rPr lang="en-US" sz="1700" dirty="0">
+            <a:endParaRPr lang="en-US" sz="2100" dirty="0"/>
+          </a:p>
+          <a:p>
+            <a:r>
+              <a:rPr lang="en-US" sz="2100" dirty="0">
                 <a:solidFill>
                   <a:srgbClr val="17364A"/>
                 </a:solidFill>
@@ -14245,15 +15449,15 @@
                 <a:ea typeface="Aptos" pitchFamily="34" charset="-122"/>
                 <a:cs typeface="Aptos" pitchFamily="34" charset="-120"/>
               </a:rPr>
-              <a:t>Learners should confirm applicable requirements in their own jurisdiction and organization before implementing AI-supported.</a:t>
-            </a:r>
-            <a:endParaRPr lang="en-US" sz="1700" dirty="0"/>
-          </a:p>
-        </p:txBody>
-      </p:sp>
-      <p:sp>
-        <p:nvSpPr>
-          <p:cNvPr id="11" name="Shape 9"/>
+              <a:t>Learners should confirm applicable requirements in their own jurisdiction and organization before.</a:t>
+            </a:r>
+            <a:endParaRPr lang="en-US" sz="2100" dirty="0"/>
+          </a:p>
+        </p:txBody>
+      </p:sp>
+      <p:sp>
+        <p:nvSpPr>
+          <p:cNvPr id="12" name="Shape 10"/>
           <p:cNvSpPr/>
           <p:nvPr/>
         </p:nvSpPr>
@@ -14280,14 +15484,14 @@
       </p:sp>
       <p:sp>
         <p:nvSpPr>
-          <p:cNvPr id="12" name="Text 10"/>
+          <p:cNvPr id="13" name="Text 11"/>
           <p:cNvSpPr/>
           <p:nvPr/>
         </p:nvSpPr>
         <p:spPr>
           <a:xfrm>
             <a:off x="8074152" y="1563624"/>
-            <a:ext cx="2825496" cy="201168"/>
+            <a:ext cx="2825496" cy="256032"/>
           </a:xfrm>
           <a:prstGeom prst="rect">
             <a:avLst/>
@@ -14303,7 +15507,7 @@
               <a:buNone/>
             </a:pPr>
             <a:r>
-              <a:rPr lang="en-US" sz="950" b="1" dirty="0">
+              <a:rPr lang="en-US" sz="1300" b="1" dirty="0">
                 <a:solidFill>
                   <a:srgbClr val="0068B7"/>
                 </a:solidFill>
@@ -14313,20 +15517,20 @@
               </a:rPr>
               <a:t>Key idea</a:t>
             </a:r>
-            <a:endParaRPr lang="en-US" sz="950" dirty="0"/>
-          </a:p>
-        </p:txBody>
-      </p:sp>
-      <p:sp>
-        <p:nvSpPr>
-          <p:cNvPr id="13" name="Text 11"/>
-          <p:cNvSpPr/>
-          <p:nvPr/>
-        </p:nvSpPr>
-        <p:spPr>
-          <a:xfrm>
-            <a:off x="8074152" y="1856232"/>
-            <a:ext cx="2825496" cy="1261872"/>
+            <a:endParaRPr lang="en-US" sz="1300" dirty="0"/>
+          </a:p>
+        </p:txBody>
+      </p:sp>
+      <p:sp>
+        <p:nvSpPr>
+          <p:cNvPr id="14" name="Text 12"/>
+          <p:cNvSpPr/>
+          <p:nvPr/>
+        </p:nvSpPr>
+        <p:spPr>
+          <a:xfrm>
+            <a:off x="8074152" y="1920240"/>
+            <a:ext cx="2825496" cy="1188720"/>
           </a:xfrm>
           <a:prstGeom prst="rect">
             <a:avLst/>
@@ -14344,7 +15548,7 @@
               <a:buNone/>
             </a:pPr>
             <a:r>
-              <a:rPr lang="en-US" sz="1250" dirty="0">
+              <a:rPr lang="en-US" sz="1550" dirty="0">
                 <a:solidFill>
                   <a:srgbClr val="17364A"/>
                 </a:solidFill>
@@ -14354,13 +15558,13 @@
               </a:rPr>
               <a:t>This national-level module is intended for training and planning purposes.</a:t>
             </a:r>
-            <a:endParaRPr lang="en-US" sz="1250" dirty="0"/>
-          </a:p>
-        </p:txBody>
-      </p:sp>
-      <p:sp>
-        <p:nvSpPr>
-          <p:cNvPr id="14" name="Shape 12"/>
+            <a:endParaRPr lang="en-US" sz="1550" dirty="0"/>
+          </a:p>
+        </p:txBody>
+      </p:sp>
+      <p:sp>
+        <p:nvSpPr>
+          <p:cNvPr id="15" name="Shape 13"/>
           <p:cNvSpPr/>
           <p:nvPr/>
         </p:nvSpPr>
@@ -14387,14 +15591,14 @@
       </p:sp>
       <p:sp>
         <p:nvSpPr>
-          <p:cNvPr id="15" name="Text 13"/>
+          <p:cNvPr id="16" name="Text 14"/>
           <p:cNvSpPr/>
           <p:nvPr/>
         </p:nvSpPr>
         <p:spPr>
           <a:xfrm>
             <a:off x="8074152" y="3666744"/>
-            <a:ext cx="2825496" cy="201168"/>
+            <a:ext cx="2825496" cy="256032"/>
           </a:xfrm>
           <a:prstGeom prst="rect">
             <a:avLst/>
@@ -14410,7 +15614,7 @@
               <a:buNone/>
             </a:pPr>
             <a:r>
-              <a:rPr lang="en-US" sz="950" b="1" dirty="0">
+              <a:rPr lang="en-US" sz="1300" b="1" dirty="0">
                 <a:solidFill>
                   <a:srgbClr val="0068B7"/>
                 </a:solidFill>
@@ -14420,20 +15624,20 @@
               </a:rPr>
               <a:t>Use this for</a:t>
             </a:r>
-            <a:endParaRPr lang="en-US" sz="950" dirty="0"/>
-          </a:p>
-        </p:txBody>
-      </p:sp>
-      <p:sp>
-        <p:nvSpPr>
-          <p:cNvPr id="16" name="Text 14"/>
-          <p:cNvSpPr/>
-          <p:nvPr/>
-        </p:nvSpPr>
-        <p:spPr>
-          <a:xfrm>
-            <a:off x="8074152" y="3959352"/>
-            <a:ext cx="2825496" cy="1170432"/>
+            <a:endParaRPr lang="en-US" sz="1300" dirty="0"/>
+          </a:p>
+        </p:txBody>
+      </p:sp>
+      <p:sp>
+        <p:nvSpPr>
+          <p:cNvPr id="17" name="Text 15"/>
+          <p:cNvSpPr/>
+          <p:nvPr/>
+        </p:nvSpPr>
+        <p:spPr>
+          <a:xfrm>
+            <a:off x="8074152" y="4023360"/>
+            <a:ext cx="2825496" cy="1097280"/>
           </a:xfrm>
           <a:prstGeom prst="rect">
             <a:avLst/>
@@ -14451,7 +15655,7 @@
               <a:buNone/>
             </a:pPr>
             <a:r>
-              <a:rPr lang="en-US" sz="1250" dirty="0">
+              <a:rPr lang="en-US" sz="1550" dirty="0">
                 <a:solidFill>
                   <a:srgbClr val="17364A"/>
                 </a:solidFill>
@@ -14461,7 +15665,7 @@
               </a:rPr>
               <a:t>Connect the concept to public health decisions, safeguards, documentation, or implementation work.</a:t>
             </a:r>
-            <a:endParaRPr lang="en-US" sz="1250" dirty="0"/>
+            <a:endParaRPr lang="en-US" sz="1550" dirty="0"/>
           </a:p>
         </p:txBody>
       </p:sp>
@@ -14658,7 +15862,7 @@
                 <a:ea typeface="Aptos" pitchFamily="34" charset="-122"/>
                 <a:cs typeface="Aptos" pitchFamily="34" charset="-120"/>
               </a:rPr>
-              <a:t>© Paula Soper</a:t>
+              <a:t>Â© Paula Soper</a:t>
             </a:r>
             <a:endParaRPr lang="en-US" sz="800" dirty="0"/>
           </a:p>
@@ -14666,7 +15870,46 @@
       </p:sp>
       <p:sp>
         <p:nvSpPr>
-          <p:cNvPr id="7" name="Shape 5"/>
+          <p:cNvPr id="7" name="Text 5"/>
+          <p:cNvSpPr/>
+          <p:nvPr/>
+        </p:nvSpPr>
+        <p:spPr>
+          <a:xfrm>
+            <a:off x="11137392" y="6510528"/>
+            <a:ext cx="411480" cy="201168"/>
+          </a:xfrm>
+          <a:prstGeom prst="rect">
+            <a:avLst/>
+          </a:prstGeom>
+          <a:noFill/>
+          <a:ln/>
+        </p:spPr>
+        <p:txBody>
+          <a:bodyPr wrap="square" lIns="0" tIns="0" rIns="0" bIns="0" rtlCol="0" anchor="ctr"/>
+          <a:lstStyle/>
+          <a:p>
+            <a:pPr algn="r" indent="0" marL="0">
+              <a:buNone/>
+            </a:pPr>
+            <a:r>
+              <a:rPr lang="en-US" sz="900" dirty="0">
+                <a:solidFill>
+                  <a:srgbClr val="5F7181"/>
+                </a:solidFill>
+                <a:latin typeface="Aptos" pitchFamily="34" charset="0"/>
+                <a:ea typeface="Aptos" pitchFamily="34" charset="-122"/>
+                <a:cs typeface="Aptos" pitchFamily="34" charset="-120"/>
+              </a:rPr>
+              <a:t>8</a:t>
+            </a:r>
+            <a:endParaRPr lang="en-US" sz="900" dirty="0"/>
+          </a:p>
+        </p:txBody>
+      </p:sp>
+      <p:sp>
+        <p:nvSpPr>
+          <p:cNvPr id="8" name="Shape 6"/>
           <p:cNvSpPr/>
           <p:nvPr/>
         </p:nvSpPr>
@@ -14691,7 +15934,7 @@
       </p:sp>
       <p:sp>
         <p:nvSpPr>
-          <p:cNvPr id="8" name="Text 6"/>
+          <p:cNvPr id="9" name="Text 7"/>
           <p:cNvSpPr/>
           <p:nvPr/>
         </p:nvSpPr>
@@ -14730,14 +15973,14 @@
       </p:sp>
       <p:sp>
         <p:nvSpPr>
-          <p:cNvPr id="9" name="Text 7"/>
+          <p:cNvPr id="10" name="Text 8"/>
           <p:cNvSpPr/>
           <p:nvPr/>
         </p:nvSpPr>
         <p:spPr>
           <a:xfrm>
             <a:off x="640080" y="621792"/>
-            <a:ext cx="10881360" cy="566928"/>
+            <a:ext cx="10881360" cy="713232"/>
           </a:xfrm>
           <a:prstGeom prst="rect">
             <a:avLst/>
@@ -14755,7 +15998,7 @@
               <a:buNone/>
             </a:pPr>
             <a:r>
-              <a:rPr lang="en-US" sz="2700" b="1" dirty="0">
+              <a:rPr lang="en-US" sz="3400" b="1" dirty="0">
                 <a:solidFill>
                   <a:srgbClr val="003A63"/>
                 </a:solidFill>
@@ -14765,20 +16008,20 @@
               </a:rPr>
               <a:t>Why This Topic Matters for Public Health AI</a:t>
             </a:r>
-            <a:endParaRPr lang="en-US" sz="2700" dirty="0"/>
-          </a:p>
-        </p:txBody>
-      </p:sp>
-      <p:sp>
-        <p:nvSpPr>
-          <p:cNvPr id="10" name="Text 8"/>
-          <p:cNvSpPr/>
-          <p:nvPr/>
-        </p:nvSpPr>
-        <p:spPr>
-          <a:xfrm>
-            <a:off x="868680" y="1417320"/>
-            <a:ext cx="6675120" cy="4434840"/>
+            <a:endParaRPr lang="en-US" sz="3400" dirty="0"/>
+          </a:p>
+        </p:txBody>
+      </p:sp>
+      <p:sp>
+        <p:nvSpPr>
+          <p:cNvPr id="11" name="Text 9"/>
+          <p:cNvSpPr/>
+          <p:nvPr/>
+        </p:nvSpPr>
+        <p:spPr>
+          <a:xfrm>
+            <a:off x="868680" y="1508760"/>
+            <a:ext cx="6537960" cy="4160520"/>
           </a:xfrm>
           <a:prstGeom prst="rect">
             <a:avLst/>
@@ -14793,7 +16036,7 @@
           <a:lstStyle/>
           <a:p>
             <a:r>
-              <a:rPr lang="en-US" sz="1700" dirty="0">
+              <a:rPr lang="en-US" sz="2100" dirty="0">
                 <a:solidFill>
                   <a:srgbClr val="17364A"/>
                 </a:solidFill>
@@ -14801,13 +16044,13 @@
                 <a:ea typeface="Aptos" pitchFamily="34" charset="-122"/>
                 <a:cs typeface="Aptos" pitchFamily="34" charset="-120"/>
               </a:rPr>
-              <a:t>Laboratory data are often treated as objective because they come from tests and instruments, but the data that reach public.</a:t>
-            </a:r>
-            <a:endParaRPr lang="en-US" sz="1700" dirty="0"/>
-          </a:p>
-          <a:p>
-            <a:r>
-              <a:rPr lang="en-US" sz="1700" dirty="0">
+              <a:t>Laboratory data are often treated as objective because they come from tests and instruments, but the.</a:t>
+            </a:r>
+            <a:endParaRPr lang="en-US" sz="2100" dirty="0"/>
+          </a:p>
+          <a:p>
+            <a:r>
+              <a:rPr lang="en-US" sz="2100" dirty="0">
                 <a:solidFill>
                   <a:srgbClr val="17364A"/>
                 </a:solidFill>
@@ -14815,13 +16058,13 @@
                 <a:ea typeface="Aptos" pitchFamily="34" charset="-122"/>
                 <a:cs typeface="Aptos" pitchFamily="34" charset="-120"/>
               </a:rPr>
-              <a:t>A laboratory result can be difficult to use if the test code is local, the result is free text, the units are missing, the.</a:t>
-            </a:r>
-            <a:endParaRPr lang="en-US" sz="1700" dirty="0"/>
-          </a:p>
-          <a:p>
-            <a:r>
-              <a:rPr lang="en-US" sz="1700" dirty="0">
+              <a:t>A laboratory result can be difficult to use if the test code is local, the result is free text, the.</a:t>
+            </a:r>
+            <a:endParaRPr lang="en-US" sz="2100" dirty="0"/>
+          </a:p>
+          <a:p>
+            <a:r>
+              <a:rPr lang="en-US" sz="2100" dirty="0">
                 <a:solidFill>
                   <a:srgbClr val="17364A"/>
                 </a:solidFill>
@@ -14831,27 +16074,13 @@
               </a:rPr>
               <a:t>AI tools can magnify these problems by turning unclear data into confident summaries or classifications.</a:t>
             </a:r>
-            <a:endParaRPr lang="en-US" sz="1700" dirty="0"/>
-          </a:p>
-          <a:p>
-            <a:r>
-              <a:rPr lang="en-US" sz="1700" dirty="0">
-                <a:solidFill>
-                  <a:srgbClr val="17364A"/>
-                </a:solidFill>
-                <a:latin typeface="Aptos" pitchFamily="34" charset="0"/>
-                <a:ea typeface="Aptos" pitchFamily="34" charset="-122"/>
-                <a:cs typeface="Aptos" pitchFamily="34" charset="-120"/>
-              </a:rPr>
-              <a:t>Terminology mapping is central to reliable public health interpretation.</a:t>
-            </a:r>
-            <a:endParaRPr lang="en-US" sz="1700" dirty="0"/>
-          </a:p>
-        </p:txBody>
-      </p:sp>
-      <p:sp>
-        <p:nvSpPr>
-          <p:cNvPr id="11" name="Shape 9"/>
+            <a:endParaRPr lang="en-US" sz="2100" dirty="0"/>
+          </a:p>
+        </p:txBody>
+      </p:sp>
+      <p:sp>
+        <p:nvSpPr>
+          <p:cNvPr id="12" name="Shape 10"/>
           <p:cNvSpPr/>
           <p:nvPr/>
         </p:nvSpPr>
@@ -14878,14 +16107,14 @@
       </p:sp>
       <p:sp>
         <p:nvSpPr>
-          <p:cNvPr id="12" name="Text 10"/>
+          <p:cNvPr id="13" name="Text 11"/>
           <p:cNvSpPr/>
           <p:nvPr/>
         </p:nvSpPr>
         <p:spPr>
           <a:xfrm>
             <a:off x="8074152" y="1563624"/>
-            <a:ext cx="2825496" cy="201168"/>
+            <a:ext cx="2825496" cy="256032"/>
           </a:xfrm>
           <a:prstGeom prst="rect">
             <a:avLst/>
@@ -14901,7 +16130,7 @@
               <a:buNone/>
             </a:pPr>
             <a:r>
-              <a:rPr lang="en-US" sz="950" b="1" dirty="0">
+              <a:rPr lang="en-US" sz="1300" b="1" dirty="0">
                 <a:solidFill>
                   <a:srgbClr val="0068B7"/>
                 </a:solidFill>
@@ -14911,20 +16140,20 @@
               </a:rPr>
               <a:t>Key idea</a:t>
             </a:r>
-            <a:endParaRPr lang="en-US" sz="950" dirty="0"/>
-          </a:p>
-        </p:txBody>
-      </p:sp>
-      <p:sp>
-        <p:nvSpPr>
-          <p:cNvPr id="13" name="Text 11"/>
-          <p:cNvSpPr/>
-          <p:nvPr/>
-        </p:nvSpPr>
-        <p:spPr>
-          <a:xfrm>
-            <a:off x="8074152" y="1856232"/>
-            <a:ext cx="2825496" cy="1261872"/>
+            <a:endParaRPr lang="en-US" sz="1300" dirty="0"/>
+          </a:p>
+        </p:txBody>
+      </p:sp>
+      <p:sp>
+        <p:nvSpPr>
+          <p:cNvPr id="14" name="Text 12"/>
+          <p:cNvSpPr/>
+          <p:nvPr/>
+        </p:nvSpPr>
+        <p:spPr>
+          <a:xfrm>
+            <a:off x="8074152" y="1920240"/>
+            <a:ext cx="2825496" cy="1188720"/>
           </a:xfrm>
           <a:prstGeom prst="rect">
             <a:avLst/>
@@ -14942,7 +16171,7 @@
               <a:buNone/>
             </a:pPr>
             <a:r>
-              <a:rPr lang="en-US" sz="1250" dirty="0">
+              <a:rPr lang="en-US" sz="1550" dirty="0">
                 <a:solidFill>
                   <a:srgbClr val="17364A"/>
                 </a:solidFill>
@@ -14950,15 +16179,15 @@
                 <a:ea typeface="Aptos" pitchFamily="34" charset="-122"/>
                 <a:cs typeface="Aptos" pitchFamily="34" charset="-120"/>
               </a:rPr>
-              <a:t>Laboratory data are often treated as objective because they come from tests and instruments, but the data that reach public.</a:t>
-            </a:r>
-            <a:endParaRPr lang="en-US" sz="1250" dirty="0"/>
-          </a:p>
-        </p:txBody>
-      </p:sp>
-      <p:sp>
-        <p:nvSpPr>
-          <p:cNvPr id="14" name="Shape 12"/>
+              <a:t>Laboratory data are often treated as objective because they come from tests and instruments, but the.</a:t>
+            </a:r>
+            <a:endParaRPr lang="en-US" sz="1550" dirty="0"/>
+          </a:p>
+        </p:txBody>
+      </p:sp>
+      <p:sp>
+        <p:nvSpPr>
+          <p:cNvPr id="15" name="Shape 13"/>
           <p:cNvSpPr/>
           <p:nvPr/>
         </p:nvSpPr>
@@ -14985,14 +16214,14 @@
       </p:sp>
       <p:sp>
         <p:nvSpPr>
-          <p:cNvPr id="15" name="Text 13"/>
+          <p:cNvPr id="16" name="Text 14"/>
           <p:cNvSpPr/>
           <p:nvPr/>
         </p:nvSpPr>
         <p:spPr>
           <a:xfrm>
             <a:off x="8074152" y="3666744"/>
-            <a:ext cx="2825496" cy="201168"/>
+            <a:ext cx="2825496" cy="256032"/>
           </a:xfrm>
           <a:prstGeom prst="rect">
             <a:avLst/>
@@ -15008,7 +16237,7 @@
               <a:buNone/>
             </a:pPr>
             <a:r>
-              <a:rPr lang="en-US" sz="950" b="1" dirty="0">
+              <a:rPr lang="en-US" sz="1300" b="1" dirty="0">
                 <a:solidFill>
                   <a:srgbClr val="0068B7"/>
                 </a:solidFill>
@@ -15018,20 +16247,20 @@
               </a:rPr>
               <a:t>Use this for</a:t>
             </a:r>
-            <a:endParaRPr lang="en-US" sz="950" dirty="0"/>
-          </a:p>
-        </p:txBody>
-      </p:sp>
-      <p:sp>
-        <p:nvSpPr>
-          <p:cNvPr id="16" name="Text 14"/>
-          <p:cNvSpPr/>
-          <p:nvPr/>
-        </p:nvSpPr>
-        <p:spPr>
-          <a:xfrm>
-            <a:off x="8074152" y="3959352"/>
-            <a:ext cx="2825496" cy="1170432"/>
+            <a:endParaRPr lang="en-US" sz="1300" dirty="0"/>
+          </a:p>
+        </p:txBody>
+      </p:sp>
+      <p:sp>
+        <p:nvSpPr>
+          <p:cNvPr id="17" name="Text 15"/>
+          <p:cNvSpPr/>
+          <p:nvPr/>
+        </p:nvSpPr>
+        <p:spPr>
+          <a:xfrm>
+            <a:off x="8074152" y="4023360"/>
+            <a:ext cx="2825496" cy="1097280"/>
           </a:xfrm>
           <a:prstGeom prst="rect">
             <a:avLst/>
@@ -15049,7 +16278,7 @@
               <a:buNone/>
             </a:pPr>
             <a:r>
-              <a:rPr lang="en-US" sz="1250" dirty="0">
+              <a:rPr lang="en-US" sz="1550" dirty="0">
                 <a:solidFill>
                   <a:srgbClr val="17364A"/>
                 </a:solidFill>
@@ -15059,7 +16288,7 @@
               </a:rPr>
               <a:t>Connect the concept to public health decisions, safeguards, documentation, or implementation work.</a:t>
             </a:r>
-            <a:endParaRPr lang="en-US" sz="1250" dirty="0"/>
+            <a:endParaRPr lang="en-US" sz="1550" dirty="0"/>
           </a:p>
         </p:txBody>
       </p:sp>
@@ -15256,7 +16485,7 @@
                 <a:ea typeface="Aptos" pitchFamily="34" charset="-122"/>
                 <a:cs typeface="Aptos" pitchFamily="34" charset="-120"/>
               </a:rPr>
-              <a:t>© Paula Soper</a:t>
+              <a:t>Â© Paula Soper</a:t>
             </a:r>
             <a:endParaRPr lang="en-US" sz="800" dirty="0"/>
           </a:p>
@@ -15264,7 +16493,46 @@
       </p:sp>
       <p:sp>
         <p:nvSpPr>
-          <p:cNvPr id="7" name="Shape 5"/>
+          <p:cNvPr id="7" name="Text 5"/>
+          <p:cNvSpPr/>
+          <p:nvPr/>
+        </p:nvSpPr>
+        <p:spPr>
+          <a:xfrm>
+            <a:off x="11137392" y="6510528"/>
+            <a:ext cx="411480" cy="201168"/>
+          </a:xfrm>
+          <a:prstGeom prst="rect">
+            <a:avLst/>
+          </a:prstGeom>
+          <a:noFill/>
+          <a:ln/>
+        </p:spPr>
+        <p:txBody>
+          <a:bodyPr wrap="square" lIns="0" tIns="0" rIns="0" bIns="0" rtlCol="0" anchor="ctr"/>
+          <a:lstStyle/>
+          <a:p>
+            <a:pPr algn="r" indent="0" marL="0">
+              <a:buNone/>
+            </a:pPr>
+            <a:r>
+              <a:rPr lang="en-US" sz="900" dirty="0">
+                <a:solidFill>
+                  <a:srgbClr val="5F7181"/>
+                </a:solidFill>
+                <a:latin typeface="Aptos" pitchFamily="34" charset="0"/>
+                <a:ea typeface="Aptos" pitchFamily="34" charset="-122"/>
+                <a:cs typeface="Aptos" pitchFamily="34" charset="-120"/>
+              </a:rPr>
+              <a:t>9</a:t>
+            </a:r>
+            <a:endParaRPr lang="en-US" sz="900" dirty="0"/>
+          </a:p>
+        </p:txBody>
+      </p:sp>
+      <p:sp>
+        <p:nvSpPr>
+          <p:cNvPr id="8" name="Shape 6"/>
           <p:cNvSpPr/>
           <p:nvPr/>
         </p:nvSpPr>
@@ -15289,7 +16557,7 @@
       </p:sp>
       <p:sp>
         <p:nvSpPr>
-          <p:cNvPr id="8" name="Text 6"/>
+          <p:cNvPr id="9" name="Text 7"/>
           <p:cNvSpPr/>
           <p:nvPr/>
         </p:nvSpPr>
@@ -15328,14 +16596,14 @@
       </p:sp>
       <p:sp>
         <p:nvSpPr>
-          <p:cNvPr id="9" name="Text 7"/>
+          <p:cNvPr id="10" name="Text 8"/>
           <p:cNvSpPr/>
           <p:nvPr/>
         </p:nvSpPr>
         <p:spPr>
           <a:xfrm>
             <a:off x="640080" y="621792"/>
-            <a:ext cx="10881360" cy="566928"/>
+            <a:ext cx="10881360" cy="713232"/>
           </a:xfrm>
           <a:prstGeom prst="rect">
             <a:avLst/>
@@ -15353,7 +16621,7 @@
               <a:buNone/>
             </a:pPr>
             <a:r>
-              <a:rPr lang="en-US" sz="2700" b="1" dirty="0">
+              <a:rPr lang="en-US" sz="3400" b="1" dirty="0">
                 <a:solidFill>
                   <a:srgbClr val="003A63"/>
                 </a:solidFill>
@@ -15363,20 +16631,20 @@
               </a:rPr>
               <a:t>Core Concepts</a:t>
             </a:r>
-            <a:endParaRPr lang="en-US" sz="2700" dirty="0"/>
-          </a:p>
-        </p:txBody>
-      </p:sp>
-      <p:sp>
-        <p:nvSpPr>
-          <p:cNvPr id="10" name="Text 8"/>
-          <p:cNvSpPr/>
-          <p:nvPr/>
-        </p:nvSpPr>
-        <p:spPr>
-          <a:xfrm>
-            <a:off x="868680" y="1417320"/>
-            <a:ext cx="6675120" cy="4434840"/>
+            <a:endParaRPr lang="en-US" sz="3400" dirty="0"/>
+          </a:p>
+        </p:txBody>
+      </p:sp>
+      <p:sp>
+        <p:nvSpPr>
+          <p:cNvPr id="11" name="Text 9"/>
+          <p:cNvSpPr/>
+          <p:nvPr/>
+        </p:nvSpPr>
+        <p:spPr>
+          <a:xfrm>
+            <a:off x="868680" y="1508760"/>
+            <a:ext cx="6537960" cy="4160520"/>
           </a:xfrm>
           <a:prstGeom prst="rect">
             <a:avLst/>
@@ -15391,7 +16659,7 @@
           <a:lstStyle/>
           <a:p>
             <a:r>
-              <a:rPr lang="en-US" sz="1700" dirty="0">
+              <a:rPr lang="en-US" sz="2100" dirty="0">
                 <a:solidFill>
                   <a:srgbClr val="17364A"/>
                 </a:solidFill>
@@ -15401,11 +16669,11 @@
               </a:rPr>
               <a:t>ELR.</a:t>
             </a:r>
-            <a:endParaRPr lang="en-US" sz="1700" dirty="0"/>
-          </a:p>
-          <a:p>
-            <a:r>
-              <a:rPr lang="en-US" sz="1700" dirty="0">
+            <a:endParaRPr lang="en-US" sz="2100" dirty="0"/>
+          </a:p>
+          <a:p>
+            <a:r>
+              <a:rPr lang="en-US" sz="2100" dirty="0">
                 <a:solidFill>
                   <a:srgbClr val="17364A"/>
                 </a:solidFill>
@@ -15413,13 +16681,13 @@
                 <a:ea typeface="Aptos" pitchFamily="34" charset="-122"/>
                 <a:cs typeface="Aptos" pitchFamily="34" charset="-120"/>
               </a:rPr>
-              <a:t>Electronic Laboratory Reporting is the electronic transmission of laboratory reports to public health agencies.</a:t>
-            </a:r>
-            <a:endParaRPr lang="en-US" sz="1700" dirty="0"/>
-          </a:p>
-          <a:p>
-            <a:r>
-              <a:rPr lang="en-US" sz="1700" dirty="0">
+              <a:t>Electronic Laboratory Reporting is the electronic transmission of laboratory reports to public health.</a:t>
+            </a:r>
+            <a:endParaRPr lang="en-US" sz="2100" dirty="0"/>
+          </a:p>
+          <a:p>
+            <a:r>
+              <a:rPr lang="en-US" sz="2100" dirty="0">
                 <a:solidFill>
                   <a:srgbClr val="17364A"/>
                 </a:solidFill>
@@ -15427,29 +16695,15 @@
                 <a:ea typeface="Aptos" pitchFamily="34" charset="-122"/>
                 <a:cs typeface="Aptos" pitchFamily="34" charset="-120"/>
               </a:rPr>
-              <a:t>ELR can improve timeliness and completeness, but it requires interface onboarding, validation, monitoring, and data quality.</a:t>
-            </a:r>
-            <a:endParaRPr lang="en-US" sz="1700" dirty="0"/>
-          </a:p>
-          <a:p>
-            <a:r>
-              <a:rPr lang="en-US" sz="1700" dirty="0">
-                <a:solidFill>
-                  <a:srgbClr val="17364A"/>
-                </a:solidFill>
-                <a:latin typeface="Aptos" pitchFamily="34" charset="0"/>
-                <a:ea typeface="Aptos" pitchFamily="34" charset="-122"/>
-                <a:cs typeface="Aptos" pitchFamily="34" charset="-120"/>
-              </a:rPr>
-              <a:t>LOINC.</a:t>
-            </a:r>
-            <a:endParaRPr lang="en-US" sz="1700" dirty="0"/>
-          </a:p>
-        </p:txBody>
-      </p:sp>
-      <p:sp>
-        <p:nvSpPr>
-          <p:cNvPr id="11" name="Shape 9"/>
+              <a:t>ELR can improve timeliness and completeness, but it requires interface onboarding, validation,.</a:t>
+            </a:r>
+            <a:endParaRPr lang="en-US" sz="2100" dirty="0"/>
+          </a:p>
+        </p:txBody>
+      </p:sp>
+      <p:sp>
+        <p:nvSpPr>
+          <p:cNvPr id="12" name="Shape 10"/>
           <p:cNvSpPr/>
           <p:nvPr/>
         </p:nvSpPr>
@@ -15476,14 +16730,14 @@
       </p:sp>
       <p:sp>
         <p:nvSpPr>
-          <p:cNvPr id="12" name="Text 10"/>
+          <p:cNvPr id="13" name="Text 11"/>
           <p:cNvSpPr/>
           <p:nvPr/>
         </p:nvSpPr>
         <p:spPr>
           <a:xfrm>
             <a:off x="8074152" y="1563624"/>
-            <a:ext cx="2825496" cy="201168"/>
+            <a:ext cx="2825496" cy="256032"/>
           </a:xfrm>
           <a:prstGeom prst="rect">
             <a:avLst/>
@@ -15499,7 +16753,7 @@
               <a:buNone/>
             </a:pPr>
             <a:r>
-              <a:rPr lang="en-US" sz="950" b="1" dirty="0">
+              <a:rPr lang="en-US" sz="1300" b="1" dirty="0">
                 <a:solidFill>
                   <a:srgbClr val="0068B7"/>
                 </a:solidFill>
@@ -15509,20 +16763,20 @@
               </a:rPr>
               <a:t>Key idea</a:t>
             </a:r>
-            <a:endParaRPr lang="en-US" sz="950" dirty="0"/>
-          </a:p>
-        </p:txBody>
-      </p:sp>
-      <p:sp>
-        <p:nvSpPr>
-          <p:cNvPr id="13" name="Text 11"/>
-          <p:cNvSpPr/>
-          <p:nvPr/>
-        </p:nvSpPr>
-        <p:spPr>
-          <a:xfrm>
-            <a:off x="8074152" y="1856232"/>
-            <a:ext cx="2825496" cy="1261872"/>
+            <a:endParaRPr lang="en-US" sz="1300" dirty="0"/>
+          </a:p>
+        </p:txBody>
+      </p:sp>
+      <p:sp>
+        <p:nvSpPr>
+          <p:cNvPr id="14" name="Text 12"/>
+          <p:cNvSpPr/>
+          <p:nvPr/>
+        </p:nvSpPr>
+        <p:spPr>
+          <a:xfrm>
+            <a:off x="8074152" y="1920240"/>
+            <a:ext cx="2825496" cy="1188720"/>
           </a:xfrm>
           <a:prstGeom prst="rect">
             <a:avLst/>
@@ -15540,7 +16794,7 @@
               <a:buNone/>
             </a:pPr>
             <a:r>
-              <a:rPr lang="en-US" sz="1250" dirty="0">
+              <a:rPr lang="en-US" sz="1550" dirty="0">
                 <a:solidFill>
                   <a:srgbClr val="17364A"/>
                 </a:solidFill>
@@ -15550,13 +16804,13 @@
               </a:rPr>
               <a:t>ELR.</a:t>
             </a:r>
-            <a:endParaRPr lang="en-US" sz="1250" dirty="0"/>
-          </a:p>
-        </p:txBody>
-      </p:sp>
-      <p:sp>
-        <p:nvSpPr>
-          <p:cNvPr id="14" name="Shape 12"/>
+            <a:endParaRPr lang="en-US" sz="1550" dirty="0"/>
+          </a:p>
+        </p:txBody>
+      </p:sp>
+      <p:sp>
+        <p:nvSpPr>
+          <p:cNvPr id="15" name="Shape 13"/>
           <p:cNvSpPr/>
           <p:nvPr/>
         </p:nvSpPr>
@@ -15583,14 +16837,14 @@
       </p:sp>
       <p:sp>
         <p:nvSpPr>
-          <p:cNvPr id="15" name="Text 13"/>
+          <p:cNvPr id="16" name="Text 14"/>
           <p:cNvSpPr/>
           <p:nvPr/>
         </p:nvSpPr>
         <p:spPr>
           <a:xfrm>
             <a:off x="8074152" y="3666744"/>
-            <a:ext cx="2825496" cy="201168"/>
+            <a:ext cx="2825496" cy="256032"/>
           </a:xfrm>
           <a:prstGeom prst="rect">
             <a:avLst/>
@@ -15606,7 +16860,7 @@
               <a:buNone/>
             </a:pPr>
             <a:r>
-              <a:rPr lang="en-US" sz="950" b="1" dirty="0">
+              <a:rPr lang="en-US" sz="1300" b="1" dirty="0">
                 <a:solidFill>
                   <a:srgbClr val="0068B7"/>
                 </a:solidFill>
@@ -15616,20 +16870,20 @@
               </a:rPr>
               <a:t>Use this for</a:t>
             </a:r>
-            <a:endParaRPr lang="en-US" sz="950" dirty="0"/>
-          </a:p>
-        </p:txBody>
-      </p:sp>
-      <p:sp>
-        <p:nvSpPr>
-          <p:cNvPr id="16" name="Text 14"/>
-          <p:cNvSpPr/>
-          <p:nvPr/>
-        </p:nvSpPr>
-        <p:spPr>
-          <a:xfrm>
-            <a:off x="8074152" y="3959352"/>
-            <a:ext cx="2825496" cy="1170432"/>
+            <a:endParaRPr lang="en-US" sz="1300" dirty="0"/>
+          </a:p>
+        </p:txBody>
+      </p:sp>
+      <p:sp>
+        <p:nvSpPr>
+          <p:cNvPr id="17" name="Text 15"/>
+          <p:cNvSpPr/>
+          <p:nvPr/>
+        </p:nvSpPr>
+        <p:spPr>
+          <a:xfrm>
+            <a:off x="8074152" y="4023360"/>
+            <a:ext cx="2825496" cy="1097280"/>
           </a:xfrm>
           <a:prstGeom prst="rect">
             <a:avLst/>
@@ -15647,7 +16901,7 @@
               <a:buNone/>
             </a:pPr>
             <a:r>
-              <a:rPr lang="en-US" sz="1250" dirty="0">
+              <a:rPr lang="en-US" sz="1550" dirty="0">
                 <a:solidFill>
                   <a:srgbClr val="17364A"/>
                 </a:solidFill>
@@ -15657,7 +16911,7 @@
               </a:rPr>
               <a:t>Connect the concept to public health decisions, safeguards, documentation, or implementation work.</a:t>
             </a:r>
-            <a:endParaRPr lang="en-US" sz="1250" dirty="0"/>
+            <a:endParaRPr lang="en-US" sz="1550" dirty="0"/>
           </a:p>
         </p:txBody>
       </p:sp>
